--- a/term-project-lstm-vs-transformer-agnews/deliverables/5_presentation_v2.pptx
+++ b/term-project-lstm-vs-transformer-agnews/deliverables/5_presentation_v2.pptx
@@ -2407,63 +2407,33 @@
             <a:endParaRPr lang="en-US" sz="1650" dirty="0"/>
           </a:p>
           <a:p>
-            <a:pPr lvl="1" indent="0" marL="0">
-              <a:buNone/>
-            </a:pPr>
-            <a:r>
-              <a:rPr lang="en-US" sz="1250" dirty="0">
-                <a:solidFill>
-                  <a:srgbClr val="1D4ED8"/>
-                </a:solidFill>
-                <a:latin typeface="Pretendard" pitchFamily="34" charset="0"/>
-                <a:ea typeface="Pretendard" pitchFamily="34" charset="-122"/>
-                <a:cs typeface="Pretendard" pitchFamily="34" charset="-120"/>
-              </a:rPr>
-              <a:t>●   </a:t>
-            </a:r>
-            <a:pPr lvl="1" indent="0" marL="0">
-              <a:lnSpc>
-                <a:spcPct val="120000"/>
-              </a:lnSpc>
-              <a:buNone/>
-            </a:pPr>
-            <a:r>
-              <a:rPr lang="en-US" sz="1500" b="1" dirty="0">
-                <a:solidFill>
-                  <a:srgbClr val="111827"/>
-                </a:solidFill>
-                <a:latin typeface="Pretendard" pitchFamily="34" charset="0"/>
-                <a:ea typeface="Pretendard" pitchFamily="34" charset="-122"/>
-                <a:cs typeface="Pretendard" pitchFamily="34" charset="-120"/>
-              </a:rPr>
-              <a:t>동일 조건에서 test accuracy 0.910 vs 0.833</a:t>
-            </a:r>
-            <a:pPr lvl="1" indent="0" marL="0">
-              <a:lnSpc>
-                <a:spcPct val="120000"/>
+            <a:pPr lvl="1" marL="457200" indent="-228600">
+              <a:lnSpc>
+                <a:spcPct val="125000"/>
               </a:lnSpc>
               <a:spcAft>
                 <a:spcPts val="500"/>
               </a:spcAft>
-              <a:buNone/>
-            </a:pPr>
-            <a:r>
-              <a:rPr lang="en-US" sz="1500" dirty="0">
-                <a:solidFill>
-                  <a:srgbClr val="374151"/>
-                </a:solidFill>
-                <a:latin typeface="Pretendard" pitchFamily="34" charset="0"/>
-                <a:ea typeface="Pretendard" pitchFamily="34" charset="-122"/>
-                <a:cs typeface="Pretendard" pitchFamily="34" charset="-120"/>
-              </a:rPr>
-              <a:t> (encoder 구조만 바꾼 통제된 비교)</a:t>
+              <a:buSzPct val="100000"/>
+              <a:buChar char="●"/>
+            </a:pPr>
+            <a:r>
+              <a:rPr lang="en-US" sz="1500" b="1" dirty="0">
+                <a:solidFill>
+                  <a:srgbClr val="111827"/>
+                </a:solidFill>
+                <a:latin typeface="Pretendard" pitchFamily="34" charset="0"/>
+                <a:ea typeface="Pretendard" pitchFamily="34" charset="-122"/>
+                <a:cs typeface="Pretendard" pitchFamily="34" charset="-120"/>
+              </a:rPr>
+              <a:t>동일 조건에서 test accuracy 0.910 vs 0.833 (encoder 구조만 바꾼 통제된 비교)</a:t>
             </a:r>
             <a:endParaRPr lang="en-US" sz="1650" dirty="0"/>
           </a:p>
           <a:p>
             <a:pPr indent="0" marL="0">
               <a:spcBef>
-                <a:spcPts val="1500"/>
+                <a:spcPts val="1400"/>
               </a:spcBef>
               <a:spcAft>
                 <a:spcPts val="700"/>
@@ -2484,63 +2454,33 @@
             <a:endParaRPr lang="en-US" sz="1650" dirty="0"/>
           </a:p>
           <a:p>
-            <a:pPr lvl="1" indent="0" marL="0">
-              <a:buNone/>
-            </a:pPr>
-            <a:r>
-              <a:rPr lang="en-US" sz="1250" dirty="0">
-                <a:solidFill>
-                  <a:srgbClr val="1D4ED8"/>
-                </a:solidFill>
-                <a:latin typeface="Pretendard" pitchFamily="34" charset="0"/>
-                <a:ea typeface="Pretendard" pitchFamily="34" charset="-122"/>
-                <a:cs typeface="Pretendard" pitchFamily="34" charset="-120"/>
-              </a:rPr>
-              <a:t>●   </a:t>
-            </a:r>
-            <a:pPr lvl="1" indent="0" marL="0">
-              <a:lnSpc>
-                <a:spcPct val="120000"/>
-              </a:lnSpc>
-              <a:buNone/>
-            </a:pPr>
-            <a:r>
-              <a:rPr lang="en-US" sz="1500" b="1" dirty="0">
-                <a:solidFill>
-                  <a:srgbClr val="111827"/>
-                </a:solidFill>
-                <a:latin typeface="Pretendard" pitchFamily="34" charset="0"/>
-                <a:ea typeface="Pretendard" pitchFamily="34" charset="-122"/>
-                <a:cs typeface="Pretendard" pitchFamily="34" charset="-120"/>
-              </a:rPr>
-              <a:t>generalization 차이</a:t>
-            </a:r>
-            <a:pPr lvl="1" indent="0" marL="0">
-              <a:lnSpc>
-                <a:spcPct val="120000"/>
+            <a:pPr lvl="1" marL="457200" indent="-228600">
+              <a:lnSpc>
+                <a:spcPct val="125000"/>
               </a:lnSpc>
               <a:spcAft>
                 <a:spcPts val="500"/>
               </a:spcAft>
-              <a:buNone/>
-            </a:pPr>
-            <a:r>
-              <a:rPr lang="en-US" sz="1500" dirty="0">
-                <a:solidFill>
-                  <a:srgbClr val="374151"/>
-                </a:solidFill>
-                <a:latin typeface="Pretendard" pitchFamily="34" charset="0"/>
-                <a:ea typeface="Pretendard" pitchFamily="34" charset="-122"/>
-                <a:cs typeface="Pretendard" pitchFamily="34" charset="-120"/>
-              </a:rPr>
-              <a:t>: LSTM은 overfitting하여 25%에서 포화, Transformer는 안정적으로 확장</a:t>
+              <a:buSzPct val="100000"/>
+              <a:buChar char="●"/>
+            </a:pPr>
+            <a:r>
+              <a:rPr lang="en-US" sz="1500" b="1" dirty="0">
+                <a:solidFill>
+                  <a:srgbClr val="111827"/>
+                </a:solidFill>
+                <a:latin typeface="Pretendard" pitchFamily="34" charset="0"/>
+                <a:ea typeface="Pretendard" pitchFamily="34" charset="-122"/>
+                <a:cs typeface="Pretendard" pitchFamily="34" charset="-120"/>
+              </a:rPr>
+              <a:t>generalization 차이 : LSTM은 overfitting하여 25%에서 포화, Transformer는 안정적으로 확장</a:t>
             </a:r>
             <a:endParaRPr lang="en-US" sz="1650" dirty="0"/>
           </a:p>
           <a:p>
             <a:pPr indent="0" marL="0">
               <a:spcBef>
-                <a:spcPts val="1500"/>
+                <a:spcPts val="1400"/>
               </a:spcBef>
               <a:spcAft>
                 <a:spcPts val="700"/>
@@ -2561,63 +2501,33 @@
             <a:endParaRPr lang="en-US" sz="1650" dirty="0"/>
           </a:p>
           <a:p>
-            <a:pPr lvl="1" indent="0" marL="0">
-              <a:buNone/>
-            </a:pPr>
-            <a:r>
-              <a:rPr lang="en-US" sz="1250" dirty="0">
-                <a:solidFill>
-                  <a:srgbClr val="1D4ED8"/>
-                </a:solidFill>
-                <a:latin typeface="Pretendard" pitchFamily="34" charset="0"/>
-                <a:ea typeface="Pretendard" pitchFamily="34" charset="-122"/>
-                <a:cs typeface="Pretendard" pitchFamily="34" charset="-120"/>
-              </a:rPr>
-              <a:t>●   </a:t>
-            </a:r>
-            <a:pPr lvl="1" indent="0" marL="0">
-              <a:lnSpc>
-                <a:spcPct val="120000"/>
-              </a:lnSpc>
-              <a:buNone/>
-            </a:pPr>
-            <a:r>
-              <a:rPr lang="en-US" sz="1500" b="1" dirty="0">
-                <a:solidFill>
-                  <a:srgbClr val="111827"/>
-                </a:solidFill>
-                <a:latin typeface="Pretendard" pitchFamily="34" charset="0"/>
-                <a:ea typeface="Pretendard" pitchFamily="34" charset="-122"/>
-                <a:cs typeface="Pretendard" pitchFamily="34" charset="-120"/>
-              </a:rPr>
-              <a:t>bag-of-words</a:t>
-            </a:r>
-            <a:pPr lvl="1" indent="0" marL="0">
-              <a:lnSpc>
-                <a:spcPct val="120000"/>
+            <a:pPr lvl="1" marL="457200" indent="-228600">
+              <a:lnSpc>
+                <a:spcPct val="125000"/>
               </a:lnSpc>
               <a:spcAft>
                 <a:spcPts val="500"/>
               </a:spcAft>
-              <a:buNone/>
-            </a:pPr>
-            <a:r>
-              <a:rPr lang="en-US" sz="1500" dirty="0">
-                <a:solidFill>
-                  <a:srgbClr val="374151"/>
-                </a:solidFill>
-                <a:latin typeface="Pretendard" pitchFamily="34" charset="0"/>
-                <a:ea typeface="Pretendard" pitchFamily="34" charset="-122"/>
-                <a:cs typeface="Pretendard" pitchFamily="34" charset="-120"/>
-              </a:rPr>
-              <a:t>: positional encoding 제거해도 정확도 동일 → 격차는 순서가 아닌 robustness</a:t>
+              <a:buSzPct val="100000"/>
+              <a:buChar char="●"/>
+            </a:pPr>
+            <a:r>
+              <a:rPr lang="en-US" sz="1500" b="1" dirty="0">
+                <a:solidFill>
+                  <a:srgbClr val="111827"/>
+                </a:solidFill>
+                <a:latin typeface="Pretendard" pitchFamily="34" charset="0"/>
+                <a:ea typeface="Pretendard" pitchFamily="34" charset="-122"/>
+                <a:cs typeface="Pretendard" pitchFamily="34" charset="-120"/>
+              </a:rPr>
+              <a:t>bag-of-words : positional encoding 제거해도 정확도 동일 → 격차는 순서가 아닌 robustness</a:t>
             </a:r>
             <a:endParaRPr lang="en-US" sz="1650" dirty="0"/>
           </a:p>
           <a:p>
             <a:pPr indent="0" marL="0">
               <a:spcBef>
-                <a:spcPts val="1500"/>
+                <a:spcPts val="1400"/>
               </a:spcBef>
               <a:spcAft>
                 <a:spcPts val="700"/>
@@ -2638,28 +2548,15 @@
             <a:endParaRPr lang="en-US" sz="1650" dirty="0"/>
           </a:p>
           <a:p>
-            <a:pPr lvl="1" indent="0" marL="0">
-              <a:buNone/>
-            </a:pPr>
-            <a:r>
-              <a:rPr lang="en-US" sz="1250" dirty="0">
-                <a:solidFill>
-                  <a:srgbClr val="1D4ED8"/>
-                </a:solidFill>
-                <a:latin typeface="Pretendard" pitchFamily="34" charset="0"/>
-                <a:ea typeface="Pretendard" pitchFamily="34" charset="-122"/>
-                <a:cs typeface="Pretendard" pitchFamily="34" charset="-120"/>
-              </a:rPr>
-              <a:t>●   </a:t>
-            </a:r>
-            <a:pPr lvl="1" indent="0" marL="0">
-              <a:lnSpc>
-                <a:spcPct val="120000"/>
+            <a:pPr lvl="1" marL="457200" indent="-228600">
+              <a:lnSpc>
+                <a:spcPct val="125000"/>
               </a:lnSpc>
               <a:spcAft>
                 <a:spcPts val="500"/>
               </a:spcAft>
-              <a:buNone/>
+              <a:buSzPct val="100000"/>
+              <a:buChar char="●"/>
             </a:pPr>
             <a:r>
               <a:rPr lang="en-US" sz="1500" dirty="0">
@@ -2675,28 +2572,15 @@
             <a:endParaRPr lang="en-US" sz="1650" dirty="0"/>
           </a:p>
           <a:p>
-            <a:pPr lvl="1" indent="0" marL="0">
-              <a:buNone/>
-            </a:pPr>
-            <a:r>
-              <a:rPr lang="en-US" sz="1250" dirty="0">
-                <a:solidFill>
-                  <a:srgbClr val="1D4ED8"/>
-                </a:solidFill>
-                <a:latin typeface="Pretendard" pitchFamily="34" charset="0"/>
-                <a:ea typeface="Pretendard" pitchFamily="34" charset="-122"/>
-                <a:cs typeface="Pretendard" pitchFamily="34" charset="-120"/>
-              </a:rPr>
-              <a:t>●   </a:t>
-            </a:r>
-            <a:pPr lvl="1" indent="0" marL="0">
-              <a:lnSpc>
-                <a:spcPct val="120000"/>
+            <a:pPr lvl="1" marL="457200" indent="-228600">
+              <a:lnSpc>
+                <a:spcPct val="125000"/>
               </a:lnSpc>
               <a:spcAft>
                 <a:spcPts val="500"/>
               </a:spcAft>
-              <a:buNone/>
+              <a:buSzPct val="100000"/>
+              <a:buChar char="●"/>
             </a:pPr>
             <a:r>
               <a:rPr lang="en-US" sz="1500" dirty="0">
@@ -3024,82 +2908,39 @@
             <a:endParaRPr lang="en-US" sz="1650" dirty="0"/>
           </a:p>
           <a:p>
-            <a:pPr lvl="1" indent="0" marL="0">
-              <a:buNone/>
-            </a:pPr>
-            <a:r>
-              <a:rPr lang="en-US" sz="1250" dirty="0">
-                <a:solidFill>
-                  <a:srgbClr val="1D4ED8"/>
-                </a:solidFill>
-                <a:latin typeface="Pretendard" pitchFamily="34" charset="0"/>
-                <a:ea typeface="Pretendard" pitchFamily="34" charset="-122"/>
-                <a:cs typeface="Pretendard" pitchFamily="34" charset="-120"/>
-              </a:rPr>
-              <a:t>●   </a:t>
-            </a:r>
-            <a:pPr lvl="1" indent="0" marL="0">
-              <a:lnSpc>
-                <a:spcPct val="120000"/>
-              </a:lnSpc>
-              <a:buNone/>
-            </a:pPr>
-            <a:r>
-              <a:rPr lang="en-US" sz="1500" b="1" dirty="0">
-                <a:solidFill>
-                  <a:srgbClr val="111827"/>
-                </a:solidFill>
-                <a:latin typeface="Pretendard" pitchFamily="34" charset="0"/>
-                <a:ea typeface="Pretendard" pitchFamily="34" charset="-122"/>
-                <a:cs typeface="Pretendard" pitchFamily="34" charset="-120"/>
-              </a:rPr>
-              <a:t>AG News 4-class 뉴스 주제 분류</a:t>
-            </a:r>
-            <a:pPr lvl="1" indent="0" marL="0">
-              <a:lnSpc>
-                <a:spcPct val="120000"/>
+            <a:pPr lvl="1" marL="457200" indent="-228600">
+              <a:lnSpc>
+                <a:spcPct val="125000"/>
               </a:lnSpc>
               <a:spcAft>
                 <a:spcPts val="500"/>
               </a:spcAft>
-              <a:buNone/>
-            </a:pPr>
-            <a:r>
-              <a:rPr lang="en-US" sz="1500" dirty="0">
-                <a:solidFill>
-                  <a:srgbClr val="374151"/>
-                </a:solidFill>
-                <a:latin typeface="Pretendard" pitchFamily="34" charset="0"/>
-                <a:ea typeface="Pretendard" pitchFamily="34" charset="-122"/>
-                <a:cs typeface="Pretendard" pitchFamily="34" charset="-120"/>
-              </a:rPr>
-              <a:t> (World·Sports·Business·Sci-Tech)</a:t>
+              <a:buSzPct val="100000"/>
+              <a:buChar char="●"/>
+            </a:pPr>
+            <a:r>
+              <a:rPr lang="en-US" sz="1500" b="1" dirty="0">
+                <a:solidFill>
+                  <a:srgbClr val="111827"/>
+                </a:solidFill>
+                <a:latin typeface="Pretendard" pitchFamily="34" charset="0"/>
+                <a:ea typeface="Pretendard" pitchFamily="34" charset="-122"/>
+                <a:cs typeface="Pretendard" pitchFamily="34" charset="-120"/>
+              </a:rPr>
+              <a:t>AG News 4-class 뉴스 주제 분류 (World·Sports·Business·Sci-Tech)</a:t>
             </a:r>
             <a:endParaRPr lang="en-US" sz="1650" dirty="0"/>
           </a:p>
           <a:p>
-            <a:pPr lvl="1" indent="0" marL="0">
-              <a:buNone/>
-            </a:pPr>
-            <a:r>
-              <a:rPr lang="en-US" sz="1250" dirty="0">
-                <a:solidFill>
-                  <a:srgbClr val="1D4ED8"/>
-                </a:solidFill>
-                <a:latin typeface="Pretendard" pitchFamily="34" charset="0"/>
-                <a:ea typeface="Pretendard" pitchFamily="34" charset="-122"/>
-                <a:cs typeface="Pretendard" pitchFamily="34" charset="-120"/>
-              </a:rPr>
-              <a:t>●   </a:t>
-            </a:r>
-            <a:pPr lvl="1" indent="0" marL="0">
-              <a:lnSpc>
-                <a:spcPct val="120000"/>
+            <a:pPr lvl="1" marL="457200" indent="-228600">
+              <a:lnSpc>
+                <a:spcPct val="125000"/>
               </a:lnSpc>
               <a:spcAft>
                 <a:spcPts val="500"/>
               </a:spcAft>
-              <a:buNone/>
+              <a:buSzPct val="100000"/>
+              <a:buChar char="●"/>
             </a:pPr>
             <a:r>
               <a:rPr lang="en-US" sz="1500" dirty="0">
@@ -3117,7 +2958,7 @@
           <a:p>
             <a:pPr indent="0" marL="0">
               <a:spcBef>
-                <a:spcPts val="1800"/>
+                <a:spcPts val="1500"/>
               </a:spcBef>
               <a:spcAft>
                 <a:spcPts val="700"/>
@@ -3138,82 +2979,39 @@
             <a:endParaRPr lang="en-US" sz="1650" dirty="0"/>
           </a:p>
           <a:p>
-            <a:pPr lvl="1" indent="0" marL="0">
-              <a:buNone/>
-            </a:pPr>
-            <a:r>
-              <a:rPr lang="en-US" sz="1250" dirty="0">
-                <a:solidFill>
-                  <a:srgbClr val="1D4ED8"/>
-                </a:solidFill>
-                <a:latin typeface="Pretendard" pitchFamily="34" charset="0"/>
-                <a:ea typeface="Pretendard" pitchFamily="34" charset="-122"/>
-                <a:cs typeface="Pretendard" pitchFamily="34" charset="-120"/>
-              </a:rPr>
-              <a:t>●   </a:t>
-            </a:r>
-            <a:pPr lvl="1" indent="0" marL="0">
-              <a:lnSpc>
-                <a:spcPct val="120000"/>
-              </a:lnSpc>
-              <a:buNone/>
-            </a:pPr>
-            <a:r>
-              <a:rPr lang="en-US" sz="1500" b="1" dirty="0">
-                <a:solidFill>
-                  <a:srgbClr val="111827"/>
-                </a:solidFill>
-                <a:latin typeface="Pretendard" pitchFamily="34" charset="0"/>
-                <a:ea typeface="Pretendard" pitchFamily="34" charset="-122"/>
-                <a:cs typeface="Pretendard" pitchFamily="34" charset="-120"/>
-              </a:rPr>
-              <a:t>데이터·전처리·어휘·시퀀스 길이·학습 예산</a:t>
-            </a:r>
-            <a:pPr lvl="1" indent="0" marL="0">
-              <a:lnSpc>
-                <a:spcPct val="120000"/>
+            <a:pPr lvl="1" marL="457200" indent="-228600">
+              <a:lnSpc>
+                <a:spcPct val="125000"/>
               </a:lnSpc>
               <a:spcAft>
                 <a:spcPts val="500"/>
               </a:spcAft>
-              <a:buNone/>
-            </a:pPr>
-            <a:r>
-              <a:rPr lang="en-US" sz="1500" dirty="0">
-                <a:solidFill>
-                  <a:srgbClr val="374151"/>
-                </a:solidFill>
-                <a:latin typeface="Pretendard" pitchFamily="34" charset="0"/>
-                <a:ea typeface="Pretendard" pitchFamily="34" charset="-122"/>
-                <a:cs typeface="Pretendard" pitchFamily="34" charset="-120"/>
-              </a:rPr>
-              <a:t>을 동일하게 고정</a:t>
+              <a:buSzPct val="100000"/>
+              <a:buChar char="●"/>
+            </a:pPr>
+            <a:r>
+              <a:rPr lang="en-US" sz="1500" b="1" dirty="0">
+                <a:solidFill>
+                  <a:srgbClr val="111827"/>
+                </a:solidFill>
+                <a:latin typeface="Pretendard" pitchFamily="34" charset="0"/>
+                <a:ea typeface="Pretendard" pitchFamily="34" charset="-122"/>
+                <a:cs typeface="Pretendard" pitchFamily="34" charset="-120"/>
+              </a:rPr>
+              <a:t>데이터·전처리·어휘·시퀀스 길이·학습 예산을 동일하게 고정</a:t>
             </a:r>
             <a:endParaRPr lang="en-US" sz="1650" dirty="0"/>
           </a:p>
           <a:p>
-            <a:pPr lvl="1" indent="0" marL="0">
-              <a:buNone/>
-            </a:pPr>
-            <a:r>
-              <a:rPr lang="en-US" sz="1250" dirty="0">
-                <a:solidFill>
-                  <a:srgbClr val="1D4ED8"/>
-                </a:solidFill>
-                <a:latin typeface="Pretendard" pitchFamily="34" charset="0"/>
-                <a:ea typeface="Pretendard" pitchFamily="34" charset="-122"/>
-                <a:cs typeface="Pretendard" pitchFamily="34" charset="-120"/>
-              </a:rPr>
-              <a:t>●   </a:t>
-            </a:r>
-            <a:pPr lvl="1" indent="0" marL="0">
-              <a:lnSpc>
-                <a:spcPct val="120000"/>
+            <a:pPr lvl="1" marL="457200" indent="-228600">
+              <a:lnSpc>
+                <a:spcPct val="125000"/>
               </a:lnSpc>
               <a:spcAft>
                 <a:spcPts val="500"/>
               </a:spcAft>
-              <a:buNone/>
+              <a:buSzPct val="100000"/>
+              <a:buChar char="●"/>
             </a:pPr>
             <a:r>
               <a:rPr lang="en-US" sz="1500" dirty="0">
@@ -3231,7 +3029,7 @@
           <a:p>
             <a:pPr indent="0" marL="0">
               <a:spcBef>
-                <a:spcPts val="1800"/>
+                <a:spcPts val="1500"/>
               </a:spcBef>
               <a:spcAft>
                 <a:spcPts val="700"/>
@@ -3252,28 +3050,15 @@
             <a:endParaRPr lang="en-US" sz="1650" dirty="0"/>
           </a:p>
           <a:p>
-            <a:pPr lvl="1" indent="0" marL="0">
-              <a:buNone/>
-            </a:pPr>
-            <a:r>
-              <a:rPr lang="en-US" sz="1250" dirty="0">
-                <a:solidFill>
-                  <a:srgbClr val="1D4ED8"/>
-                </a:solidFill>
-                <a:latin typeface="Pretendard" pitchFamily="34" charset="0"/>
-                <a:ea typeface="Pretendard" pitchFamily="34" charset="-122"/>
-                <a:cs typeface="Pretendard" pitchFamily="34" charset="-120"/>
-              </a:rPr>
-              <a:t>●   </a:t>
-            </a:r>
-            <a:pPr lvl="1" indent="0" marL="0">
-              <a:lnSpc>
-                <a:spcPct val="120000"/>
+            <a:pPr lvl="1" marL="457200" indent="-228600">
+              <a:lnSpc>
+                <a:spcPct val="125000"/>
               </a:lnSpc>
               <a:spcAft>
                 <a:spcPts val="500"/>
               </a:spcAft>
-              <a:buNone/>
+              <a:buSzPct val="100000"/>
+              <a:buChar char="●"/>
             </a:pPr>
             <a:r>
               <a:rPr lang="en-US" sz="1500" dirty="0">
@@ -3289,28 +3074,15 @@
             <a:endParaRPr lang="en-US" sz="1650" dirty="0"/>
           </a:p>
           <a:p>
-            <a:pPr lvl="1" indent="0" marL="0">
-              <a:buNone/>
-            </a:pPr>
-            <a:r>
-              <a:rPr lang="en-US" sz="1250" dirty="0">
-                <a:solidFill>
-                  <a:srgbClr val="1D4ED8"/>
-                </a:solidFill>
-                <a:latin typeface="Pretendard" pitchFamily="34" charset="0"/>
-                <a:ea typeface="Pretendard" pitchFamily="34" charset="-122"/>
-                <a:cs typeface="Pretendard" pitchFamily="34" charset="-120"/>
-              </a:rPr>
-              <a:t>●   </a:t>
-            </a:r>
-            <a:pPr lvl="1" indent="0" marL="0">
-              <a:lnSpc>
-                <a:spcPct val="120000"/>
+            <a:pPr lvl="1" marL="457200" indent="-228600">
+              <a:lnSpc>
+                <a:spcPct val="125000"/>
               </a:lnSpc>
               <a:spcAft>
                 <a:spcPts val="500"/>
               </a:spcAft>
-              <a:buNone/>
+              <a:buSzPct val="100000"/>
+              <a:buChar char="●"/>
             </a:pPr>
             <a:r>
               <a:rPr lang="en-US" sz="1500" dirty="0">
@@ -3638,28 +3410,15 @@
             <a:endParaRPr lang="en-US" sz="1650" dirty="0"/>
           </a:p>
           <a:p>
-            <a:pPr lvl="1" indent="0" marL="0">
-              <a:buNone/>
-            </a:pPr>
-            <a:r>
-              <a:rPr lang="en-US" sz="1250" dirty="0">
-                <a:solidFill>
-                  <a:srgbClr val="1D4ED8"/>
-                </a:solidFill>
-                <a:latin typeface="Pretendard" pitchFamily="34" charset="0"/>
-                <a:ea typeface="Pretendard" pitchFamily="34" charset="-122"/>
-                <a:cs typeface="Pretendard" pitchFamily="34" charset="-120"/>
-              </a:rPr>
-              <a:t>●   </a:t>
-            </a:r>
-            <a:pPr lvl="1" indent="0" marL="0">
-              <a:lnSpc>
-                <a:spcPct val="120000"/>
+            <a:pPr lvl="1" marL="457200" indent="-228600">
+              <a:lnSpc>
+                <a:spcPct val="125000"/>
               </a:lnSpc>
               <a:spcAft>
                 <a:spcPts val="500"/>
               </a:spcAft>
-              <a:buNone/>
+              <a:buSzPct val="100000"/>
+              <a:buChar char="●"/>
             </a:pPr>
             <a:r>
               <a:rPr lang="en-US" sz="1500" b="1" dirty="0">
@@ -3677,7 +3436,7 @@
           <a:p>
             <a:pPr indent="0" marL="0">
               <a:spcBef>
-                <a:spcPts val="1600"/>
+                <a:spcPts val="1400"/>
               </a:spcBef>
               <a:spcAft>
                 <a:spcPts val="700"/>
@@ -3698,82 +3457,39 @@
             <a:endParaRPr lang="en-US" sz="1650" dirty="0"/>
           </a:p>
           <a:p>
-            <a:pPr lvl="1" indent="0" marL="0">
-              <a:buNone/>
-            </a:pPr>
-            <a:r>
-              <a:rPr lang="en-US" sz="1250" dirty="0">
-                <a:solidFill>
-                  <a:srgbClr val="1D4ED8"/>
-                </a:solidFill>
-                <a:latin typeface="Pretendard" pitchFamily="34" charset="0"/>
-                <a:ea typeface="Pretendard" pitchFamily="34" charset="-122"/>
-                <a:cs typeface="Pretendard" pitchFamily="34" charset="-120"/>
-              </a:rPr>
-              <a:t>●   </a:t>
-            </a:r>
-            <a:pPr lvl="1" indent="0" marL="0">
-              <a:lnSpc>
-                <a:spcPct val="120000"/>
-              </a:lnSpc>
-              <a:buNone/>
-            </a:pPr>
-            <a:r>
-              <a:rPr lang="en-US" sz="1500" b="1" dirty="0">
-                <a:solidFill>
-                  <a:srgbClr val="111827"/>
-                </a:solidFill>
-                <a:latin typeface="Pretendard" pitchFamily="34" charset="0"/>
-                <a:ea typeface="Pretendard" pitchFamily="34" charset="-122"/>
-                <a:cs typeface="Pretendard" pitchFamily="34" charset="-120"/>
-              </a:rPr>
-              <a:t>World, Sports, Business, Sci-Tech</a:t>
-            </a:r>
-            <a:pPr lvl="1" indent="0" marL="0">
-              <a:lnSpc>
-                <a:spcPct val="120000"/>
+            <a:pPr lvl="1" marL="457200" indent="-228600">
+              <a:lnSpc>
+                <a:spcPct val="125000"/>
               </a:lnSpc>
               <a:spcAft>
                 <a:spcPts val="500"/>
               </a:spcAft>
-              <a:buNone/>
-            </a:pPr>
-            <a:r>
-              <a:rPr lang="en-US" sz="1500" dirty="0">
-                <a:solidFill>
-                  <a:srgbClr val="374151"/>
-                </a:solidFill>
-                <a:latin typeface="Pretendard" pitchFamily="34" charset="0"/>
-                <a:ea typeface="Pretendard" pitchFamily="34" charset="-122"/>
-                <a:cs typeface="Pretendard" pitchFamily="34" charset="-120"/>
-              </a:rPr>
-              <a:t> 4개, balanced</a:t>
+              <a:buSzPct val="100000"/>
+              <a:buChar char="●"/>
+            </a:pPr>
+            <a:r>
+              <a:rPr lang="en-US" sz="1500" b="1" dirty="0">
+                <a:solidFill>
+                  <a:srgbClr val="111827"/>
+                </a:solidFill>
+                <a:latin typeface="Pretendard" pitchFamily="34" charset="0"/>
+                <a:ea typeface="Pretendard" pitchFamily="34" charset="-122"/>
+                <a:cs typeface="Pretendard" pitchFamily="34" charset="-120"/>
+              </a:rPr>
+              <a:t>World, Sports, Business, Sci-Tech 4개, balanced</a:t>
             </a:r>
             <a:endParaRPr lang="en-US" sz="1650" dirty="0"/>
           </a:p>
           <a:p>
-            <a:pPr lvl="1" indent="0" marL="0">
-              <a:buNone/>
-            </a:pPr>
-            <a:r>
-              <a:rPr lang="en-US" sz="1250" dirty="0">
-                <a:solidFill>
-                  <a:srgbClr val="1D4ED8"/>
-                </a:solidFill>
-                <a:latin typeface="Pretendard" pitchFamily="34" charset="0"/>
-                <a:ea typeface="Pretendard" pitchFamily="34" charset="-122"/>
-                <a:cs typeface="Pretendard" pitchFamily="34" charset="-120"/>
-              </a:rPr>
-              <a:t>●   </a:t>
-            </a:r>
-            <a:pPr lvl="1" indent="0" marL="0">
-              <a:lnSpc>
-                <a:spcPct val="120000"/>
+            <a:pPr lvl="1" marL="457200" indent="-228600">
+              <a:lnSpc>
+                <a:spcPct val="125000"/>
               </a:lnSpc>
               <a:spcAft>
                 <a:spcPts val="500"/>
               </a:spcAft>
-              <a:buNone/>
+              <a:buSzPct val="100000"/>
+              <a:buChar char="●"/>
             </a:pPr>
             <a:r>
               <a:rPr lang="en-US" sz="1500" dirty="0">
@@ -3791,7 +3507,7 @@
           <a:p>
             <a:pPr indent="0" marL="0">
               <a:spcBef>
-                <a:spcPts val="1600"/>
+                <a:spcPts val="1400"/>
               </a:spcBef>
               <a:spcAft>
                 <a:spcPts val="700"/>
@@ -3812,28 +3528,15 @@
             <a:endParaRPr lang="en-US" sz="1650" dirty="0"/>
           </a:p>
           <a:p>
-            <a:pPr lvl="1" indent="0" marL="0">
-              <a:buNone/>
-            </a:pPr>
-            <a:r>
-              <a:rPr lang="en-US" sz="1250" dirty="0">
-                <a:solidFill>
-                  <a:srgbClr val="1D4ED8"/>
-                </a:solidFill>
-                <a:latin typeface="Pretendard" pitchFamily="34" charset="0"/>
-                <a:ea typeface="Pretendard" pitchFamily="34" charset="-122"/>
-                <a:cs typeface="Pretendard" pitchFamily="34" charset="-120"/>
-              </a:rPr>
-              <a:t>●   </a:t>
-            </a:r>
-            <a:pPr lvl="1" indent="0" marL="0">
-              <a:lnSpc>
-                <a:spcPct val="120000"/>
+            <a:pPr lvl="1" marL="457200" indent="-228600">
+              <a:lnSpc>
+                <a:spcPct val="125000"/>
               </a:lnSpc>
               <a:spcAft>
                 <a:spcPts val="500"/>
               </a:spcAft>
-              <a:buNone/>
+              <a:buSzPct val="100000"/>
+              <a:buChar char="●"/>
             </a:pPr>
             <a:r>
               <a:rPr lang="en-US" sz="1500" dirty="0">
@@ -3849,28 +3552,15 @@
             <a:endParaRPr lang="en-US" sz="1650" dirty="0"/>
           </a:p>
           <a:p>
-            <a:pPr lvl="1" indent="0" marL="0">
-              <a:buNone/>
-            </a:pPr>
-            <a:r>
-              <a:rPr lang="en-US" sz="1250" dirty="0">
-                <a:solidFill>
-                  <a:srgbClr val="1D4ED8"/>
-                </a:solidFill>
-                <a:latin typeface="Pretendard" pitchFamily="34" charset="0"/>
-                <a:ea typeface="Pretendard" pitchFamily="34" charset="-122"/>
-                <a:cs typeface="Pretendard" pitchFamily="34" charset="-120"/>
-              </a:rPr>
-              <a:t>●   </a:t>
-            </a:r>
-            <a:pPr lvl="1" indent="0" marL="0">
-              <a:lnSpc>
-                <a:spcPct val="120000"/>
+            <a:pPr lvl="1" marL="457200" indent="-228600">
+              <a:lnSpc>
+                <a:spcPct val="125000"/>
               </a:lnSpc>
               <a:spcAft>
                 <a:spcPts val="500"/>
               </a:spcAft>
-              <a:buNone/>
+              <a:buSzPct val="100000"/>
+              <a:buChar char="●"/>
             </a:pPr>
             <a:r>
               <a:rPr lang="en-US" sz="1500" dirty="0">
@@ -3886,28 +3576,15 @@
             <a:endParaRPr lang="en-US" sz="1650" dirty="0"/>
           </a:p>
           <a:p>
-            <a:pPr lvl="1" indent="0" marL="0">
-              <a:buNone/>
-            </a:pPr>
-            <a:r>
-              <a:rPr lang="en-US" sz="1250" dirty="0">
-                <a:solidFill>
-                  <a:srgbClr val="1D4ED8"/>
-                </a:solidFill>
-                <a:latin typeface="Pretendard" pitchFamily="34" charset="0"/>
-                <a:ea typeface="Pretendard" pitchFamily="34" charset="-122"/>
-                <a:cs typeface="Pretendard" pitchFamily="34" charset="-120"/>
-              </a:rPr>
-              <a:t>●   </a:t>
-            </a:r>
-            <a:pPr lvl="1" indent="0" marL="0">
-              <a:lnSpc>
-                <a:spcPct val="120000"/>
+            <a:pPr lvl="1" marL="457200" indent="-228600">
+              <a:lnSpc>
+                <a:spcPct val="125000"/>
               </a:lnSpc>
               <a:spcAft>
                 <a:spcPts val="500"/>
               </a:spcAft>
-              <a:buNone/>
+              <a:buSzPct val="100000"/>
+              <a:buChar char="●"/>
             </a:pPr>
             <a:r>
               <a:rPr lang="en-US" sz="1500" dirty="0">
@@ -4218,28 +3895,15 @@
             <a:endParaRPr lang="en-US" sz="1650" dirty="0"/>
           </a:p>
           <a:p>
-            <a:pPr lvl="1" indent="0" marL="0">
-              <a:buNone/>
-            </a:pPr>
-            <a:r>
-              <a:rPr lang="en-US" sz="1250" dirty="0">
-                <a:solidFill>
-                  <a:srgbClr val="1D4ED8"/>
-                </a:solidFill>
-                <a:latin typeface="Pretendard" pitchFamily="34" charset="0"/>
-                <a:ea typeface="Pretendard" pitchFamily="34" charset="-122"/>
-                <a:cs typeface="Pretendard" pitchFamily="34" charset="-120"/>
-              </a:rPr>
-              <a:t>●   </a:t>
-            </a:r>
-            <a:pPr lvl="1" indent="0" marL="0">
-              <a:lnSpc>
-                <a:spcPct val="120000"/>
+            <a:pPr lvl="1" marL="457200" indent="-228600">
+              <a:lnSpc>
+                <a:spcPct val="125000"/>
               </a:lnSpc>
               <a:spcAft>
                 <a:spcPts val="500"/>
               </a:spcAft>
-              <a:buNone/>
+              <a:buSzPct val="100000"/>
+              <a:buChar char="●"/>
             </a:pPr>
             <a:r>
               <a:rPr lang="en-US" sz="1500" b="1" dirty="0">
@@ -4255,28 +3919,15 @@
             <a:endParaRPr lang="en-US" sz="1650" dirty="0"/>
           </a:p>
           <a:p>
-            <a:pPr lvl="1" indent="0" marL="0">
-              <a:buNone/>
-            </a:pPr>
-            <a:r>
-              <a:rPr lang="en-US" sz="1250" dirty="0">
-                <a:solidFill>
-                  <a:srgbClr val="1D4ED8"/>
-                </a:solidFill>
-                <a:latin typeface="Pretendard" pitchFamily="34" charset="0"/>
-                <a:ea typeface="Pretendard" pitchFamily="34" charset="-122"/>
-                <a:cs typeface="Pretendard" pitchFamily="34" charset="-120"/>
-              </a:rPr>
-              <a:t>●   </a:t>
-            </a:r>
-            <a:pPr lvl="1" indent="0" marL="0">
-              <a:lnSpc>
-                <a:spcPct val="120000"/>
+            <a:pPr lvl="1" marL="457200" indent="-228600">
+              <a:lnSpc>
+                <a:spcPct val="125000"/>
               </a:lnSpc>
               <a:spcAft>
                 <a:spcPts val="500"/>
               </a:spcAft>
-              <a:buNone/>
+              <a:buSzPct val="100000"/>
+              <a:buChar char="●"/>
             </a:pPr>
             <a:r>
               <a:rPr lang="en-US" sz="1500" dirty="0">
@@ -4294,7 +3945,7 @@
           <a:p>
             <a:pPr indent="0" marL="0">
               <a:spcBef>
-                <a:spcPts val="1700"/>
+                <a:spcPts val="1500"/>
               </a:spcBef>
               <a:spcAft>
                 <a:spcPts val="700"/>
@@ -4315,45 +3966,15 @@
             <a:endParaRPr lang="en-US" sz="1650" dirty="0"/>
           </a:p>
           <a:p>
-            <a:pPr lvl="1" indent="0" marL="0">
-              <a:buNone/>
-            </a:pPr>
-            <a:r>
-              <a:rPr lang="en-US" sz="1250" dirty="0">
-                <a:solidFill>
-                  <a:srgbClr val="1D4ED8"/>
-                </a:solidFill>
-                <a:latin typeface="Pretendard" pitchFamily="34" charset="0"/>
-                <a:ea typeface="Pretendard" pitchFamily="34" charset="-122"/>
-                <a:cs typeface="Pretendard" pitchFamily="34" charset="-120"/>
-              </a:rPr>
-              <a:t>●   </a:t>
-            </a:r>
-            <a:pPr lvl="1" indent="0" marL="0">
-              <a:lnSpc>
-                <a:spcPct val="120000"/>
-              </a:lnSpc>
-              <a:buNone/>
-            </a:pPr>
-            <a:r>
-              <a:rPr lang="en-US" sz="1500" b="1" dirty="0">
-                <a:solidFill>
-                  <a:srgbClr val="111827"/>
-                </a:solidFill>
-                <a:latin typeface="Pretendard" pitchFamily="34" charset="0"/>
-                <a:ea typeface="Pretendard" pitchFamily="34" charset="-122"/>
-                <a:cs typeface="Pretendard" pitchFamily="34" charset="-120"/>
-              </a:rPr>
-              <a:t>LSTM   </a:t>
-            </a:r>
-            <a:pPr lvl="1" indent="0" marL="0">
-              <a:lnSpc>
-                <a:spcPct val="120000"/>
+            <a:pPr lvl="1" marL="457200" indent="-228600">
+              <a:lnSpc>
+                <a:spcPct val="125000"/>
               </a:lnSpc>
               <a:spcAft>
                 <a:spcPts val="500"/>
               </a:spcAft>
-              <a:buNone/>
+              <a:buSzPct val="100000"/>
+              <a:buChar char="●"/>
             </a:pPr>
             <a:r>
               <a:rPr lang="en-US" sz="1500" dirty="0">
@@ -4364,50 +3985,20 @@
                 <a:ea typeface="Pretendard" pitchFamily="34" charset="-122"/>
                 <a:cs typeface="Pretendard" pitchFamily="34" charset="-120"/>
               </a:rPr>
-              <a:t>bidirectional · 2 layers · hidden 128 / output 256 / params 3,220,484</a:t>
+              <a:t>LSTM : bidirectional · 2 layers · hidden 128 / output 256 / params 3,220,484</a:t>
             </a:r>
             <a:endParaRPr lang="en-US" sz="1650" dirty="0"/>
           </a:p>
           <a:p>
-            <a:pPr lvl="1" indent="0" marL="0">
-              <a:buNone/>
-            </a:pPr>
-            <a:r>
-              <a:rPr lang="en-US" sz="1250" dirty="0">
-                <a:solidFill>
-                  <a:srgbClr val="1D4ED8"/>
-                </a:solidFill>
-                <a:latin typeface="Pretendard" pitchFamily="34" charset="0"/>
-                <a:ea typeface="Pretendard" pitchFamily="34" charset="-122"/>
-                <a:cs typeface="Pretendard" pitchFamily="34" charset="-120"/>
-              </a:rPr>
-              <a:t>●   </a:t>
-            </a:r>
-            <a:pPr lvl="1" indent="0" marL="0">
-              <a:lnSpc>
-                <a:spcPct val="120000"/>
-              </a:lnSpc>
-              <a:buNone/>
-            </a:pPr>
-            <a:r>
-              <a:rPr lang="en-US" sz="1500" b="1" dirty="0">
-                <a:solidFill>
-                  <a:srgbClr val="111827"/>
-                </a:solidFill>
-                <a:latin typeface="Pretendard" pitchFamily="34" charset="0"/>
-                <a:ea typeface="Pretendard" pitchFamily="34" charset="-122"/>
-                <a:cs typeface="Pretendard" pitchFamily="34" charset="-120"/>
-              </a:rPr>
-              <a:t>Transformer   </a:t>
-            </a:r>
-            <a:pPr lvl="1" indent="0" marL="0">
-              <a:lnSpc>
-                <a:spcPct val="120000"/>
+            <a:pPr lvl="1" marL="457200" indent="-228600">
+              <a:lnSpc>
+                <a:spcPct val="125000"/>
               </a:lnSpc>
               <a:spcAft>
                 <a:spcPts val="500"/>
               </a:spcAft>
-              <a:buNone/>
+              <a:buSzPct val="100000"/>
+              <a:buChar char="●"/>
             </a:pPr>
             <a:r>
               <a:rPr lang="en-US" sz="1500" dirty="0">
@@ -4418,14 +4009,14 @@
                 <a:ea typeface="Pretendard" pitchFamily="34" charset="-122"/>
                 <a:cs typeface="Pretendard" pitchFamily="34" charset="-120"/>
               </a:rPr>
-              <a:t>2 layers · 4 heads · FFN 256 · sinusoidal PE / dim 128 / params 2,825,476</a:t>
+              <a:t>Transformer : 2 layers · 4 heads · FFN 256 · sinusoidal PE / dim 128 / params 2,825,476</a:t>
             </a:r>
             <a:endParaRPr lang="en-US" sz="1650" dirty="0"/>
           </a:p>
           <a:p>
             <a:pPr indent="0" marL="0">
               <a:spcBef>
-                <a:spcPts val="1700"/>
+                <a:spcPts val="1500"/>
               </a:spcBef>
               <a:spcAft>
                 <a:spcPts val="700"/>
@@ -4446,28 +4037,15 @@
             <a:endParaRPr lang="en-US" sz="1650" dirty="0"/>
           </a:p>
           <a:p>
-            <a:pPr lvl="1" indent="0" marL="0">
-              <a:buNone/>
-            </a:pPr>
-            <a:r>
-              <a:rPr lang="en-US" sz="1250" dirty="0">
-                <a:solidFill>
-                  <a:srgbClr val="1D4ED8"/>
-                </a:solidFill>
-                <a:latin typeface="Pretendard" pitchFamily="34" charset="0"/>
-                <a:ea typeface="Pretendard" pitchFamily="34" charset="-122"/>
-                <a:cs typeface="Pretendard" pitchFamily="34" charset="-120"/>
-              </a:rPr>
-              <a:t>●   </a:t>
-            </a:r>
-            <a:pPr lvl="1" indent="0" marL="0">
-              <a:lnSpc>
-                <a:spcPct val="120000"/>
+            <a:pPr lvl="1" marL="457200" indent="-228600">
+              <a:lnSpc>
+                <a:spcPct val="125000"/>
               </a:lnSpc>
               <a:spcAft>
                 <a:spcPts val="500"/>
               </a:spcAft>
-              <a:buNone/>
+              <a:buSzPct val="100000"/>
+              <a:buChar char="●"/>
             </a:pPr>
             <a:r>
               <a:rPr lang="en-US" sz="1500" dirty="0">
@@ -4795,28 +4373,15 @@
             <a:endParaRPr lang="en-US" sz="1650" dirty="0"/>
           </a:p>
           <a:p>
-            <a:pPr lvl="1" indent="0" marL="0">
-              <a:buNone/>
-            </a:pPr>
-            <a:r>
-              <a:rPr lang="en-US" sz="1250" dirty="0">
-                <a:solidFill>
-                  <a:srgbClr val="1D4ED8"/>
-                </a:solidFill>
-                <a:latin typeface="Pretendard" pitchFamily="34" charset="0"/>
-                <a:ea typeface="Pretendard" pitchFamily="34" charset="-122"/>
-                <a:cs typeface="Pretendard" pitchFamily="34" charset="-120"/>
-              </a:rPr>
-              <a:t>●   </a:t>
-            </a:r>
-            <a:pPr lvl="1" indent="0" marL="0">
-              <a:lnSpc>
-                <a:spcPct val="120000"/>
+            <a:pPr lvl="1" marL="457200" indent="-228600">
+              <a:lnSpc>
+                <a:spcPct val="125000"/>
               </a:lnSpc>
               <a:spcAft>
                 <a:spcPts val="500"/>
               </a:spcAft>
-              <a:buNone/>
+              <a:buSzPct val="100000"/>
+              <a:buChar char="●"/>
             </a:pPr>
             <a:r>
               <a:rPr lang="en-US" sz="1500" dirty="0">
@@ -4832,28 +4397,15 @@
             <a:endParaRPr lang="en-US" sz="1650" dirty="0"/>
           </a:p>
           <a:p>
-            <a:pPr lvl="1" indent="0" marL="0">
-              <a:buNone/>
-            </a:pPr>
-            <a:r>
-              <a:rPr lang="en-US" sz="1250" dirty="0">
-                <a:solidFill>
-                  <a:srgbClr val="1D4ED8"/>
-                </a:solidFill>
-                <a:latin typeface="Pretendard" pitchFamily="34" charset="0"/>
-                <a:ea typeface="Pretendard" pitchFamily="34" charset="-122"/>
-                <a:cs typeface="Pretendard" pitchFamily="34" charset="-120"/>
-              </a:rPr>
-              <a:t>●   </a:t>
-            </a:r>
-            <a:pPr lvl="1" indent="0" marL="0">
-              <a:lnSpc>
-                <a:spcPct val="120000"/>
+            <a:pPr lvl="1" marL="457200" indent="-228600">
+              <a:lnSpc>
+                <a:spcPct val="125000"/>
               </a:lnSpc>
               <a:spcAft>
                 <a:spcPts val="500"/>
               </a:spcAft>
-              <a:buNone/>
+              <a:buSzPct val="100000"/>
+              <a:buChar char="●"/>
             </a:pPr>
             <a:r>
               <a:rPr lang="en-US" sz="1500" dirty="0">
@@ -4871,7 +4423,7 @@
           <a:p>
             <a:pPr indent="0" marL="0">
               <a:spcBef>
-                <a:spcPts val="1600"/>
+                <a:spcPts val="1400"/>
               </a:spcBef>
               <a:spcAft>
                 <a:spcPts val="700"/>
@@ -4892,28 +4444,15 @@
             <a:endParaRPr lang="en-US" sz="1650" dirty="0"/>
           </a:p>
           <a:p>
-            <a:pPr lvl="1" indent="0" marL="0">
-              <a:buNone/>
-            </a:pPr>
-            <a:r>
-              <a:rPr lang="en-US" sz="1250" dirty="0">
-                <a:solidFill>
-                  <a:srgbClr val="1D4ED8"/>
-                </a:solidFill>
-                <a:latin typeface="Pretendard" pitchFamily="34" charset="0"/>
-                <a:ea typeface="Pretendard" pitchFamily="34" charset="-122"/>
-                <a:cs typeface="Pretendard" pitchFamily="34" charset="-120"/>
-              </a:rPr>
-              <a:t>●   </a:t>
-            </a:r>
-            <a:pPr lvl="1" indent="0" marL="0">
-              <a:lnSpc>
-                <a:spcPct val="120000"/>
+            <a:pPr lvl="1" marL="457200" indent="-228600">
+              <a:lnSpc>
+                <a:spcPct val="125000"/>
               </a:lnSpc>
               <a:spcAft>
                 <a:spcPts val="500"/>
               </a:spcAft>
-              <a:buNone/>
+              <a:buSzPct val="100000"/>
+              <a:buChar char="●"/>
             </a:pPr>
             <a:r>
               <a:rPr lang="en-US" sz="1500" dirty="0">
@@ -4929,28 +4468,15 @@
             <a:endParaRPr lang="en-US" sz="1650" dirty="0"/>
           </a:p>
           <a:p>
-            <a:pPr lvl="1" indent="0" marL="0">
-              <a:buNone/>
-            </a:pPr>
-            <a:r>
-              <a:rPr lang="en-US" sz="1250" dirty="0">
-                <a:solidFill>
-                  <a:srgbClr val="1D4ED8"/>
-                </a:solidFill>
-                <a:latin typeface="Pretendard" pitchFamily="34" charset="0"/>
-                <a:ea typeface="Pretendard" pitchFamily="34" charset="-122"/>
-                <a:cs typeface="Pretendard" pitchFamily="34" charset="-120"/>
-              </a:rPr>
-              <a:t>●   </a:t>
-            </a:r>
-            <a:pPr lvl="1" indent="0" marL="0">
-              <a:lnSpc>
-                <a:spcPct val="120000"/>
+            <a:pPr lvl="1" marL="457200" indent="-228600">
+              <a:lnSpc>
+                <a:spcPct val="125000"/>
               </a:lnSpc>
               <a:spcAft>
                 <a:spcPts val="500"/>
               </a:spcAft>
-              <a:buNone/>
+              <a:buSzPct val="100000"/>
+              <a:buChar char="●"/>
             </a:pPr>
             <a:r>
               <a:rPr lang="en-US" sz="1500" dirty="0">
@@ -4968,7 +4494,7 @@
           <a:p>
             <a:pPr indent="0" marL="0">
               <a:spcBef>
-                <a:spcPts val="1600"/>
+                <a:spcPts val="1400"/>
               </a:spcBef>
               <a:spcAft>
                 <a:spcPts val="700"/>
@@ -4989,82 +4515,39 @@
             <a:endParaRPr lang="en-US" sz="1650" dirty="0"/>
           </a:p>
           <a:p>
-            <a:pPr lvl="1" indent="0" marL="0">
-              <a:buNone/>
-            </a:pPr>
-            <a:r>
-              <a:rPr lang="en-US" sz="1250" dirty="0">
-                <a:solidFill>
-                  <a:srgbClr val="1D4ED8"/>
-                </a:solidFill>
-                <a:latin typeface="Pretendard" pitchFamily="34" charset="0"/>
-                <a:ea typeface="Pretendard" pitchFamily="34" charset="-122"/>
-                <a:cs typeface="Pretendard" pitchFamily="34" charset="-120"/>
-              </a:rPr>
-              <a:t>●   </a:t>
-            </a:r>
-            <a:pPr lvl="1" indent="0" marL="0">
-              <a:lnSpc>
-                <a:spcPct val="120000"/>
-              </a:lnSpc>
-              <a:buNone/>
-            </a:pPr>
-            <a:r>
-              <a:rPr lang="en-US" sz="1500" b="1" dirty="0">
-                <a:solidFill>
-                  <a:srgbClr val="111827"/>
-                </a:solidFill>
-                <a:latin typeface="Pretendard" pitchFamily="34" charset="0"/>
-                <a:ea typeface="Pretendard" pitchFamily="34" charset="-122"/>
-                <a:cs typeface="Pretendard" pitchFamily="34" charset="-120"/>
-              </a:rPr>
-              <a:t>training set 5 / 25 / 50 / 100%</a:t>
-            </a:r>
-            <a:pPr lvl="1" indent="0" marL="0">
-              <a:lnSpc>
-                <a:spcPct val="120000"/>
+            <a:pPr lvl="1" marL="457200" indent="-228600">
+              <a:lnSpc>
+                <a:spcPct val="125000"/>
               </a:lnSpc>
               <a:spcAft>
                 <a:spcPts val="500"/>
               </a:spcAft>
-              <a:buNone/>
-            </a:pPr>
-            <a:r>
-              <a:rPr lang="en-US" sz="1500" dirty="0">
-                <a:solidFill>
-                  <a:srgbClr val="374151"/>
-                </a:solidFill>
-                <a:latin typeface="Pretendard" pitchFamily="34" charset="0"/>
-                <a:ea typeface="Pretendard" pitchFamily="34" charset="-122"/>
-                <a:cs typeface="Pretendard" pitchFamily="34" charset="-120"/>
-              </a:rPr>
-              <a:t> (vocabulary 고정, stratified, val·test 전체)</a:t>
+              <a:buSzPct val="100000"/>
+              <a:buChar char="●"/>
+            </a:pPr>
+            <a:r>
+              <a:rPr lang="en-US" sz="1500" b="1" dirty="0">
+                <a:solidFill>
+                  <a:srgbClr val="111827"/>
+                </a:solidFill>
+                <a:latin typeface="Pretendard" pitchFamily="34" charset="0"/>
+                <a:ea typeface="Pretendard" pitchFamily="34" charset="-122"/>
+                <a:cs typeface="Pretendard" pitchFamily="34" charset="-120"/>
+              </a:rPr>
+              <a:t>training set 5 / 25 / 50 / 100% (vocabulary 고정, stratified, val·test 전체)</a:t>
             </a:r>
             <a:endParaRPr lang="en-US" sz="1650" dirty="0"/>
           </a:p>
           <a:p>
-            <a:pPr lvl="1" indent="0" marL="0">
-              <a:buNone/>
-            </a:pPr>
-            <a:r>
-              <a:rPr lang="en-US" sz="1250" dirty="0">
-                <a:solidFill>
-                  <a:srgbClr val="1D4ED8"/>
-                </a:solidFill>
-                <a:latin typeface="Pretendard" pitchFamily="34" charset="0"/>
-                <a:ea typeface="Pretendard" pitchFamily="34" charset="-122"/>
-                <a:cs typeface="Pretendard" pitchFamily="34" charset="-120"/>
-              </a:rPr>
-              <a:t>●   </a:t>
-            </a:r>
-            <a:pPr lvl="1" indent="0" marL="0">
-              <a:lnSpc>
-                <a:spcPct val="120000"/>
+            <a:pPr lvl="1" marL="457200" indent="-228600">
+              <a:lnSpc>
+                <a:spcPct val="125000"/>
               </a:lnSpc>
               <a:spcAft>
                 <a:spcPts val="500"/>
               </a:spcAft>
-              <a:buNone/>
+              <a:buSzPct val="100000"/>
+              <a:buChar char="●"/>
             </a:pPr>
             <a:r>
               <a:rPr lang="en-US" sz="1500" dirty="0">
@@ -5429,65 +4912,18 @@
           <a:bodyPr wrap="square" lIns="0" tIns="0" rIns="0" bIns="0" rtlCol="0" anchor="t"/>
           <a:lstStyle/>
           <a:p>
-            <a:pPr lvl="1" indent="0" marL="0">
-              <a:buNone/>
-            </a:pPr>
-            <a:r>
-              <a:rPr lang="en-US" sz="1150" dirty="0">
-                <a:solidFill>
-                  <a:srgbClr val="1D4ED8"/>
-                </a:solidFill>
-                <a:latin typeface="Pretendard" pitchFamily="34" charset="0"/>
-                <a:ea typeface="Pretendard" pitchFamily="34" charset="-122"/>
-                <a:cs typeface="Pretendard" pitchFamily="34" charset="-120"/>
-              </a:rPr>
-              <a:t>●   </a:t>
-            </a:r>
-            <a:pPr lvl="1" indent="0" marL="0">
-              <a:lnSpc>
-                <a:spcPct val="120000"/>
-              </a:lnSpc>
-              <a:buNone/>
-            </a:pPr>
-            <a:r>
-              <a:rPr lang="en-US" sz="1400" b="1" dirty="0">
-                <a:solidFill>
-                  <a:srgbClr val="1D4ED8"/>
-                </a:solidFill>
-                <a:latin typeface="Pretendard" pitchFamily="34" charset="0"/>
-                <a:ea typeface="Pretendard" pitchFamily="34" charset="-122"/>
-                <a:cs typeface="Pretendard" pitchFamily="34" charset="-120"/>
-              </a:rPr>
-              <a:t>Transformer   </a:t>
-            </a:r>
-            <a:pPr lvl="1" indent="0" marL="0">
-              <a:lnSpc>
-                <a:spcPct val="120000"/>
+            <a:pPr lvl="1" marL="457200" indent="-228600">
+              <a:lnSpc>
+                <a:spcPct val="125000"/>
               </a:lnSpc>
               <a:spcAft>
                 <a:spcPts val="500"/>
               </a:spcAft>
-              <a:buNone/>
-            </a:pPr>
-            <a:r>
-              <a:rPr lang="en-US" sz="1400" dirty="0">
-                <a:solidFill>
-                  <a:srgbClr val="374151"/>
-                </a:solidFill>
-                <a:latin typeface="Pretendard" pitchFamily="34" charset="0"/>
-                <a:ea typeface="Pretendard" pitchFamily="34" charset="-122"/>
-                <a:cs typeface="Pretendard" pitchFamily="34" charset="-120"/>
-              </a:rPr>
-              <a:t>test accuracy 0.910 · macro F1 0.909</a:t>
-            </a:r>
-            <a:endParaRPr lang="en-US" sz="1150" dirty="0"/>
-          </a:p>
-          <a:p>
-            <a:pPr lvl="1" indent="0" marL="0">
-              <a:buNone/>
-            </a:pPr>
-            <a:r>
-              <a:rPr lang="en-US" sz="1150" dirty="0">
+              <a:buSzPct val="100000"/>
+              <a:buChar char="●"/>
+            </a:pPr>
+            <a:r>
+              <a:rPr lang="en-US" sz="1400" b="1" dirty="0">
                 <a:solidFill>
                   <a:srgbClr val="1D4ED8"/>
                 </a:solidFill>
@@ -5495,33 +4931,20 @@
                 <a:ea typeface="Pretendard" pitchFamily="34" charset="-122"/>
                 <a:cs typeface="Pretendard" pitchFamily="34" charset="-120"/>
               </a:rPr>
-              <a:t>●   </a:t>
-            </a:r>
-            <a:pPr lvl="1" indent="0" marL="0">
-              <a:lnSpc>
-                <a:spcPct val="120000"/>
-              </a:lnSpc>
-              <a:buNone/>
-            </a:pPr>
-            <a:r>
-              <a:rPr lang="en-US" sz="1400" b="1" dirty="0">
-                <a:solidFill>
-                  <a:srgbClr val="6B7280"/>
-                </a:solidFill>
-                <a:latin typeface="Pretendard" pitchFamily="34" charset="0"/>
-                <a:ea typeface="Pretendard" pitchFamily="34" charset="-122"/>
-                <a:cs typeface="Pretendard" pitchFamily="34" charset="-120"/>
-              </a:rPr>
-              <a:t>LSTM   </a:t>
-            </a:r>
-            <a:pPr lvl="1" indent="0" marL="0">
-              <a:lnSpc>
-                <a:spcPct val="120000"/>
+              <a:t>Transformer : test accuracy 0.910 · macro F1 0.909</a:t>
+            </a:r>
+            <a:endParaRPr lang="en-US" sz="1400" dirty="0"/>
+          </a:p>
+          <a:p>
+            <a:pPr lvl="1" marL="457200" indent="-228600">
+              <a:lnSpc>
+                <a:spcPct val="125000"/>
               </a:lnSpc>
               <a:spcAft>
                 <a:spcPts val="500"/>
               </a:spcAft>
-              <a:buNone/>
+              <a:buSzPct val="100000"/>
+              <a:buChar char="●"/>
             </a:pPr>
             <a:r>
               <a:rPr lang="en-US" sz="1400" dirty="0">
@@ -5532,9 +4955,9 @@
                 <a:ea typeface="Pretendard" pitchFamily="34" charset="-122"/>
                 <a:cs typeface="Pretendard" pitchFamily="34" charset="-120"/>
               </a:rPr>
-              <a:t>0.833 · macro F1 0.835, val loss 폭증으로 best epoch 2 저장</a:t>
-            </a:r>
-            <a:endParaRPr lang="en-US" sz="1150" dirty="0"/>
+              <a:t>LSTM : 0.833 · macro F1 0.835, val loss 폭증으로 best epoch 2 저장</a:t>
+            </a:r>
+            <a:endParaRPr lang="en-US" sz="1400" dirty="0"/>
           </a:p>
         </p:txBody>
       </p:sp>
@@ -5835,79 +5258,15 @@
           <a:bodyPr wrap="square" lIns="0" tIns="0" rIns="0" bIns="0" rtlCol="0" anchor="t"/>
           <a:lstStyle/>
           <a:p>
-            <a:pPr lvl="1" indent="0" marL="0">
-              <a:buNone/>
-            </a:pPr>
-            <a:r>
-              <a:rPr lang="en-US" sz="1150" dirty="0">
-                <a:solidFill>
-                  <a:srgbClr val="1D4ED8"/>
-                </a:solidFill>
-                <a:latin typeface="Pretendard" pitchFamily="34" charset="0"/>
-                <a:ea typeface="Pretendard" pitchFamily="34" charset="-122"/>
-                <a:cs typeface="Pretendard" pitchFamily="34" charset="-120"/>
-              </a:rPr>
-              <a:t>●   </a:t>
-            </a:r>
-            <a:pPr lvl="1" indent="0" marL="0">
-              <a:lnSpc>
-                <a:spcPct val="120000"/>
-              </a:lnSpc>
-              <a:buNone/>
-            </a:pPr>
-            <a:r>
-              <a:rPr lang="en-US" sz="1400" b="1" dirty="0">
-                <a:solidFill>
-                  <a:srgbClr val="111827"/>
-                </a:solidFill>
-                <a:latin typeface="Pretendard" pitchFamily="34" charset="0"/>
-                <a:ea typeface="Pretendard" pitchFamily="34" charset="-122"/>
-                <a:cs typeface="Pretendard" pitchFamily="34" charset="-120"/>
-              </a:rPr>
-              <a:t>공통 오답 428건   </a:t>
-            </a:r>
-            <a:pPr lvl="1" indent="0" marL="0">
-              <a:lnSpc>
-                <a:spcPct val="120000"/>
+            <a:pPr lvl="1" marL="457200" indent="-228600">
+              <a:lnSpc>
+                <a:spcPct val="125000"/>
               </a:lnSpc>
               <a:spcAft>
                 <a:spcPts val="500"/>
               </a:spcAft>
-              <a:buNone/>
-            </a:pPr>
-            <a:r>
-              <a:rPr lang="en-US" sz="1400" dirty="0">
-                <a:solidFill>
-                  <a:srgbClr val="374151"/>
-                </a:solidFill>
-                <a:latin typeface="Pretendard" pitchFamily="34" charset="0"/>
-                <a:ea typeface="Pretendard" pitchFamily="34" charset="-122"/>
-                <a:cs typeface="Pretendard" pitchFamily="34" charset="-120"/>
-              </a:rPr>
-              <a:t>61%가 Business/Sci-Tech 경계 (의미 중첩에 따른 모호성)</a:t>
-            </a:r>
-            <a:endParaRPr lang="en-US" sz="1150" dirty="0"/>
-          </a:p>
-          <a:p>
-            <a:pPr lvl="1" indent="0" marL="0">
-              <a:buNone/>
-            </a:pPr>
-            <a:r>
-              <a:rPr lang="en-US" sz="1150" dirty="0">
-                <a:solidFill>
-                  <a:srgbClr val="1D4ED8"/>
-                </a:solidFill>
-                <a:latin typeface="Pretendard" pitchFamily="34" charset="0"/>
-                <a:ea typeface="Pretendard" pitchFamily="34" charset="-122"/>
-                <a:cs typeface="Pretendard" pitchFamily="34" charset="-120"/>
-              </a:rPr>
-              <a:t>●   </a:t>
-            </a:r>
-            <a:pPr lvl="1" indent="0" marL="0">
-              <a:lnSpc>
-                <a:spcPct val="120000"/>
-              </a:lnSpc>
-              <a:buNone/>
+              <a:buSzPct val="100000"/>
+              <a:buChar char="●"/>
             </a:pPr>
             <a:r>
               <a:rPr lang="en-US" sz="1400" b="1" dirty="0">
@@ -5918,16 +5277,20 @@
                 <a:ea typeface="Pretendard" pitchFamily="34" charset="-122"/>
                 <a:cs typeface="Pretendard" pitchFamily="34" charset="-120"/>
               </a:rPr>
-              <a:t>LSTM 단독 841건   </a:t>
-            </a:r>
-            <a:pPr lvl="1" indent="0" marL="0">
-              <a:lnSpc>
-                <a:spcPct val="120000"/>
+              <a:t>공통 오답 428건 : 61%가 Business/Sci-Tech 경계 (의미 중첩에 따른 모호성)</a:t>
+            </a:r>
+            <a:endParaRPr lang="en-US" sz="1400" dirty="0"/>
+          </a:p>
+          <a:p>
+            <a:pPr lvl="1" marL="457200" indent="-228600">
+              <a:lnSpc>
+                <a:spcPct val="125000"/>
               </a:lnSpc>
               <a:spcAft>
                 <a:spcPts val="500"/>
               </a:spcAft>
-              <a:buNone/>
+              <a:buSzPct val="100000"/>
+              <a:buChar char="●"/>
             </a:pPr>
             <a:r>
               <a:rPr lang="en-US" sz="1400" dirty="0">
@@ -5938,9 +5301,9 @@
                 <a:ea typeface="Pretendard" pitchFamily="34" charset="-122"/>
                 <a:cs typeface="Pretendard" pitchFamily="34" charset="-120"/>
               </a:rPr>
-              <a:t>전 class에 분산, Transformer 단독(259건)의 3.2배</a:t>
-            </a:r>
-            <a:endParaRPr lang="en-US" sz="1150" dirty="0"/>
+              <a:t>LSTM 단독 841건 : 전 class에 분산, Transformer 단독(259건)의 3.2배</a:t>
+            </a:r>
+            <a:endParaRPr lang="en-US" sz="1400" dirty="0"/>
           </a:p>
         </p:txBody>
       </p:sp>
@@ -6295,28 +5658,15 @@
             <a:endParaRPr lang="en-US" sz="1550" dirty="0"/>
           </a:p>
           <a:p>
-            <a:pPr lvl="1" indent="0" marL="0">
-              <a:buNone/>
-            </a:pPr>
-            <a:r>
-              <a:rPr lang="en-US" sz="1150" dirty="0">
-                <a:solidFill>
-                  <a:srgbClr val="1D4ED8"/>
-                </a:solidFill>
-                <a:latin typeface="Pretendard" pitchFamily="34" charset="0"/>
-                <a:ea typeface="Pretendard" pitchFamily="34" charset="-122"/>
-                <a:cs typeface="Pretendard" pitchFamily="34" charset="-120"/>
-              </a:rPr>
-              <a:t>●   </a:t>
-            </a:r>
-            <a:pPr lvl="1" indent="0" marL="0">
-              <a:lnSpc>
-                <a:spcPct val="120000"/>
+            <a:pPr lvl="1" marL="457200" indent="-228600">
+              <a:lnSpc>
+                <a:spcPct val="125000"/>
               </a:lnSpc>
               <a:spcAft>
                 <a:spcPts val="500"/>
               </a:spcAft>
-              <a:buNone/>
+              <a:buSzPct val="100000"/>
+              <a:buChar char="●"/>
             </a:pPr>
             <a:r>
               <a:rPr lang="en-US" sz="1400" b="1" dirty="0">
@@ -6332,28 +5682,15 @@
             <a:endParaRPr lang="en-US" sz="1550" dirty="0"/>
           </a:p>
           <a:p>
-            <a:pPr lvl="1" indent="0" marL="0">
-              <a:buNone/>
-            </a:pPr>
-            <a:r>
-              <a:rPr lang="en-US" sz="1150" dirty="0">
-                <a:solidFill>
-                  <a:srgbClr val="1D4ED8"/>
-                </a:solidFill>
-                <a:latin typeface="Pretendard" pitchFamily="34" charset="0"/>
-                <a:ea typeface="Pretendard" pitchFamily="34" charset="-122"/>
-                <a:cs typeface="Pretendard" pitchFamily="34" charset="-120"/>
-              </a:rPr>
-              <a:t>●   </a:t>
-            </a:r>
-            <a:pPr lvl="1" indent="0" marL="0">
-              <a:lnSpc>
-                <a:spcPct val="120000"/>
+            <a:pPr lvl="1" marL="457200" indent="-228600">
+              <a:lnSpc>
+                <a:spcPct val="125000"/>
               </a:lnSpc>
               <a:spcAft>
                 <a:spcPts val="500"/>
               </a:spcAft>
-              <a:buNone/>
+              <a:buSzPct val="100000"/>
+              <a:buChar char="●"/>
             </a:pPr>
             <a:r>
               <a:rPr lang="en-US" sz="1400" dirty="0">
@@ -6392,28 +5729,15 @@
             <a:endParaRPr lang="en-US" sz="1550" dirty="0"/>
           </a:p>
           <a:p>
-            <a:pPr lvl="1" indent="0" marL="0">
-              <a:buNone/>
-            </a:pPr>
-            <a:r>
-              <a:rPr lang="en-US" sz="1150" dirty="0">
-                <a:solidFill>
-                  <a:srgbClr val="1D4ED8"/>
-                </a:solidFill>
-                <a:latin typeface="Pretendard" pitchFamily="34" charset="0"/>
-                <a:ea typeface="Pretendard" pitchFamily="34" charset="-122"/>
-                <a:cs typeface="Pretendard" pitchFamily="34" charset="-120"/>
-              </a:rPr>
-              <a:t>●   </a:t>
-            </a:r>
-            <a:pPr lvl="1" indent="0" marL="0">
-              <a:lnSpc>
-                <a:spcPct val="120000"/>
+            <a:pPr lvl="1" marL="457200" indent="-228600">
+              <a:lnSpc>
+                <a:spcPct val="125000"/>
               </a:lnSpc>
               <a:spcAft>
                 <a:spcPts val="500"/>
               </a:spcAft>
-              <a:buNone/>
+              <a:buSzPct val="100000"/>
+              <a:buChar char="●"/>
             </a:pPr>
             <a:r>
               <a:rPr lang="en-US" sz="1400" b="1" dirty="0">
@@ -6429,28 +5753,15 @@
             <a:endParaRPr lang="en-US" sz="1550" dirty="0"/>
           </a:p>
           <a:p>
-            <a:pPr lvl="1" indent="0" marL="0">
-              <a:buNone/>
-            </a:pPr>
-            <a:r>
-              <a:rPr lang="en-US" sz="1150" dirty="0">
-                <a:solidFill>
-                  <a:srgbClr val="1D4ED8"/>
-                </a:solidFill>
-                <a:latin typeface="Pretendard" pitchFamily="34" charset="0"/>
-                <a:ea typeface="Pretendard" pitchFamily="34" charset="-122"/>
-                <a:cs typeface="Pretendard" pitchFamily="34" charset="-120"/>
-              </a:rPr>
-              <a:t>●   </a:t>
-            </a:r>
-            <a:pPr lvl="1" indent="0" marL="0">
-              <a:lnSpc>
-                <a:spcPct val="120000"/>
+            <a:pPr lvl="1" marL="457200" indent="-228600">
+              <a:lnSpc>
+                <a:spcPct val="125000"/>
               </a:lnSpc>
               <a:spcAft>
                 <a:spcPts val="500"/>
               </a:spcAft>
-              <a:buNone/>
+              <a:buSzPct val="100000"/>
+              <a:buChar char="●"/>
             </a:pPr>
             <a:r>
               <a:rPr lang="en-US" sz="1400" dirty="0">
@@ -6489,28 +5800,15 @@
             <a:endParaRPr lang="en-US" sz="1550" dirty="0"/>
           </a:p>
           <a:p>
-            <a:pPr lvl="1" indent="0" marL="0">
-              <a:buNone/>
-            </a:pPr>
-            <a:r>
-              <a:rPr lang="en-US" sz="1150" dirty="0">
-                <a:solidFill>
-                  <a:srgbClr val="1D4ED8"/>
-                </a:solidFill>
-                <a:latin typeface="Pretendard" pitchFamily="34" charset="0"/>
-                <a:ea typeface="Pretendard" pitchFamily="34" charset="-122"/>
-                <a:cs typeface="Pretendard" pitchFamily="34" charset="-120"/>
-              </a:rPr>
-              <a:t>●   </a:t>
-            </a:r>
-            <a:pPr lvl="1" indent="0" marL="0">
-              <a:lnSpc>
-                <a:spcPct val="120000"/>
+            <a:pPr lvl="1" marL="457200" indent="-228600">
+              <a:lnSpc>
+                <a:spcPct val="125000"/>
               </a:lnSpc>
               <a:spcAft>
                 <a:spcPts val="500"/>
               </a:spcAft>
-              <a:buNone/>
+              <a:buSzPct val="100000"/>
+              <a:buChar char="●"/>
             </a:pPr>
             <a:r>
               <a:rPr lang="en-US" sz="1400" dirty="0">
@@ -6526,28 +5824,15 @@
             <a:endParaRPr lang="en-US" sz="1550" dirty="0"/>
           </a:p>
           <a:p>
-            <a:pPr lvl="1" indent="0" marL="0">
-              <a:buNone/>
-            </a:pPr>
-            <a:r>
-              <a:rPr lang="en-US" sz="1150" dirty="0">
-                <a:solidFill>
-                  <a:srgbClr val="1D4ED8"/>
-                </a:solidFill>
-                <a:latin typeface="Pretendard" pitchFamily="34" charset="0"/>
-                <a:ea typeface="Pretendard" pitchFamily="34" charset="-122"/>
-                <a:cs typeface="Pretendard" pitchFamily="34" charset="-120"/>
-              </a:rPr>
-              <a:t>●   </a:t>
-            </a:r>
-            <a:pPr lvl="1" indent="0" marL="0">
-              <a:lnSpc>
-                <a:spcPct val="120000"/>
+            <a:pPr lvl="1" marL="457200" indent="-228600">
+              <a:lnSpc>
+                <a:spcPct val="125000"/>
               </a:lnSpc>
               <a:spcAft>
                 <a:spcPts val="500"/>
               </a:spcAft>
-              <a:buNone/>
+              <a:buSzPct val="100000"/>
+              <a:buChar char="●"/>
             </a:pPr>
             <a:r>
               <a:rPr lang="en-US" sz="1400" dirty="0">
@@ -6861,45 +6146,15 @@
           <a:bodyPr wrap="square" lIns="0" tIns="0" rIns="0" bIns="0" rtlCol="0" anchor="t"/>
           <a:lstStyle/>
           <a:p>
-            <a:pPr lvl="1" indent="0" marL="0">
-              <a:buNone/>
-            </a:pPr>
-            <a:r>
-              <a:rPr lang="en-US" sz="1150" dirty="0">
-                <a:solidFill>
-                  <a:srgbClr val="1D4ED8"/>
-                </a:solidFill>
-                <a:latin typeface="Pretendard" pitchFamily="34" charset="0"/>
-                <a:ea typeface="Pretendard" pitchFamily="34" charset="-122"/>
-                <a:cs typeface="Pretendard" pitchFamily="34" charset="-120"/>
-              </a:rPr>
-              <a:t>●   </a:t>
-            </a:r>
-            <a:pPr lvl="1" indent="0" marL="0">
-              <a:lnSpc>
-                <a:spcPct val="120000"/>
-              </a:lnSpc>
-              <a:buNone/>
-            </a:pPr>
-            <a:r>
-              <a:rPr lang="en-US" sz="1400" b="1" dirty="0">
-                <a:solidFill>
-                  <a:srgbClr val="111827"/>
-                </a:solidFill>
-                <a:latin typeface="Pretendard" pitchFamily="34" charset="0"/>
-                <a:ea typeface="Pretendard" pitchFamily="34" charset="-122"/>
-                <a:cs typeface="Pretendard" pitchFamily="34" charset="-120"/>
-              </a:rPr>
-              <a:t>PE on/off   </a:t>
-            </a:r>
-            <a:pPr lvl="1" indent="0" marL="0">
-              <a:lnSpc>
-                <a:spcPct val="120000"/>
+            <a:pPr lvl="1" marL="457200" indent="-228600">
+              <a:lnSpc>
+                <a:spcPct val="125000"/>
               </a:lnSpc>
               <a:spcAft>
                 <a:spcPts val="500"/>
               </a:spcAft>
-              <a:buNone/>
+              <a:buSzPct val="100000"/>
+              <a:buChar char="●"/>
             </a:pPr>
             <a:r>
               <a:rPr lang="en-US" sz="1400" dirty="0">
@@ -6910,50 +6165,20 @@
                 <a:ea typeface="Pretendard" pitchFamily="34" charset="-122"/>
                 <a:cs typeface="Pretendard" pitchFamily="34" charset="-120"/>
               </a:rPr>
-              <a:t>with-PE 0.910 vs no-PE 0.911 (차이 -0.001) → 순서 정보가 거의 불필요</a:t>
-            </a:r>
-            <a:endParaRPr lang="en-US" sz="1150" dirty="0"/>
-          </a:p>
-          <a:p>
-            <a:pPr lvl="1" indent="0" marL="0">
-              <a:buNone/>
-            </a:pPr>
-            <a:r>
-              <a:rPr lang="en-US" sz="1150" dirty="0">
-                <a:solidFill>
-                  <a:srgbClr val="1D4ED8"/>
-                </a:solidFill>
-                <a:latin typeface="Pretendard" pitchFamily="34" charset="0"/>
-                <a:ea typeface="Pretendard" pitchFamily="34" charset="-122"/>
-                <a:cs typeface="Pretendard" pitchFamily="34" charset="-120"/>
-              </a:rPr>
-              <a:t>●   </a:t>
-            </a:r>
-            <a:pPr lvl="1" indent="0" marL="0">
-              <a:lnSpc>
-                <a:spcPct val="120000"/>
-              </a:lnSpc>
-              <a:buNone/>
-            </a:pPr>
-            <a:r>
-              <a:rPr lang="en-US" sz="1400" b="1" dirty="0">
-                <a:solidFill>
-                  <a:srgbClr val="111827"/>
-                </a:solidFill>
-                <a:latin typeface="Pretendard" pitchFamily="34" charset="0"/>
-                <a:ea typeface="Pretendard" pitchFamily="34" charset="-122"/>
-                <a:cs typeface="Pretendard" pitchFamily="34" charset="-120"/>
-              </a:rPr>
-              <a:t>robustness   </a:t>
-            </a:r>
-            <a:pPr lvl="1" indent="0" marL="0">
-              <a:lnSpc>
-                <a:spcPct val="120000"/>
+              <a:t>PE on/off : with-PE 0.910 vs no-PE 0.911 (차이 -0.001) → 순서 정보가 거의 불필요</a:t>
+            </a:r>
+            <a:endParaRPr lang="en-US" sz="1400" dirty="0"/>
+          </a:p>
+          <a:p>
+            <a:pPr lvl="1" marL="457200" indent="-228600">
+              <a:lnSpc>
+                <a:spcPct val="125000"/>
               </a:lnSpc>
               <a:spcAft>
                 <a:spcPts val="500"/>
               </a:spcAft>
-              <a:buNone/>
+              <a:buSzPct val="100000"/>
+              <a:buChar char="●"/>
             </a:pPr>
             <a:r>
               <a:rPr lang="en-US" sz="1400" dirty="0">
@@ -6964,9 +6189,9 @@
                 <a:ea typeface="Pretendard" pitchFamily="34" charset="-122"/>
                 <a:cs typeface="Pretendard" pitchFamily="34" charset="-120"/>
               </a:rPr>
-              <a:t>LSTM은 비주제어 'giddy'에 쏠려 오답, Transformer는 주제 토큰에 분산하여 정답</a:t>
-            </a:r>
-            <a:endParaRPr lang="en-US" sz="1150" dirty="0"/>
+              <a:t>robustness : LSTM은 비주제어 'giddy'에 쏠려 오답, Transformer는 주제 토큰에 분산해 정답</a:t>
+            </a:r>
+            <a:endParaRPr lang="en-US" sz="1400" dirty="0"/>
           </a:p>
         </p:txBody>
       </p:sp>

--- a/term-project-lstm-vs-transformer-agnews/deliverables/5_presentation_v2.pptx
+++ b/term-project-lstm-vs-transformer-agnews/deliverables/5_presentation_v2.pptx
@@ -3749,19 +3749,15 @@
             </a:r>
           </a:p>
           <a:p>
-            <a:pPr marL="310896" indent="-237744">
+            <a:pPr marL="274320" indent="-274320">
               <a:lnSpc>
                 <a:spcPct val="125000"/>
               </a:lnSpc>
               <a:spcAft>
                 <a:spcPts val="500"/>
               </a:spcAft>
-              <a:buClr>
-                <a:srgbClr val="1D4ED8"/>
-              </a:buClr>
-              <a:buSzPct val="76000"/>
               <a:buFont typeface="Arial"/>
-              <a:buChar char="●"/>
+              <a:buChar char="•"/>
             </a:pPr>
             <a:r>
               <a:rPr b="0" sz="1500">
@@ -3811,19 +3807,15 @@
             </a:r>
           </a:p>
           <a:p>
-            <a:pPr marL="310896" indent="-237744">
+            <a:pPr marL="274320" indent="-274320">
               <a:lnSpc>
                 <a:spcPct val="125000"/>
               </a:lnSpc>
               <a:spcAft>
                 <a:spcPts val="500"/>
               </a:spcAft>
-              <a:buClr>
-                <a:srgbClr val="1D4ED8"/>
-              </a:buClr>
-              <a:buSzPct val="76000"/>
               <a:buFont typeface="Arial"/>
-              <a:buChar char="●"/>
+              <a:buChar char="•"/>
             </a:pPr>
             <a:r>
               <a:rPr b="1" sz="1500">
@@ -3864,19 +3856,15 @@
             </a:r>
           </a:p>
           <a:p>
-            <a:pPr marL="310896" indent="-237744">
+            <a:pPr marL="274320" indent="-274320">
               <a:lnSpc>
                 <a:spcPct val="125000"/>
               </a:lnSpc>
               <a:spcAft>
                 <a:spcPts val="500"/>
               </a:spcAft>
-              <a:buClr>
-                <a:srgbClr val="1D4ED8"/>
-              </a:buClr>
-              <a:buSzPct val="76000"/>
               <a:buFont typeface="Arial"/>
-              <a:buChar char="●"/>
+              <a:buChar char="•"/>
             </a:pPr>
             <a:r>
               <a:rPr b="1" sz="1500">
@@ -3917,19 +3905,15 @@
             </a:r>
           </a:p>
           <a:p>
-            <a:pPr marL="310896" indent="-237744">
+            <a:pPr marL="274320" indent="-274320">
               <a:lnSpc>
                 <a:spcPct val="125000"/>
               </a:lnSpc>
               <a:spcAft>
                 <a:spcPts val="500"/>
               </a:spcAft>
-              <a:buClr>
-                <a:srgbClr val="1D4ED8"/>
-              </a:buClr>
-              <a:buSzPct val="76000"/>
               <a:buFont typeface="Arial"/>
-              <a:buChar char="●"/>
+              <a:buChar char="•"/>
             </a:pPr>
             <a:r>
               <a:rPr b="0" sz="1500">
@@ -3942,19 +3926,15 @@
             </a:r>
           </a:p>
           <a:p>
-            <a:pPr marL="310896" indent="-237744">
+            <a:pPr marL="274320" indent="-274320">
               <a:lnSpc>
                 <a:spcPct val="125000"/>
               </a:lnSpc>
               <a:spcAft>
                 <a:spcPts val="500"/>
               </a:spcAft>
-              <a:buClr>
-                <a:srgbClr val="1D4ED8"/>
-              </a:buClr>
-              <a:buSzPct val="76000"/>
               <a:buFont typeface="Arial"/>
-              <a:buChar char="●"/>
+              <a:buChar char="•"/>
             </a:pPr>
             <a:r>
               <a:rPr b="0" sz="1500">
@@ -4207,19 +4187,15 @@
             </a:r>
           </a:p>
           <a:p>
-            <a:pPr marL="310896" indent="-237744">
+            <a:pPr marL="274320" indent="-274320">
               <a:lnSpc>
                 <a:spcPct val="125000"/>
               </a:lnSpc>
               <a:spcAft>
                 <a:spcPts val="500"/>
               </a:spcAft>
-              <a:buClr>
-                <a:srgbClr val="1D4ED8"/>
-              </a:buClr>
-              <a:buSzPct val="76000"/>
               <a:buFont typeface="Arial"/>
-              <a:buChar char="●"/>
+              <a:buChar char="•"/>
             </a:pPr>
             <a:r>
               <a:rPr b="1" sz="1500">
@@ -4241,19 +4217,15 @@
             </a:r>
           </a:p>
           <a:p>
-            <a:pPr marL="310896" indent="-237744">
+            <a:pPr marL="274320" indent="-274320">
               <a:lnSpc>
                 <a:spcPct val="125000"/>
               </a:lnSpc>
               <a:spcAft>
                 <a:spcPts val="500"/>
               </a:spcAft>
-              <a:buClr>
-                <a:srgbClr val="1D4ED8"/>
-              </a:buClr>
-              <a:buSzPct val="76000"/>
               <a:buFont typeface="Arial"/>
-              <a:buChar char="●"/>
+              <a:buChar char="•"/>
             </a:pPr>
             <a:r>
               <a:rPr b="0" sz="1500">
@@ -4285,19 +4257,15 @@
             </a:r>
           </a:p>
           <a:p>
-            <a:pPr marL="310896" indent="-237744">
+            <a:pPr marL="274320" indent="-274320">
               <a:lnSpc>
                 <a:spcPct val="125000"/>
               </a:lnSpc>
               <a:spcAft>
                 <a:spcPts val="500"/>
               </a:spcAft>
-              <a:buClr>
-                <a:srgbClr val="1D4ED8"/>
-              </a:buClr>
-              <a:buSzPct val="76000"/>
               <a:buFont typeface="Arial"/>
-              <a:buChar char="●"/>
+              <a:buChar char="•"/>
             </a:pPr>
             <a:r>
               <a:rPr b="1" sz="1500">
@@ -4319,19 +4287,15 @@
             </a:r>
           </a:p>
           <a:p>
-            <a:pPr marL="310896" indent="-237744">
+            <a:pPr marL="274320" indent="-274320">
               <a:lnSpc>
                 <a:spcPct val="125000"/>
               </a:lnSpc>
               <a:spcAft>
                 <a:spcPts val="500"/>
               </a:spcAft>
-              <a:buClr>
-                <a:srgbClr val="1D4ED8"/>
-              </a:buClr>
-              <a:buSzPct val="76000"/>
               <a:buFont typeface="Arial"/>
-              <a:buChar char="●"/>
+              <a:buChar char="•"/>
             </a:pPr>
             <a:r>
               <a:rPr b="0" sz="1500">
@@ -4363,19 +4327,15 @@
             </a:r>
           </a:p>
           <a:p>
-            <a:pPr marL="310896" indent="-237744">
+            <a:pPr marL="274320" indent="-274320">
               <a:lnSpc>
                 <a:spcPct val="125000"/>
               </a:lnSpc>
               <a:spcAft>
                 <a:spcPts val="500"/>
               </a:spcAft>
-              <a:buClr>
-                <a:srgbClr val="1D4ED8"/>
-              </a:buClr>
-              <a:buSzPct val="76000"/>
               <a:buFont typeface="Arial"/>
-              <a:buChar char="●"/>
+              <a:buChar char="•"/>
             </a:pPr>
             <a:r>
               <a:rPr b="0" sz="1500">
@@ -4388,19 +4348,15 @@
             </a:r>
           </a:p>
           <a:p>
-            <a:pPr marL="310896" indent="-237744">
+            <a:pPr marL="274320" indent="-274320">
               <a:lnSpc>
                 <a:spcPct val="125000"/>
               </a:lnSpc>
               <a:spcAft>
                 <a:spcPts val="500"/>
               </a:spcAft>
-              <a:buClr>
-                <a:srgbClr val="1D4ED8"/>
-              </a:buClr>
-              <a:buSzPct val="76000"/>
               <a:buFont typeface="Arial"/>
-              <a:buChar char="●"/>
+              <a:buChar char="•"/>
             </a:pPr>
             <a:r>
               <a:rPr b="0" sz="1500">
@@ -4653,19 +4609,15 @@
             </a:r>
           </a:p>
           <a:p>
-            <a:pPr marL="310896" indent="-237744">
+            <a:pPr marL="274320" indent="-274320">
               <a:lnSpc>
                 <a:spcPct val="125000"/>
               </a:lnSpc>
               <a:spcAft>
                 <a:spcPts val="500"/>
               </a:spcAft>
-              <a:buClr>
-                <a:srgbClr val="1D4ED8"/>
-              </a:buClr>
-              <a:buSzPct val="76000"/>
               <a:buFont typeface="Arial"/>
-              <a:buChar char="●"/>
+              <a:buChar char="•"/>
             </a:pPr>
             <a:r>
               <a:rPr b="1" sz="1500">
@@ -4697,19 +4649,15 @@
             </a:r>
           </a:p>
           <a:p>
-            <a:pPr marL="310896" indent="-237744">
+            <a:pPr marL="274320" indent="-274320">
               <a:lnSpc>
                 <a:spcPct val="125000"/>
               </a:lnSpc>
               <a:spcAft>
                 <a:spcPts val="500"/>
               </a:spcAft>
-              <a:buClr>
-                <a:srgbClr val="1D4ED8"/>
-              </a:buClr>
-              <a:buSzPct val="76000"/>
               <a:buFont typeface="Arial"/>
-              <a:buChar char="●"/>
+              <a:buChar char="•"/>
             </a:pPr>
             <a:r>
               <a:rPr b="1" sz="1500">
@@ -4731,19 +4679,15 @@
             </a:r>
           </a:p>
           <a:p>
-            <a:pPr marL="310896" indent="-237744">
+            <a:pPr marL="274320" indent="-274320">
               <a:lnSpc>
                 <a:spcPct val="125000"/>
               </a:lnSpc>
               <a:spcAft>
                 <a:spcPts val="500"/>
               </a:spcAft>
-              <a:buClr>
-                <a:srgbClr val="1D4ED8"/>
-              </a:buClr>
-              <a:buSzPct val="76000"/>
               <a:buFont typeface="Arial"/>
-              <a:buChar char="●"/>
+              <a:buChar char="•"/>
             </a:pPr>
             <a:r>
               <a:rPr b="0" sz="1500">
@@ -4775,19 +4719,15 @@
             </a:r>
           </a:p>
           <a:p>
-            <a:pPr marL="310896" indent="-237744">
+            <a:pPr marL="274320" indent="-274320">
               <a:lnSpc>
                 <a:spcPct val="125000"/>
               </a:lnSpc>
               <a:spcAft>
                 <a:spcPts val="500"/>
               </a:spcAft>
-              <a:buClr>
-                <a:srgbClr val="1D4ED8"/>
-              </a:buClr>
-              <a:buSzPct val="76000"/>
               <a:buFont typeface="Arial"/>
-              <a:buChar char="●"/>
+              <a:buChar char="•"/>
             </a:pPr>
             <a:r>
               <a:rPr b="0" sz="1500">
@@ -4800,19 +4740,15 @@
             </a:r>
           </a:p>
           <a:p>
-            <a:pPr marL="310896" indent="-237744">
+            <a:pPr marL="274320" indent="-274320">
               <a:lnSpc>
                 <a:spcPct val="125000"/>
               </a:lnSpc>
               <a:spcAft>
                 <a:spcPts val="500"/>
               </a:spcAft>
-              <a:buClr>
-                <a:srgbClr val="1D4ED8"/>
-              </a:buClr>
-              <a:buSzPct val="76000"/>
               <a:buFont typeface="Arial"/>
-              <a:buChar char="●"/>
+              <a:buChar char="•"/>
             </a:pPr>
             <a:r>
               <a:rPr b="0" sz="1500">
@@ -4843,19 +4779,15 @@
             </a:r>
           </a:p>
           <a:p>
-            <a:pPr marL="310896" indent="-237744">
+            <a:pPr marL="274320" indent="-274320">
               <a:lnSpc>
                 <a:spcPct val="125000"/>
               </a:lnSpc>
               <a:spcAft>
                 <a:spcPts val="500"/>
               </a:spcAft>
-              <a:buClr>
-                <a:srgbClr val="1D4ED8"/>
-              </a:buClr>
-              <a:buSzPct val="76000"/>
               <a:buFont typeface="Arial"/>
-              <a:buChar char="●"/>
+              <a:buChar char="•"/>
             </a:pPr>
             <a:r>
               <a:rPr b="0" sz="1500">
@@ -5099,19 +5031,15 @@
             </a:r>
           </a:p>
           <a:p>
-            <a:pPr marL="310896" indent="-237744">
+            <a:pPr marL="274320" indent="-274320">
               <a:lnSpc>
                 <a:spcPct val="125000"/>
               </a:lnSpc>
               <a:spcAft>
                 <a:spcPts val="500"/>
               </a:spcAft>
-              <a:buClr>
-                <a:srgbClr val="1D4ED8"/>
-              </a:buClr>
-              <a:buSzPct val="76000"/>
               <a:buFont typeface="Arial"/>
-              <a:buChar char="●"/>
+              <a:buChar char="•"/>
             </a:pPr>
             <a:r>
               <a:rPr b="1" sz="1500">
@@ -5124,19 +5052,15 @@
             </a:r>
           </a:p>
           <a:p>
-            <a:pPr marL="310896" indent="-237744">
+            <a:pPr marL="274320" indent="-274320">
               <a:lnSpc>
                 <a:spcPct val="125000"/>
               </a:lnSpc>
               <a:spcAft>
                 <a:spcPts val="500"/>
               </a:spcAft>
-              <a:buClr>
-                <a:srgbClr val="1D4ED8"/>
-              </a:buClr>
-              <a:buSzPct val="76000"/>
               <a:buFont typeface="Arial"/>
-              <a:buChar char="●"/>
+              <a:buChar char="•"/>
             </a:pPr>
             <a:r>
               <a:rPr b="0" sz="1500">
@@ -5168,19 +5092,15 @@
             </a:r>
           </a:p>
           <a:p>
-            <a:pPr marL="310896" indent="-237744">
+            <a:pPr marL="274320" indent="-274320">
               <a:lnSpc>
                 <a:spcPct val="125000"/>
               </a:lnSpc>
               <a:spcAft>
                 <a:spcPts val="500"/>
               </a:spcAft>
-              <a:buClr>
-                <a:srgbClr val="1D4ED8"/>
-              </a:buClr>
-              <a:buSzPct val="76000"/>
               <a:buFont typeface="Arial"/>
-              <a:buChar char="●"/>
+              <a:buChar char="•"/>
             </a:pPr>
             <a:r>
               <a:rPr b="1" sz="1500">
@@ -5202,19 +5122,15 @@
             </a:r>
           </a:p>
           <a:p>
-            <a:pPr marL="310896" indent="-237744">
+            <a:pPr marL="274320" indent="-274320">
               <a:lnSpc>
                 <a:spcPct val="125000"/>
               </a:lnSpc>
               <a:spcAft>
                 <a:spcPts val="500"/>
               </a:spcAft>
-              <a:buClr>
-                <a:srgbClr val="1D4ED8"/>
-              </a:buClr>
-              <a:buSzPct val="76000"/>
               <a:buFont typeface="Arial"/>
-              <a:buChar char="●"/>
+              <a:buChar char="•"/>
             </a:pPr>
             <a:r>
               <a:rPr b="1" sz="1500">
@@ -5255,19 +5171,15 @@
             </a:r>
           </a:p>
           <a:p>
-            <a:pPr marL="310896" indent="-237744">
+            <a:pPr marL="274320" indent="-274320">
               <a:lnSpc>
                 <a:spcPct val="125000"/>
               </a:lnSpc>
               <a:spcAft>
                 <a:spcPts val="500"/>
               </a:spcAft>
-              <a:buClr>
-                <a:srgbClr val="1D4ED8"/>
-              </a:buClr>
-              <a:buSzPct val="76000"/>
               <a:buFont typeface="Arial"/>
-              <a:buChar char="●"/>
+              <a:buChar char="•"/>
             </a:pPr>
             <a:r>
               <a:rPr b="0" sz="1500">
@@ -5538,19 +5450,15 @@
             </a:r>
           </a:p>
           <a:p>
-            <a:pPr marL="310896" indent="-237744">
+            <a:pPr marL="274320" indent="-274320">
               <a:lnSpc>
                 <a:spcPct val="125000"/>
               </a:lnSpc>
               <a:spcAft>
                 <a:spcPts val="500"/>
               </a:spcAft>
-              <a:buClr>
-                <a:srgbClr val="1D4ED8"/>
-              </a:buClr>
-              <a:buSzPct val="76000"/>
               <a:buFont typeface="Arial"/>
-              <a:buChar char="●"/>
+              <a:buChar char="•"/>
             </a:pPr>
             <a:r>
               <a:rPr b="0" sz="1500">
@@ -5563,19 +5471,15 @@
             </a:r>
           </a:p>
           <a:p>
-            <a:pPr marL="310896" indent="-237744">
+            <a:pPr marL="274320" indent="-274320">
               <a:lnSpc>
                 <a:spcPct val="125000"/>
               </a:lnSpc>
               <a:spcAft>
                 <a:spcPts val="500"/>
               </a:spcAft>
-              <a:buClr>
-                <a:srgbClr val="1D4ED8"/>
-              </a:buClr>
-              <a:buSzPct val="76000"/>
               <a:buFont typeface="Arial"/>
-              <a:buChar char="●"/>
+              <a:buChar char="•"/>
             </a:pPr>
             <a:r>
               <a:rPr b="0" sz="1500">
@@ -5607,19 +5511,15 @@
             </a:r>
           </a:p>
           <a:p>
-            <a:pPr marL="310896" indent="-237744">
+            <a:pPr marL="274320" indent="-274320">
               <a:lnSpc>
                 <a:spcPct val="125000"/>
               </a:lnSpc>
               <a:spcAft>
                 <a:spcPts val="500"/>
               </a:spcAft>
-              <a:buClr>
-                <a:srgbClr val="1D4ED8"/>
-              </a:buClr>
-              <a:buSzPct val="76000"/>
               <a:buFont typeface="Arial"/>
-              <a:buChar char="●"/>
+              <a:buChar char="•"/>
             </a:pPr>
             <a:r>
               <a:rPr b="0" sz="1500">
@@ -5632,19 +5532,15 @@
             </a:r>
           </a:p>
           <a:p>
-            <a:pPr marL="310896" indent="-237744">
+            <a:pPr marL="274320" indent="-274320">
               <a:lnSpc>
                 <a:spcPct val="125000"/>
               </a:lnSpc>
               <a:spcAft>
                 <a:spcPts val="500"/>
               </a:spcAft>
-              <a:buClr>
-                <a:srgbClr val="1D4ED8"/>
-              </a:buClr>
-              <a:buSzPct val="76000"/>
               <a:buFont typeface="Arial"/>
-              <a:buChar char="●"/>
+              <a:buChar char="•"/>
             </a:pPr>
             <a:r>
               <a:rPr b="0" sz="1500">
@@ -5694,19 +5590,15 @@
             </a:r>
           </a:p>
           <a:p>
-            <a:pPr marL="310896" indent="-237744">
+            <a:pPr marL="274320" indent="-274320">
               <a:lnSpc>
                 <a:spcPct val="125000"/>
               </a:lnSpc>
               <a:spcAft>
                 <a:spcPts val="500"/>
               </a:spcAft>
-              <a:buClr>
-                <a:srgbClr val="1D4ED8"/>
-              </a:buClr>
-              <a:buSzPct val="76000"/>
               <a:buFont typeface="Arial"/>
-              <a:buChar char="●"/>
+              <a:buChar char="•"/>
             </a:pPr>
             <a:r>
               <a:rPr b="1" sz="1500">
@@ -5728,19 +5620,15 @@
             </a:r>
           </a:p>
           <a:p>
-            <a:pPr marL="310896" indent="-237744">
+            <a:pPr marL="274320" indent="-274320">
               <a:lnSpc>
                 <a:spcPct val="125000"/>
               </a:lnSpc>
               <a:spcAft>
                 <a:spcPts val="500"/>
               </a:spcAft>
-              <a:buClr>
-                <a:srgbClr val="1D4ED8"/>
-              </a:buClr>
-              <a:buSzPct val="76000"/>
               <a:buFont typeface="Arial"/>
-              <a:buChar char="●"/>
+              <a:buChar char="•"/>
             </a:pPr>
             <a:r>
               <a:rPr b="0" sz="1500">
@@ -6016,19 +5904,15 @@
           </a:bodyPr>
           <a:lstStyle/>
           <a:p>
-            <a:pPr marL="310896" indent="-237744">
+            <a:pPr marL="274320" indent="-274320">
               <a:lnSpc>
                 <a:spcPct val="125000"/>
               </a:lnSpc>
               <a:spcAft>
                 <a:spcPts val="500"/>
               </a:spcAft>
-              <a:buClr>
-                <a:srgbClr val="1D4ED8"/>
-              </a:buClr>
-              <a:buSzPct val="76000"/>
               <a:buFont typeface="Arial"/>
-              <a:buChar char="●"/>
+              <a:buChar char="•"/>
             </a:pPr>
             <a:r>
               <a:rPr b="1" sz="1400">
@@ -6068,19 +5952,15 @@
             </a:r>
           </a:p>
           <a:p>
-            <a:pPr marL="310896" indent="-237744">
+            <a:pPr marL="274320" indent="-274320">
               <a:lnSpc>
                 <a:spcPct val="125000"/>
               </a:lnSpc>
               <a:spcAft>
                 <a:spcPts val="500"/>
               </a:spcAft>
-              <a:buClr>
-                <a:srgbClr val="1D4ED8"/>
-              </a:buClr>
-              <a:buSzPct val="76000"/>
               <a:buFont typeface="Arial"/>
-              <a:buChar char="●"/>
+              <a:buChar char="•"/>
             </a:pPr>
             <a:r>
               <a:rPr b="1" sz="1400">
@@ -6356,19 +6236,15 @@
           </a:bodyPr>
           <a:lstStyle/>
           <a:p>
-            <a:pPr marL="310896" indent="-237744">
+            <a:pPr marL="274320" indent="-274320">
               <a:lnSpc>
                 <a:spcPct val="125000"/>
               </a:lnSpc>
               <a:spcAft>
                 <a:spcPts val="500"/>
               </a:spcAft>
-              <a:buClr>
-                <a:srgbClr val="1D4ED8"/>
-              </a:buClr>
-              <a:buSzPct val="76000"/>
               <a:buFont typeface="Arial"/>
-              <a:buChar char="●"/>
+              <a:buChar char="•"/>
             </a:pPr>
             <a:r>
               <a:rPr b="1" sz="1400">
@@ -6390,19 +6266,15 @@
             </a:r>
           </a:p>
           <a:p>
-            <a:pPr marL="310896" indent="-237744">
+            <a:pPr marL="274320" indent="-274320">
               <a:lnSpc>
                 <a:spcPct val="125000"/>
               </a:lnSpc>
               <a:spcAft>
                 <a:spcPts val="500"/>
               </a:spcAft>
-              <a:buClr>
-                <a:srgbClr val="1D4ED8"/>
-              </a:buClr>
-              <a:buSzPct val="76000"/>
               <a:buFont typeface="Arial"/>
-              <a:buChar char="●"/>
+              <a:buChar char="•"/>
             </a:pPr>
             <a:r>
               <a:rPr b="1" sz="1400">
@@ -6706,19 +6578,15 @@
             </a:r>
           </a:p>
           <a:p>
-            <a:pPr marL="310896" indent="-237744">
+            <a:pPr marL="274320" indent="-274320">
               <a:lnSpc>
                 <a:spcPct val="125000"/>
               </a:lnSpc>
               <a:spcAft>
                 <a:spcPts val="500"/>
               </a:spcAft>
-              <a:buClr>
-                <a:srgbClr val="1D4ED8"/>
-              </a:buClr>
-              <a:buSzPct val="76000"/>
               <a:buFont typeface="Arial"/>
-              <a:buChar char="●"/>
+              <a:buChar char="•"/>
             </a:pPr>
             <a:r>
               <a:rPr b="1" sz="1400">
@@ -6731,19 +6599,15 @@
             </a:r>
           </a:p>
           <a:p>
-            <a:pPr marL="310896" indent="-237744">
+            <a:pPr marL="274320" indent="-274320">
               <a:lnSpc>
                 <a:spcPct val="125000"/>
               </a:lnSpc>
               <a:spcAft>
                 <a:spcPts val="500"/>
               </a:spcAft>
-              <a:buClr>
-                <a:srgbClr val="1D4ED8"/>
-              </a:buClr>
-              <a:buSzPct val="76000"/>
               <a:buFont typeface="Arial"/>
-              <a:buChar char="●"/>
+              <a:buChar char="•"/>
             </a:pPr>
             <a:r>
               <a:rPr b="0" sz="1400">
@@ -6775,19 +6639,15 @@
             </a:r>
           </a:p>
           <a:p>
-            <a:pPr marL="310896" indent="-237744">
+            <a:pPr marL="274320" indent="-274320">
               <a:lnSpc>
                 <a:spcPct val="125000"/>
               </a:lnSpc>
               <a:spcAft>
                 <a:spcPts val="500"/>
               </a:spcAft>
-              <a:buClr>
-                <a:srgbClr val="1D4ED8"/>
-              </a:buClr>
-              <a:buSzPct val="76000"/>
               <a:buFont typeface="Arial"/>
-              <a:buChar char="●"/>
+              <a:buChar char="•"/>
             </a:pPr>
             <a:r>
               <a:rPr b="1" sz="1400">
@@ -6800,19 +6660,15 @@
             </a:r>
           </a:p>
           <a:p>
-            <a:pPr marL="310896" indent="-237744">
+            <a:pPr marL="274320" indent="-274320">
               <a:lnSpc>
                 <a:spcPct val="125000"/>
               </a:lnSpc>
               <a:spcAft>
                 <a:spcPts val="500"/>
               </a:spcAft>
-              <a:buClr>
-                <a:srgbClr val="1D4ED8"/>
-              </a:buClr>
-              <a:buSzPct val="76000"/>
               <a:buFont typeface="Arial"/>
-              <a:buChar char="●"/>
+              <a:buChar char="•"/>
             </a:pPr>
             <a:r>
               <a:rPr b="0" sz="1400">
@@ -6844,19 +6700,15 @@
             </a:r>
           </a:p>
           <a:p>
-            <a:pPr marL="310896" indent="-237744">
+            <a:pPr marL="274320" indent="-274320">
               <a:lnSpc>
                 <a:spcPct val="125000"/>
               </a:lnSpc>
               <a:spcAft>
                 <a:spcPts val="500"/>
               </a:spcAft>
-              <a:buClr>
-                <a:srgbClr val="1D4ED8"/>
-              </a:buClr>
-              <a:buSzPct val="76000"/>
               <a:buFont typeface="Arial"/>
-              <a:buChar char="●"/>
+              <a:buChar char="•"/>
             </a:pPr>
             <a:r>
               <a:rPr b="0" sz="1400">
@@ -6869,19 +6721,15 @@
             </a:r>
           </a:p>
           <a:p>
-            <a:pPr marL="310896" indent="-237744">
+            <a:pPr marL="274320" indent="-274320">
               <a:lnSpc>
                 <a:spcPct val="125000"/>
               </a:lnSpc>
               <a:spcAft>
                 <a:spcPts val="500"/>
               </a:spcAft>
-              <a:buClr>
-                <a:srgbClr val="1D4ED8"/>
-              </a:buClr>
-              <a:buSzPct val="76000"/>
               <a:buFont typeface="Arial"/>
-              <a:buChar char="●"/>
+              <a:buChar char="•"/>
             </a:pPr>
             <a:r>
               <a:rPr b="0" sz="1400">
@@ -7130,19 +6978,15 @@
           </a:bodyPr>
           <a:lstStyle/>
           <a:p>
-            <a:pPr marL="310896" indent="-237744">
+            <a:pPr marL="274320" indent="-274320">
               <a:lnSpc>
                 <a:spcPct val="125000"/>
               </a:lnSpc>
               <a:spcAft>
                 <a:spcPts val="500"/>
               </a:spcAft>
-              <a:buClr>
-                <a:srgbClr val="1D4ED8"/>
-              </a:buClr>
-              <a:buSzPct val="76000"/>
               <a:buFont typeface="Arial"/>
-              <a:buChar char="●"/>
+              <a:buChar char="•"/>
             </a:pPr>
             <a:r>
               <a:rPr b="1" sz="1400">
@@ -7164,19 +7008,15 @@
             </a:r>
           </a:p>
           <a:p>
-            <a:pPr marL="310896" indent="-237744">
+            <a:pPr marL="274320" indent="-274320">
               <a:lnSpc>
                 <a:spcPct val="125000"/>
               </a:lnSpc>
               <a:spcAft>
                 <a:spcPts val="500"/>
               </a:spcAft>
-              <a:buClr>
-                <a:srgbClr val="1D4ED8"/>
-              </a:buClr>
-              <a:buSzPct val="76000"/>
               <a:buFont typeface="Arial"/>
-              <a:buChar char="●"/>
+              <a:buChar char="•"/>
             </a:pPr>
             <a:r>
               <a:rPr b="1" sz="1400">

--- a/term-project-lstm-vs-transformer-agnews/deliverables/5_presentation_v2.pptx
+++ b/term-project-lstm-vs-transformer-agnews/deliverables/5_presentation_v2.pptx
@@ -5,18 +5,18 @@
     <p:sldMasterId id="2147483648" r:id="rId1"/>
   </p:sldMasterIdLst>
   <p:sldIdLst>
-    <p:sldId id="256" r:id="rId7"/>
-    <p:sldId id="257" r:id="rId8"/>
-    <p:sldId id="258" r:id="rId9"/>
-    <p:sldId id="259" r:id="rId10"/>
-    <p:sldId id="260" r:id="rId11"/>
-    <p:sldId id="261" r:id="rId12"/>
-    <p:sldId id="262" r:id="rId13"/>
-    <p:sldId id="263" r:id="rId14"/>
-    <p:sldId id="264" r:id="rId15"/>
-    <p:sldId id="265" r:id="rId16"/>
+    <p:sldId id="256" r:id="rId2"/>
+    <p:sldId id="257" r:id="rId3"/>
+    <p:sldId id="258" r:id="rId4"/>
+    <p:sldId id="259" r:id="rId5"/>
+    <p:sldId id="260" r:id="rId6"/>
+    <p:sldId id="261" r:id="rId7"/>
+    <p:sldId id="262" r:id="rId8"/>
+    <p:sldId id="263" r:id="rId9"/>
+    <p:sldId id="264" r:id="rId10"/>
+    <p:sldId id="265" r:id="rId11"/>
   </p:sldIdLst>
-  <p:sldSz cx="12191695" cy="6858000" type="screen4x3"/>
+  <p:sldSz cx="12192000" cy="6858000"/>
   <p:notesSz cx="6858000" cy="9144000"/>
   <p:defaultTextStyle>
     <a:defPPr>
@@ -113,6 +113,22 @@
       </a:defRPr>
     </a:lvl9pPr>
   </p:defaultTextStyle>
+  <p:extLst>
+    <p:ext uri="{EFAFB233-063F-42B5-8137-9DF3F51BA10A}">
+      <p15:sldGuideLst xmlns:p15="http://schemas.microsoft.com/office/powerpoint/2012/main">
+        <p15:guide id="1" orient="horz" pos="2160">
+          <p15:clr>
+            <a:srgbClr val="A4A3A4"/>
+          </p15:clr>
+        </p15:guide>
+        <p15:guide id="2" pos="2880">
+          <p15:clr>
+            <a:srgbClr val="A4A3A4"/>
+          </p15:clr>
+        </p15:guide>
+      </p15:sldGuideLst>
+    </p:ext>
+  </p:extLst>
 </p:presentation>
 </file>
 
@@ -154,10 +170,9 @@
           <a:lstStyle/>
           <a:p>
             <a:r>
-              <a:rPr lang="en-US" smtClean="0"/>
+              <a:rPr lang="en-US"/>
               <a:t>Click to edit Master title style</a:t>
             </a:r>
-            <a:endParaRPr lang="en-US"/>
           </a:p>
         </p:txBody>
       </p:sp>
@@ -273,10 +288,9 @@
           </a:lstStyle>
           <a:p>
             <a:r>
-              <a:rPr lang="en-US" smtClean="0"/>
+              <a:rPr lang="en-US"/>
               <a:t>Click to edit Master subtitle style</a:t>
             </a:r>
-            <a:endParaRPr lang="en-US"/>
           </a:p>
         </p:txBody>
       </p:sp>
@@ -297,7 +311,7 @@
           <a:p>
             <a:fld id="{5BCAD085-E8A6-8845-BD4E-CB4CCA059FC4}" type="datetimeFigureOut">
               <a:rPr lang="en-US" smtClean="0"/>
-              <a:t>1/27/13</a:t>
+              <a:t>6/20/26</a:t>
             </a:fld>
             <a:endParaRPr lang="en-US"/>
           </a:p>
@@ -391,10 +405,9 @@
           <a:lstStyle/>
           <a:p>
             <a:r>
-              <a:rPr lang="en-US" smtClean="0"/>
+              <a:rPr lang="en-US"/>
               <a:t>Click to edit Master title style</a:t>
             </a:r>
-            <a:endParaRPr lang="en-US"/>
           </a:p>
         </p:txBody>
       </p:sp>
@@ -415,38 +428,37 @@
           <a:p>
             <a:pPr lvl="0"/>
             <a:r>
-              <a:rPr lang="en-US" smtClean="0"/>
+              <a:rPr lang="en-US"/>
               <a:t>Click to edit Master text styles</a:t>
             </a:r>
           </a:p>
           <a:p>
             <a:pPr lvl="1"/>
             <a:r>
-              <a:rPr lang="en-US" smtClean="0"/>
+              <a:rPr lang="en-US"/>
               <a:t>Second level</a:t>
             </a:r>
           </a:p>
           <a:p>
             <a:pPr lvl="2"/>
             <a:r>
-              <a:rPr lang="en-US" smtClean="0"/>
+              <a:rPr lang="en-US"/>
               <a:t>Third level</a:t>
             </a:r>
           </a:p>
           <a:p>
             <a:pPr lvl="3"/>
             <a:r>
-              <a:rPr lang="en-US" smtClean="0"/>
+              <a:rPr lang="en-US"/>
               <a:t>Fourth level</a:t>
             </a:r>
           </a:p>
           <a:p>
             <a:pPr lvl="4"/>
             <a:r>
-              <a:rPr lang="en-US" smtClean="0"/>
+              <a:rPr lang="en-US"/>
               <a:t>Fifth level</a:t>
             </a:r>
-            <a:endParaRPr lang="en-US"/>
           </a:p>
         </p:txBody>
       </p:sp>
@@ -467,7 +479,7 @@
           <a:p>
             <a:fld id="{5BCAD085-E8A6-8845-BD4E-CB4CCA059FC4}" type="datetimeFigureOut">
               <a:rPr lang="en-US" smtClean="0"/>
-              <a:t>1/27/13</a:t>
+              <a:t>6/20/26</a:t>
             </a:fld>
             <a:endParaRPr lang="en-US"/>
           </a:p>
@@ -566,10 +578,9 @@
           <a:lstStyle/>
           <a:p>
             <a:r>
-              <a:rPr lang="en-US" smtClean="0"/>
+              <a:rPr lang="en-US"/>
               <a:t>Click to edit Master title style</a:t>
             </a:r>
-            <a:endParaRPr lang="en-US"/>
           </a:p>
         </p:txBody>
       </p:sp>
@@ -595,38 +606,37 @@
           <a:p>
             <a:pPr lvl="0"/>
             <a:r>
-              <a:rPr lang="en-US" smtClean="0"/>
+              <a:rPr lang="en-US"/>
               <a:t>Click to edit Master text styles</a:t>
             </a:r>
           </a:p>
           <a:p>
             <a:pPr lvl="1"/>
             <a:r>
-              <a:rPr lang="en-US" smtClean="0"/>
+              <a:rPr lang="en-US"/>
               <a:t>Second level</a:t>
             </a:r>
           </a:p>
           <a:p>
             <a:pPr lvl="2"/>
             <a:r>
-              <a:rPr lang="en-US" smtClean="0"/>
+              <a:rPr lang="en-US"/>
               <a:t>Third level</a:t>
             </a:r>
           </a:p>
           <a:p>
             <a:pPr lvl="3"/>
             <a:r>
-              <a:rPr lang="en-US" smtClean="0"/>
+              <a:rPr lang="en-US"/>
               <a:t>Fourth level</a:t>
             </a:r>
           </a:p>
           <a:p>
             <a:pPr lvl="4"/>
             <a:r>
-              <a:rPr lang="en-US" smtClean="0"/>
+              <a:rPr lang="en-US"/>
               <a:t>Fifth level</a:t>
             </a:r>
-            <a:endParaRPr lang="en-US"/>
           </a:p>
         </p:txBody>
       </p:sp>
@@ -647,7 +657,7 @@
           <a:p>
             <a:fld id="{5BCAD085-E8A6-8845-BD4E-CB4CCA059FC4}" type="datetimeFigureOut">
               <a:rPr lang="en-US" smtClean="0"/>
-              <a:t>1/27/13</a:t>
+              <a:t>6/20/26</a:t>
             </a:fld>
             <a:endParaRPr lang="en-US"/>
           </a:p>
@@ -741,10 +751,9 @@
           <a:lstStyle/>
           <a:p>
             <a:r>
-              <a:rPr lang="en-US" smtClean="0"/>
+              <a:rPr lang="en-US"/>
               <a:t>Click to edit Master title style</a:t>
             </a:r>
-            <a:endParaRPr lang="en-US"/>
           </a:p>
         </p:txBody>
       </p:sp>
@@ -765,38 +774,37 @@
           <a:p>
             <a:pPr lvl="0"/>
             <a:r>
-              <a:rPr lang="en-US" smtClean="0"/>
+              <a:rPr lang="en-US"/>
               <a:t>Click to edit Master text styles</a:t>
             </a:r>
           </a:p>
           <a:p>
             <a:pPr lvl="1"/>
             <a:r>
-              <a:rPr lang="en-US" smtClean="0"/>
+              <a:rPr lang="en-US"/>
               <a:t>Second level</a:t>
             </a:r>
           </a:p>
           <a:p>
             <a:pPr lvl="2"/>
             <a:r>
-              <a:rPr lang="en-US" smtClean="0"/>
+              <a:rPr lang="en-US"/>
               <a:t>Third level</a:t>
             </a:r>
           </a:p>
           <a:p>
             <a:pPr lvl="3"/>
             <a:r>
-              <a:rPr lang="en-US" smtClean="0"/>
+              <a:rPr lang="en-US"/>
               <a:t>Fourth level</a:t>
             </a:r>
           </a:p>
           <a:p>
             <a:pPr lvl="4"/>
             <a:r>
-              <a:rPr lang="en-US" smtClean="0"/>
+              <a:rPr lang="en-US"/>
               <a:t>Fifth level</a:t>
             </a:r>
-            <a:endParaRPr lang="en-US"/>
           </a:p>
         </p:txBody>
       </p:sp>
@@ -817,7 +825,7 @@
           <a:p>
             <a:fld id="{5BCAD085-E8A6-8845-BD4E-CB4CCA059FC4}" type="datetimeFigureOut">
               <a:rPr lang="en-US" smtClean="0"/>
-              <a:t>1/27/13</a:t>
+              <a:t>6/20/26</a:t>
             </a:fld>
             <a:endParaRPr lang="en-US"/>
           </a:p>
@@ -920,10 +928,9 @@
           </a:lstStyle>
           <a:p>
             <a:r>
-              <a:rPr lang="en-US" smtClean="0"/>
+              <a:rPr lang="en-US"/>
               <a:t>Click to edit Master title style</a:t>
             </a:r>
-            <a:endParaRPr lang="en-US"/>
           </a:p>
         </p:txBody>
       </p:sp>
@@ -1040,7 +1047,7 @@
           <a:p>
             <a:pPr lvl="0"/>
             <a:r>
-              <a:rPr lang="en-US" smtClean="0"/>
+              <a:rPr lang="en-US"/>
               <a:t>Click to edit Master text styles</a:t>
             </a:r>
           </a:p>
@@ -1063,7 +1070,7 @@
           <a:p>
             <a:fld id="{5BCAD085-E8A6-8845-BD4E-CB4CCA059FC4}" type="datetimeFigureOut">
               <a:rPr lang="en-US" smtClean="0"/>
-              <a:t>1/27/13</a:t>
+              <a:t>6/20/26</a:t>
             </a:fld>
             <a:endParaRPr lang="en-US"/>
           </a:p>
@@ -1157,10 +1164,9 @@
           <a:lstStyle/>
           <a:p>
             <a:r>
-              <a:rPr lang="en-US" smtClean="0"/>
+              <a:rPr lang="en-US"/>
               <a:t>Click to edit Master title style</a:t>
             </a:r>
-            <a:endParaRPr lang="en-US"/>
           </a:p>
         </p:txBody>
       </p:sp>
@@ -1214,38 +1220,37 @@
           <a:p>
             <a:pPr lvl="0"/>
             <a:r>
-              <a:rPr lang="en-US" smtClean="0"/>
+              <a:rPr lang="en-US"/>
               <a:t>Click to edit Master text styles</a:t>
             </a:r>
           </a:p>
           <a:p>
             <a:pPr lvl="1"/>
             <a:r>
-              <a:rPr lang="en-US" smtClean="0"/>
+              <a:rPr lang="en-US"/>
               <a:t>Second level</a:t>
             </a:r>
           </a:p>
           <a:p>
             <a:pPr lvl="2"/>
             <a:r>
-              <a:rPr lang="en-US" smtClean="0"/>
+              <a:rPr lang="en-US"/>
               <a:t>Third level</a:t>
             </a:r>
           </a:p>
           <a:p>
             <a:pPr lvl="3"/>
             <a:r>
-              <a:rPr lang="en-US" smtClean="0"/>
+              <a:rPr lang="en-US"/>
               <a:t>Fourth level</a:t>
             </a:r>
           </a:p>
           <a:p>
             <a:pPr lvl="4"/>
             <a:r>
-              <a:rPr lang="en-US" smtClean="0"/>
+              <a:rPr lang="en-US"/>
               <a:t>Fifth level</a:t>
             </a:r>
-            <a:endParaRPr lang="en-US"/>
           </a:p>
         </p:txBody>
       </p:sp>
@@ -1299,38 +1304,37 @@
           <a:p>
             <a:pPr lvl="0"/>
             <a:r>
-              <a:rPr lang="en-US" smtClean="0"/>
+              <a:rPr lang="en-US"/>
               <a:t>Click to edit Master text styles</a:t>
             </a:r>
           </a:p>
           <a:p>
             <a:pPr lvl="1"/>
             <a:r>
-              <a:rPr lang="en-US" smtClean="0"/>
+              <a:rPr lang="en-US"/>
               <a:t>Second level</a:t>
             </a:r>
           </a:p>
           <a:p>
             <a:pPr lvl="2"/>
             <a:r>
-              <a:rPr lang="en-US" smtClean="0"/>
+              <a:rPr lang="en-US"/>
               <a:t>Third level</a:t>
             </a:r>
           </a:p>
           <a:p>
             <a:pPr lvl="3"/>
             <a:r>
-              <a:rPr lang="en-US" smtClean="0"/>
+              <a:rPr lang="en-US"/>
               <a:t>Fourth level</a:t>
             </a:r>
           </a:p>
           <a:p>
             <a:pPr lvl="4"/>
             <a:r>
-              <a:rPr lang="en-US" smtClean="0"/>
+              <a:rPr lang="en-US"/>
               <a:t>Fifth level</a:t>
             </a:r>
-            <a:endParaRPr lang="en-US"/>
           </a:p>
         </p:txBody>
       </p:sp>
@@ -1351,7 +1355,7 @@
           <a:p>
             <a:fld id="{5BCAD085-E8A6-8845-BD4E-CB4CCA059FC4}" type="datetimeFigureOut">
               <a:rPr lang="en-US" smtClean="0"/>
-              <a:t>1/27/13</a:t>
+              <a:t>6/20/26</a:t>
             </a:fld>
             <a:endParaRPr lang="en-US"/>
           </a:p>
@@ -1449,10 +1453,9 @@
           </a:lstStyle>
           <a:p>
             <a:r>
-              <a:rPr lang="en-US" smtClean="0"/>
+              <a:rPr lang="en-US"/>
               <a:t>Click to edit Master title style</a:t>
             </a:r>
-            <a:endParaRPr lang="en-US"/>
           </a:p>
         </p:txBody>
       </p:sp>
@@ -1515,7 +1518,7 @@
           <a:p>
             <a:pPr lvl="0"/>
             <a:r>
-              <a:rPr lang="en-US" smtClean="0"/>
+              <a:rPr lang="en-US"/>
               <a:t>Click to edit Master text styles</a:t>
             </a:r>
           </a:p>
@@ -1571,38 +1574,37 @@
           <a:p>
             <a:pPr lvl="0"/>
             <a:r>
-              <a:rPr lang="en-US" smtClean="0"/>
+              <a:rPr lang="en-US"/>
               <a:t>Click to edit Master text styles</a:t>
             </a:r>
           </a:p>
           <a:p>
             <a:pPr lvl="1"/>
             <a:r>
-              <a:rPr lang="en-US" smtClean="0"/>
+              <a:rPr lang="en-US"/>
               <a:t>Second level</a:t>
             </a:r>
           </a:p>
           <a:p>
             <a:pPr lvl="2"/>
             <a:r>
-              <a:rPr lang="en-US" smtClean="0"/>
+              <a:rPr lang="en-US"/>
               <a:t>Third level</a:t>
             </a:r>
           </a:p>
           <a:p>
             <a:pPr lvl="3"/>
             <a:r>
-              <a:rPr lang="en-US" smtClean="0"/>
+              <a:rPr lang="en-US"/>
               <a:t>Fourth level</a:t>
             </a:r>
           </a:p>
           <a:p>
             <a:pPr lvl="4"/>
             <a:r>
-              <a:rPr lang="en-US" smtClean="0"/>
+              <a:rPr lang="en-US"/>
               <a:t>Fifth level</a:t>
             </a:r>
-            <a:endParaRPr lang="en-US"/>
           </a:p>
         </p:txBody>
       </p:sp>
@@ -1665,7 +1667,7 @@
           <a:p>
             <a:pPr lvl="0"/>
             <a:r>
-              <a:rPr lang="en-US" smtClean="0"/>
+              <a:rPr lang="en-US"/>
               <a:t>Click to edit Master text styles</a:t>
             </a:r>
           </a:p>
@@ -1721,38 +1723,37 @@
           <a:p>
             <a:pPr lvl="0"/>
             <a:r>
-              <a:rPr lang="en-US" smtClean="0"/>
+              <a:rPr lang="en-US"/>
               <a:t>Click to edit Master text styles</a:t>
             </a:r>
           </a:p>
           <a:p>
             <a:pPr lvl="1"/>
             <a:r>
-              <a:rPr lang="en-US" smtClean="0"/>
+              <a:rPr lang="en-US"/>
               <a:t>Second level</a:t>
             </a:r>
           </a:p>
           <a:p>
             <a:pPr lvl="2"/>
             <a:r>
-              <a:rPr lang="en-US" smtClean="0"/>
+              <a:rPr lang="en-US"/>
               <a:t>Third level</a:t>
             </a:r>
           </a:p>
           <a:p>
             <a:pPr lvl="3"/>
             <a:r>
-              <a:rPr lang="en-US" smtClean="0"/>
+              <a:rPr lang="en-US"/>
               <a:t>Fourth level</a:t>
             </a:r>
           </a:p>
           <a:p>
             <a:pPr lvl="4"/>
             <a:r>
-              <a:rPr lang="en-US" smtClean="0"/>
+              <a:rPr lang="en-US"/>
               <a:t>Fifth level</a:t>
             </a:r>
-            <a:endParaRPr lang="en-US"/>
           </a:p>
         </p:txBody>
       </p:sp>
@@ -1773,7 +1774,7 @@
           <a:p>
             <a:fld id="{5BCAD085-E8A6-8845-BD4E-CB4CCA059FC4}" type="datetimeFigureOut">
               <a:rPr lang="en-US" smtClean="0"/>
-              <a:t>1/27/13</a:t>
+              <a:t>6/20/26</a:t>
             </a:fld>
             <a:endParaRPr lang="en-US"/>
           </a:p>
@@ -1867,10 +1868,9 @@
           <a:lstStyle/>
           <a:p>
             <a:r>
-              <a:rPr lang="en-US" smtClean="0"/>
+              <a:rPr lang="en-US"/>
               <a:t>Click to edit Master title style</a:t>
             </a:r>
-            <a:endParaRPr lang="en-US"/>
           </a:p>
         </p:txBody>
       </p:sp>
@@ -1891,7 +1891,7 @@
           <a:p>
             <a:fld id="{5BCAD085-E8A6-8845-BD4E-CB4CCA059FC4}" type="datetimeFigureOut">
               <a:rPr lang="en-US" smtClean="0"/>
-              <a:t>1/27/13</a:t>
+              <a:t>6/20/26</a:t>
             </a:fld>
             <a:endParaRPr lang="en-US"/>
           </a:p>
@@ -1986,7 +1986,7 @@
           <a:p>
             <a:fld id="{5BCAD085-E8A6-8845-BD4E-CB4CCA059FC4}" type="datetimeFigureOut">
               <a:rPr lang="en-US" smtClean="0"/>
-              <a:t>1/27/13</a:t>
+              <a:t>6/20/26</a:t>
             </a:fld>
             <a:endParaRPr lang="en-US"/>
           </a:p>
@@ -2089,10 +2089,9 @@
           </a:lstStyle>
           <a:p>
             <a:r>
-              <a:rPr lang="en-US" smtClean="0"/>
+              <a:rPr lang="en-US"/>
               <a:t>Click to edit Master title style</a:t>
             </a:r>
-            <a:endParaRPr lang="en-US"/>
           </a:p>
         </p:txBody>
       </p:sp>
@@ -2146,38 +2145,37 @@
           <a:p>
             <a:pPr lvl="0"/>
             <a:r>
-              <a:rPr lang="en-US" smtClean="0"/>
+              <a:rPr lang="en-US"/>
               <a:t>Click to edit Master text styles</a:t>
             </a:r>
           </a:p>
           <a:p>
             <a:pPr lvl="1"/>
             <a:r>
-              <a:rPr lang="en-US" smtClean="0"/>
+              <a:rPr lang="en-US"/>
               <a:t>Second level</a:t>
             </a:r>
           </a:p>
           <a:p>
             <a:pPr lvl="2"/>
             <a:r>
-              <a:rPr lang="en-US" smtClean="0"/>
+              <a:rPr lang="en-US"/>
               <a:t>Third level</a:t>
             </a:r>
           </a:p>
           <a:p>
             <a:pPr lvl="3"/>
             <a:r>
-              <a:rPr lang="en-US" smtClean="0"/>
+              <a:rPr lang="en-US"/>
               <a:t>Fourth level</a:t>
             </a:r>
           </a:p>
           <a:p>
             <a:pPr lvl="4"/>
             <a:r>
-              <a:rPr lang="en-US" smtClean="0"/>
+              <a:rPr lang="en-US"/>
               <a:t>Fifth level</a:t>
             </a:r>
-            <a:endParaRPr lang="en-US"/>
           </a:p>
         </p:txBody>
       </p:sp>
@@ -2240,7 +2238,7 @@
           <a:p>
             <a:pPr lvl="0"/>
             <a:r>
-              <a:rPr lang="en-US" smtClean="0"/>
+              <a:rPr lang="en-US"/>
               <a:t>Click to edit Master text styles</a:t>
             </a:r>
           </a:p>
@@ -2263,7 +2261,7 @@
           <a:p>
             <a:fld id="{5BCAD085-E8A6-8845-BD4E-CB4CCA059FC4}" type="datetimeFigureOut">
               <a:rPr lang="en-US" smtClean="0"/>
-              <a:t>1/27/13</a:t>
+              <a:t>6/20/26</a:t>
             </a:fld>
             <a:endParaRPr lang="en-US"/>
           </a:p>
@@ -2366,10 +2364,9 @@
           </a:lstStyle>
           <a:p>
             <a:r>
-              <a:rPr lang="en-US" smtClean="0"/>
+              <a:rPr lang="en-US"/>
               <a:t>Click to edit Master title style</a:t>
             </a:r>
-            <a:endParaRPr lang="en-US"/>
           </a:p>
         </p:txBody>
       </p:sp>
@@ -2493,7 +2490,7 @@
           <a:p>
             <a:pPr lvl="0"/>
             <a:r>
-              <a:rPr lang="en-US" smtClean="0"/>
+              <a:rPr lang="en-US"/>
               <a:t>Click to edit Master text styles</a:t>
             </a:r>
           </a:p>
@@ -2516,7 +2513,7 @@
           <a:p>
             <a:fld id="{5BCAD085-E8A6-8845-BD4E-CB4CCA059FC4}" type="datetimeFigureOut">
               <a:rPr lang="en-US" smtClean="0"/>
-              <a:t>1/27/13</a:t>
+              <a:t>6/20/26</a:t>
             </a:fld>
             <a:endParaRPr lang="en-US"/>
           </a:p>
@@ -2625,10 +2622,9 @@
           <a:lstStyle/>
           <a:p>
             <a:r>
-              <a:rPr lang="en-US" smtClean="0"/>
+              <a:rPr lang="en-US"/>
               <a:t>Click to edit Master title style</a:t>
             </a:r>
-            <a:endParaRPr lang="en-US"/>
           </a:p>
         </p:txBody>
       </p:sp>
@@ -2659,38 +2655,37 @@
           <a:p>
             <a:pPr lvl="0"/>
             <a:r>
-              <a:rPr lang="en-US" smtClean="0"/>
+              <a:rPr lang="en-US"/>
               <a:t>Click to edit Master text styles</a:t>
             </a:r>
           </a:p>
           <a:p>
             <a:pPr lvl="1"/>
             <a:r>
-              <a:rPr lang="en-US" smtClean="0"/>
+              <a:rPr lang="en-US"/>
               <a:t>Second level</a:t>
             </a:r>
           </a:p>
           <a:p>
             <a:pPr lvl="2"/>
             <a:r>
-              <a:rPr lang="en-US" smtClean="0"/>
+              <a:rPr lang="en-US"/>
               <a:t>Third level</a:t>
             </a:r>
           </a:p>
           <a:p>
             <a:pPr lvl="3"/>
             <a:r>
-              <a:rPr lang="en-US" smtClean="0"/>
+              <a:rPr lang="en-US"/>
               <a:t>Fourth level</a:t>
             </a:r>
           </a:p>
           <a:p>
             <a:pPr lvl="4"/>
             <a:r>
-              <a:rPr lang="en-US" smtClean="0"/>
+              <a:rPr lang="en-US"/>
               <a:t>Fifth level</a:t>
             </a:r>
-            <a:endParaRPr lang="en-US"/>
           </a:p>
         </p:txBody>
       </p:sp>
@@ -2729,7 +2724,7 @@
           <a:p>
             <a:fld id="{5BCAD085-E8A6-8845-BD4E-CB4CCA059FC4}" type="datetimeFigureOut">
               <a:rPr lang="en-US" smtClean="0"/>
-              <a:t>1/27/13</a:t>
+              <a:t>6/20/26</a:t>
             </a:fld>
             <a:endParaRPr lang="en-US"/>
           </a:p>
@@ -3088,7 +3083,7 @@
 </file>
 
 <file path=ppt/slides/slide1.xml><?xml version="1.0" encoding="utf-8"?>
-<p:sld xmlns:a="http://schemas.openxmlformats.org/drawingml/2006/main" xmlns:p="http://schemas.openxmlformats.org/presentationml/2006/main" xmlns:r="http://schemas.openxmlformats.org/officeDocument/2006/relationships">
+<p:sld xmlns:a="http://schemas.openxmlformats.org/drawingml/2006/main" xmlns:r="http://schemas.openxmlformats.org/officeDocument/2006/relationships" xmlns:p="http://schemas.openxmlformats.org/presentationml/2006/main">
   <p:cSld>
     <p:spTree>
       <p:nvGrpSpPr>
@@ -3096,7 +3091,14 @@
         <p:cNvGrpSpPr/>
         <p:nvPr/>
       </p:nvGrpSpPr>
-      <p:grpSpPr/>
+      <p:grpSpPr>
+        <a:xfrm>
+          <a:off x="0" y="0"/>
+          <a:ext cx="0" cy="0"/>
+          <a:chOff x="0" y="0"/>
+          <a:chExt cx="0" cy="0"/>
+        </a:xfrm>
+      </p:grpSpPr>
       <p:sp>
         <p:nvSpPr>
           <p:cNvPr id="2" name="Rectangle 1"/>
@@ -3138,6 +3140,7 @@
           <a:lstStyle/>
           <a:p>
             <a:pPr algn="ctr"/>
+            <a:endParaRPr/>
           </a:p>
         </p:txBody>
       </p:sp>
@@ -3158,13 +3161,13 @@
           <a:noFill/>
         </p:spPr>
         <p:txBody>
-          <a:bodyPr wrap="square" lIns="0" rIns="0" tIns="0" bIns="0" anchor="t">
+          <a:bodyPr wrap="square" lIns="0" tIns="0" rIns="0" bIns="0" anchor="t">
             <a:spAutoFit/>
           </a:bodyPr>
           <a:lstStyle/>
           <a:p>
             <a:r>
-              <a:rPr b="1" sz="1400">
+              <a:rPr sz="1400" b="1">
                 <a:solidFill>
                   <a:srgbClr val="1D4ED8"/>
                 </a:solidFill>
@@ -3192,14 +3195,14 @@
           <a:noFill/>
         </p:spPr>
         <p:txBody>
-          <a:bodyPr wrap="square" lIns="0" rIns="0" tIns="0" bIns="0" anchor="t">
+          <a:bodyPr wrap="square" lIns="0" tIns="0" rIns="0" bIns="0" anchor="t">
             <a:spAutoFit/>
           </a:bodyPr>
           <a:lstStyle/>
           <a:p>
             <a:pPr algn="r"/>
             <a:r>
-              <a:rPr b="0" sz="1400">
+              <a:rPr sz="1400" b="0">
                 <a:solidFill>
                   <a:srgbClr val="6B7280"/>
                 </a:solidFill>
@@ -3262,13 +3265,13 @@
           <a:noFill/>
         </p:spPr>
         <p:txBody>
-          <a:bodyPr wrap="square" lIns="0" rIns="0" tIns="0" bIns="0" anchor="t">
+          <a:bodyPr wrap="square" lIns="0" tIns="0" rIns="0" bIns="0" anchor="t">
             <a:spAutoFit/>
           </a:bodyPr>
           <a:lstStyle/>
           <a:p>
             <a:r>
-              <a:rPr b="1" sz="5000">
+              <a:rPr sz="5000" b="1">
                 <a:solidFill>
                   <a:srgbClr val="111827"/>
                 </a:solidFill>
@@ -3277,7 +3280,7 @@
               <a:t>LSTM </a:t>
             </a:r>
             <a:r>
-              <a:rPr b="1" sz="5000">
+              <a:rPr sz="5000" b="1">
                 <a:solidFill>
                   <a:srgbClr val="1D4ED8"/>
                 </a:solidFill>
@@ -3286,7 +3289,7 @@
               <a:t>vs</a:t>
             </a:r>
             <a:r>
-              <a:rPr b="1" sz="5000">
+              <a:rPr sz="5000" b="1">
                 <a:solidFill>
                   <a:srgbClr val="111827"/>
                 </a:solidFill>
@@ -3306,7 +3309,7 @@
         <p:spPr>
           <a:xfrm>
             <a:off x="822960" y="2907792"/>
-            <a:ext cx="10515600" cy="640080"/>
+            <a:ext cx="10515600" cy="492443"/>
           </a:xfrm>
           <a:prstGeom prst="rect">
             <a:avLst/>
@@ -3314,54 +3317,48 @@
           <a:noFill/>
         </p:spPr>
         <p:txBody>
-          <a:bodyPr wrap="square" lIns="0" rIns="0" tIns="0" bIns="0" anchor="t">
+          <a:bodyPr wrap="square" lIns="0" tIns="0" rIns="0" bIns="0" anchor="t">
             <a:spAutoFit/>
           </a:bodyPr>
           <a:lstStyle/>
           <a:p>
             <a:r>
-              <a:rPr b="1" sz="3100">
-                <a:solidFill>
-                  <a:srgbClr val="111827"/>
-                </a:solidFill>
-                <a:latin typeface="Pretendard"/>
-              </a:rPr>
-              <a:t>Encoder, 텍스트 분류에서의 통제된 비교</a:t>
-            </a:r>
-          </a:p>
-        </p:txBody>
-      </p:sp>
-      <p:sp>
-        <p:nvSpPr>
-          <p:cNvPr id="8" name="TextBox 7"/>
-          <p:cNvSpPr txBox="1"/>
-          <p:nvPr/>
-        </p:nvSpPr>
-        <p:spPr>
-          <a:xfrm>
-            <a:off x="822960" y="3858768"/>
-            <a:ext cx="10515600" cy="457200"/>
-          </a:xfrm>
-          <a:prstGeom prst="rect">
-            <a:avLst/>
-          </a:prstGeom>
-          <a:noFill/>
-        </p:spPr>
-        <p:txBody>
-          <a:bodyPr wrap="square" lIns="0" rIns="0" tIns="0" bIns="0" anchor="t">
-            <a:spAutoFit/>
-          </a:bodyPr>
-          <a:lstStyle/>
-          <a:p>
-            <a:r>
-              <a:rPr b="0" sz="1900">
-                <a:solidFill>
-                  <a:srgbClr val="6B7280"/>
-                </a:solidFill>
-                <a:latin typeface="Pretendard"/>
-              </a:rPr>
-              <a:t>AG News 4-class 주제 분류, 두 시퀀스 인코더를 동일 조건에서 비교</a:t>
-            </a:r>
+              <a:rPr lang="ko-KR" altLang="en-US" sz="3200" b="1" dirty="0">
+                <a:latin typeface="Pretendard" panose="02000503000000020004" pitchFamily="2" charset="-127"/>
+                <a:ea typeface="Pretendard" panose="02000503000000020004" pitchFamily="2" charset="-127"/>
+                <a:cs typeface="Pretendard" panose="02000503000000020004" pitchFamily="2" charset="-127"/>
+              </a:rPr>
+              <a:t>두 시퀀스 인코더</a:t>
+            </a:r>
+            <a:r>
+              <a:rPr sz="3100" b="1" dirty="0">
+                <a:latin typeface="Pretendard" panose="02000503000000020004" pitchFamily="2" charset="-127"/>
+                <a:ea typeface="Pretendard" panose="02000503000000020004" pitchFamily="2" charset="-127"/>
+                <a:cs typeface="Pretendard" panose="02000503000000020004" pitchFamily="2" charset="-127"/>
+              </a:rPr>
+              <a:t>, </a:t>
+            </a:r>
+            <a:r>
+              <a:rPr lang="en" altLang="ko-KR" sz="3200" b="1" dirty="0">
+                <a:latin typeface="Pretendard" panose="02000503000000020004" pitchFamily="2" charset="-127"/>
+                <a:ea typeface="Pretendard" panose="02000503000000020004" pitchFamily="2" charset="-127"/>
+                <a:cs typeface="Pretendard" panose="02000503000000020004" pitchFamily="2" charset="-127"/>
+              </a:rPr>
+              <a:t>AG News 4-class </a:t>
+            </a:r>
+            <a:r>
+              <a:rPr lang="ko-KR" altLang="en-US" sz="3200" b="1" dirty="0">
+                <a:latin typeface="Pretendard" panose="02000503000000020004" pitchFamily="2" charset="-127"/>
+                <a:ea typeface="Pretendard" panose="02000503000000020004" pitchFamily="2" charset="-127"/>
+                <a:cs typeface="Pretendard" panose="02000503000000020004" pitchFamily="2" charset="-127"/>
+              </a:rPr>
+              <a:t>주제 분류 비교 실험</a:t>
+            </a:r>
+            <a:endParaRPr sz="3100" b="1" dirty="0">
+              <a:latin typeface="Pretendard" panose="02000503000000020004" pitchFamily="2" charset="-127"/>
+              <a:ea typeface="Pretendard" panose="02000503000000020004" pitchFamily="2" charset="-127"/>
+              <a:cs typeface="Pretendard" panose="02000503000000020004" pitchFamily="2" charset="-127"/>
+            </a:endParaRPr>
           </a:p>
         </p:txBody>
       </p:sp>
@@ -3409,7 +3406,7 @@
         <p:spPr>
           <a:xfrm>
             <a:off x="822960" y="5248656"/>
-            <a:ext cx="1417320" cy="320040"/>
+            <a:ext cx="1417320" cy="230832"/>
           </a:xfrm>
           <a:prstGeom prst="rect">
             <a:avLst/>
@@ -3417,20 +3414,26 @@
           <a:noFill/>
         </p:spPr>
         <p:txBody>
-          <a:bodyPr wrap="square" lIns="0" rIns="0" tIns="0" bIns="0" anchor="t">
+          <a:bodyPr wrap="square" lIns="0" tIns="0" rIns="0" bIns="0" anchor="t">
             <a:spAutoFit/>
           </a:bodyPr>
           <a:lstStyle/>
           <a:p>
             <a:r>
-              <a:rPr b="1" sz="1500">
+              <a:rPr lang="ko-KR" altLang="en-US" sz="1500" b="1" dirty="0">
                 <a:solidFill>
                   <a:srgbClr val="1D4ED8"/>
                 </a:solidFill>
                 <a:latin typeface="Pretendard"/>
               </a:rPr>
-              <a:t>발표자</a:t>
-            </a:r>
+              <a:t>팀</a:t>
+            </a:r>
+            <a:endParaRPr sz="1500" b="1" dirty="0">
+              <a:solidFill>
+                <a:srgbClr val="1D4ED8"/>
+              </a:solidFill>
+              <a:latin typeface="Pretendard"/>
+            </a:endParaRPr>
           </a:p>
         </p:txBody>
       </p:sp>
@@ -3451,13 +3454,13 @@
           <a:noFill/>
         </p:spPr>
         <p:txBody>
-          <a:bodyPr wrap="square" lIns="0" rIns="0" tIns="0" bIns="0" anchor="t">
+          <a:bodyPr wrap="square" lIns="0" tIns="0" rIns="0" bIns="0" anchor="t">
             <a:spAutoFit/>
           </a:bodyPr>
           <a:lstStyle/>
           <a:p>
             <a:r>
-              <a:rPr b="1" sz="1700">
+              <a:rPr sz="1700" b="1" dirty="0">
                 <a:solidFill>
                   <a:srgbClr val="111827"/>
                 </a:solidFill>
@@ -3466,7 +3469,7 @@
               <a:t>장지훈</a:t>
             </a:r>
             <a:r>
-              <a:rPr b="0" sz="1300">
+              <a:rPr sz="1300" b="0" dirty="0">
                 <a:solidFill>
                   <a:srgbClr val="6B7280"/>
                 </a:solidFill>
@@ -3494,13 +3497,13 @@
           <a:noFill/>
         </p:spPr>
         <p:txBody>
-          <a:bodyPr wrap="square" lIns="0" rIns="0" tIns="0" bIns="0" anchor="t">
+          <a:bodyPr wrap="square" lIns="0" tIns="0" rIns="0" bIns="0" anchor="t">
             <a:spAutoFit/>
           </a:bodyPr>
           <a:lstStyle/>
           <a:p>
             <a:r>
-              <a:rPr b="1" sz="1500">
+              <a:rPr sz="1500" b="1">
                 <a:solidFill>
                   <a:srgbClr val="1D4ED8"/>
                 </a:solidFill>
@@ -3528,13 +3531,13 @@
           <a:noFill/>
         </p:spPr>
         <p:txBody>
-          <a:bodyPr wrap="square" lIns="0" rIns="0" tIns="0" bIns="0" anchor="t">
+          <a:bodyPr wrap="square" lIns="0" tIns="0" rIns="0" bIns="0" anchor="t">
             <a:spAutoFit/>
           </a:bodyPr>
           <a:lstStyle/>
           <a:p>
             <a:r>
-              <a:rPr b="0" sz="1600">
+              <a:rPr sz="1600" b="0">
                 <a:solidFill>
                   <a:srgbClr val="374151"/>
                 </a:solidFill>
@@ -3554,7 +3557,7 @@
 </file>
 
 <file path=ppt/slides/slide10.xml><?xml version="1.0" encoding="utf-8"?>
-<p:sld xmlns:a="http://schemas.openxmlformats.org/drawingml/2006/main" xmlns:p="http://schemas.openxmlformats.org/presentationml/2006/main" xmlns:r="http://schemas.openxmlformats.org/officeDocument/2006/relationships">
+<p:sld xmlns:a="http://schemas.openxmlformats.org/drawingml/2006/main" xmlns:r="http://schemas.openxmlformats.org/officeDocument/2006/relationships" xmlns:p="http://schemas.openxmlformats.org/presentationml/2006/main">
   <p:cSld>
     <p:spTree>
       <p:nvGrpSpPr>
@@ -3562,7 +3565,14 @@
         <p:cNvGrpSpPr/>
         <p:nvPr/>
       </p:nvGrpSpPr>
-      <p:grpSpPr/>
+      <p:grpSpPr>
+        <a:xfrm>
+          <a:off x="0" y="0"/>
+          <a:ext cx="0" cy="0"/>
+          <a:chOff x="0" y="0"/>
+          <a:chExt cx="0" cy="0"/>
+        </a:xfrm>
+      </p:grpSpPr>
       <p:sp>
         <p:nvSpPr>
           <p:cNvPr id="2" name="TextBox 1"/>
@@ -3580,67 +3590,22 @@
           <a:noFill/>
         </p:spPr>
         <p:txBody>
-          <a:bodyPr wrap="square" lIns="0" rIns="0" tIns="0" bIns="0" anchor="t">
+          <a:bodyPr wrap="square" lIns="0" tIns="0" rIns="0" bIns="0" anchor="t">
             <a:spAutoFit/>
           </a:bodyPr>
           <a:lstStyle/>
           <a:p>
             <a:r>
-              <a:rPr b="0" sz="1250">
+              <a:rPr sz="1250" b="0">
                 <a:solidFill>
                   <a:srgbClr val="BFC6D0"/>
                 </a:solidFill>
                 <a:latin typeface="Pretendard"/>
               </a:rPr>
-              <a:t>배경</a:t>
-            </a:r>
-            <a:r>
-              <a:rPr b="0" sz="1250">
-                <a:solidFill>
-                  <a:srgbClr val="BFC6D0"/>
-                </a:solidFill>
-                <a:latin typeface="Pretendard"/>
-              </a:rPr>
-              <a:t>     </a:t>
-            </a:r>
-            <a:r>
-              <a:rPr b="0" sz="1250">
-                <a:solidFill>
-                  <a:srgbClr val="BFC6D0"/>
-                </a:solidFill>
-                <a:latin typeface="Pretendard"/>
-              </a:rPr>
-              <a:t>방법</a:t>
-            </a:r>
-            <a:r>
-              <a:rPr b="0" sz="1250">
-                <a:solidFill>
-                  <a:srgbClr val="BFC6D0"/>
-                </a:solidFill>
-                <a:latin typeface="Pretendard"/>
-              </a:rPr>
-              <a:t>     </a:t>
-            </a:r>
-            <a:r>
-              <a:rPr b="0" sz="1250">
-                <a:solidFill>
-                  <a:srgbClr val="BFC6D0"/>
-                </a:solidFill>
-                <a:latin typeface="Pretendard"/>
-              </a:rPr>
-              <a:t>결과</a:t>
-            </a:r>
-            <a:r>
-              <a:rPr b="0" sz="1250">
-                <a:solidFill>
-                  <a:srgbClr val="BFC6D0"/>
-                </a:solidFill>
-                <a:latin typeface="Pretendard"/>
-              </a:rPr>
-              <a:t>     </a:t>
-            </a:r>
-            <a:r>
-              <a:rPr b="1" sz="1250">
+              <a:t>배경     방법     결과     </a:t>
+            </a:r>
+            <a:r>
+              <a:rPr sz="1250" b="1">
                 <a:solidFill>
                   <a:srgbClr val="1D4ED8"/>
                 </a:solidFill>
@@ -3668,7 +3633,7 @@
           <a:noFill/>
         </p:spPr>
         <p:txBody>
-          <a:bodyPr wrap="square" lIns="0" rIns="0" tIns="0" bIns="0" anchor="t">
+          <a:bodyPr wrap="square" lIns="0" tIns="0" rIns="0" bIns="0" anchor="t">
             <a:spAutoFit/>
           </a:bodyPr>
           <a:lstStyle/>
@@ -3679,7 +3644,7 @@
               </a:lnSpc>
             </a:pPr>
             <a:r>
-              <a:rPr b="1" sz="2100">
+              <a:rPr sz="2100" b="1">
                 <a:solidFill>
                   <a:srgbClr val="111827"/>
                 </a:solidFill>
@@ -3688,7 +3653,7 @@
               <a:t>동일 조건에서 </a:t>
             </a:r>
             <a:r>
-              <a:rPr b="1" sz="2100">
+              <a:rPr sz="2100" b="1">
                 <a:solidFill>
                   <a:srgbClr val="1D4ED8"/>
                 </a:solidFill>
@@ -3697,7 +3662,7 @@
               <a:t>Transformer 우수</a:t>
             </a:r>
             <a:r>
-              <a:rPr b="1" sz="2100">
+              <a:rPr sz="2100" b="1">
                 <a:solidFill>
                   <a:srgbClr val="111827"/>
                 </a:solidFill>
@@ -3725,7 +3690,7 @@
           <a:noFill/>
         </p:spPr>
         <p:txBody>
-          <a:bodyPr wrap="square" lIns="0" rIns="0" tIns="0" bIns="0" anchor="t">
+          <a:bodyPr wrap="square" lIns="0" tIns="0" rIns="0" bIns="0" anchor="t">
             <a:spAutoFit/>
           </a:bodyPr>
           <a:lstStyle/>
@@ -3739,7 +3704,7 @@
               </a:spcAft>
             </a:pPr>
             <a:r>
-              <a:rPr b="1" sz="1650">
+              <a:rPr sz="1550" b="1">
                 <a:solidFill>
                   <a:srgbClr val="1D4ED8"/>
                 </a:solidFill>
@@ -3760,7 +3725,7 @@
               <a:buChar char="•"/>
             </a:pPr>
             <a:r>
-              <a:rPr b="0" sz="1500">
+              <a:rPr sz="1400" b="0">
                 <a:solidFill>
                   <a:srgbClr val="374151"/>
                 </a:solidFill>
@@ -3769,7 +3734,7 @@
               <a:t>동일 조건에서 test accuracy </a:t>
             </a:r>
             <a:r>
-              <a:rPr b="1" sz="1500">
+              <a:rPr sz="1400" b="1">
                 <a:solidFill>
                   <a:srgbClr val="111827"/>
                 </a:solidFill>
@@ -3778,7 +3743,7 @@
               <a:t>0.910 vs 0.833</a:t>
             </a:r>
             <a:r>
-              <a:rPr b="0" sz="1500">
+              <a:rPr sz="1400" b="0">
                 <a:solidFill>
                   <a:srgbClr val="374151"/>
                 </a:solidFill>
@@ -3790,20 +3755,20 @@
           <a:p>
             <a:pPr>
               <a:spcBef>
-                <a:spcPts val="1400"/>
+                <a:spcPts val="1200"/>
               </a:spcBef>
               <a:spcAft>
                 <a:spcPts val="700"/>
               </a:spcAft>
             </a:pPr>
             <a:r>
-              <a:rPr b="1" sz="1650">
+              <a:rPr sz="1550" b="1">
                 <a:solidFill>
                   <a:srgbClr val="1D4ED8"/>
                 </a:solidFill>
                 <a:latin typeface="Pretendard"/>
               </a:rPr>
-              <a:t>원인</a:t>
+              <a:t>원인 (메커니즘 차이)</a:t>
             </a:r>
           </a:p>
           <a:p>
@@ -3818,41 +3783,22 @@
               <a:buChar char="•"/>
             </a:pPr>
             <a:r>
-              <a:rPr b="1" sz="1500">
-                <a:solidFill>
-                  <a:srgbClr val="111827"/>
-                </a:solidFill>
-                <a:latin typeface="Pretendard"/>
-              </a:rPr>
-              <a:t>generalization 차이</a:t>
-            </a:r>
-            <a:r>
-              <a:rPr b="0" sz="1500">
-                <a:solidFill>
-                  <a:srgbClr val="374151"/>
-                </a:solidFill>
-                <a:latin typeface="Pretendard"/>
-              </a:rPr>
-              <a:t>: LSTM은 overfitting하여 25%에서 포화, Transformer는 안정적으로 확장</a:t>
-            </a:r>
-          </a:p>
-          <a:p>
-            <a:pPr>
-              <a:spcBef>
-                <a:spcPts val="1400"/>
-              </a:spcBef>
-              <a:spcAft>
-                <a:spcPts val="700"/>
-              </a:spcAft>
-            </a:pPr>
-            <a:r>
-              <a:rPr b="1" sz="1650">
+              <a:rPr sz="1400" b="1">
                 <a:solidFill>
                   <a:srgbClr val="1D4ED8"/>
                 </a:solidFill>
                 <a:latin typeface="Pretendard"/>
               </a:rPr>
-              <a:t>과제 성격</a:t>
+              <a:t>Transformer</a:t>
+            </a:r>
+            <a:r>
+              <a:rPr sz="1400" b="0">
+                <a:solidFill>
+                  <a:srgbClr val="374151"/>
+                </a:solidFill>
+                <a:latin typeface="Pretendard"/>
+              </a:rPr>
+              <a:t>: self-attention이 근거를 여러 토큰에 분산 → robust, 안정적 scaling</a:t>
             </a:r>
           </a:p>
           <a:p>
@@ -3867,41 +3813,22 @@
               <a:buChar char="•"/>
             </a:pPr>
             <a:r>
-              <a:rPr b="1" sz="1500">
-                <a:solidFill>
-                  <a:srgbClr val="111827"/>
-                </a:solidFill>
-                <a:latin typeface="Pretendard"/>
-              </a:rPr>
-              <a:t>bag-of-words</a:t>
-            </a:r>
-            <a:r>
-              <a:rPr b="0" sz="1500">
-                <a:solidFill>
-                  <a:srgbClr val="374151"/>
-                </a:solidFill>
-                <a:latin typeface="Pretendard"/>
-              </a:rPr>
-              <a:t>: positional encoding 제거해도 정확도 동일 → 격차는 순서가 아닌 robustness</a:t>
-            </a:r>
-          </a:p>
-          <a:p>
-            <a:pPr>
-              <a:spcBef>
-                <a:spcPts val="1400"/>
-              </a:spcBef>
-              <a:spcAft>
-                <a:spcPts val="700"/>
-              </a:spcAft>
-            </a:pPr>
-            <a:r>
-              <a:rPr b="1" sz="1650">
-                <a:solidFill>
-                  <a:srgbClr val="1D4ED8"/>
-                </a:solidFill>
-                <a:latin typeface="Pretendard"/>
-              </a:rPr>
-              <a:t>한계 · 향후</a:t>
+              <a:rPr sz="1400" b="1">
+                <a:solidFill>
+                  <a:srgbClr val="6B7280"/>
+                </a:solidFill>
+                <a:latin typeface="Pretendard"/>
+              </a:rPr>
+              <a:t>LSTM</a:t>
+            </a:r>
+            <a:r>
+              <a:rPr sz="1400" b="0">
+                <a:solidFill>
+                  <a:srgbClr val="374151"/>
+                </a:solidFill>
+                <a:latin typeface="Pretendard"/>
+              </a:rPr>
+              <a:t>: recurrence가 특정 토큰에 의존 → overfitting, 25%에서 saturation</a:t>
             </a:r>
           </a:p>
           <a:p>
@@ -3916,13 +3843,32 @@
               <a:buChar char="•"/>
             </a:pPr>
             <a:r>
-              <a:rPr b="0" sz="1500">
-                <a:solidFill>
-                  <a:srgbClr val="374151"/>
-                </a:solidFill>
-                <a:latin typeface="Pretendard"/>
-              </a:rPr>
-              <a:t>단일 seed → 다중 seed 재확인, LSTM regularization 강화</a:t>
+              <a:rPr sz="1400" b="0">
+                <a:solidFill>
+                  <a:srgbClr val="374151"/>
+                </a:solidFill>
+                <a:latin typeface="Pretendard"/>
+              </a:rPr>
+              <a:t>두 메커니즘의 generalization 차이가 성능 격차로 이어진다</a:t>
+            </a:r>
+          </a:p>
+          <a:p>
+            <a:pPr>
+              <a:spcBef>
+                <a:spcPts val="1200"/>
+              </a:spcBef>
+              <a:spcAft>
+                <a:spcPts val="700"/>
+              </a:spcAft>
+            </a:pPr>
+            <a:r>
+              <a:rPr sz="1550" b="1">
+                <a:solidFill>
+                  <a:srgbClr val="1D4ED8"/>
+                </a:solidFill>
+                <a:latin typeface="Pretendard"/>
+              </a:rPr>
+              <a:t>과제 성격</a:t>
             </a:r>
           </a:p>
           <a:p>
@@ -3937,7 +3883,77 @@
               <a:buChar char="•"/>
             </a:pPr>
             <a:r>
-              <a:rPr b="0" sz="1500">
+              <a:rPr sz="1400" b="1">
+                <a:solidFill>
+                  <a:srgbClr val="111827"/>
+                </a:solidFill>
+                <a:latin typeface="Pretendard"/>
+              </a:rPr>
+              <a:t>bag-of-words</a:t>
+            </a:r>
+            <a:r>
+              <a:rPr sz="1400" b="0">
+                <a:solidFill>
+                  <a:srgbClr val="374151"/>
+                </a:solidFill>
+                <a:latin typeface="Pretendard"/>
+              </a:rPr>
+              <a:t>: positional encoding 제거해도 정확도 동일, 격차는 순서가 아닌 robustness</a:t>
+            </a:r>
+          </a:p>
+          <a:p>
+            <a:pPr>
+              <a:spcBef>
+                <a:spcPts val="1200"/>
+              </a:spcBef>
+              <a:spcAft>
+                <a:spcPts val="700"/>
+              </a:spcAft>
+            </a:pPr>
+            <a:r>
+              <a:rPr sz="1550" b="1">
+                <a:solidFill>
+                  <a:srgbClr val="1D4ED8"/>
+                </a:solidFill>
+                <a:latin typeface="Pretendard"/>
+              </a:rPr>
+              <a:t>한계 · 향후</a:t>
+            </a:r>
+          </a:p>
+          <a:p>
+            <a:pPr marL="274320" indent="-274320">
+              <a:lnSpc>
+                <a:spcPct val="125000"/>
+              </a:lnSpc>
+              <a:spcAft>
+                <a:spcPts val="500"/>
+              </a:spcAft>
+              <a:buFont typeface="Arial"/>
+              <a:buChar char="•"/>
+            </a:pPr>
+            <a:r>
+              <a:rPr sz="1400" b="0">
+                <a:solidFill>
+                  <a:srgbClr val="374151"/>
+                </a:solidFill>
+                <a:latin typeface="Pretendard"/>
+              </a:rPr>
+              <a:t>단일 seed → 다중 seed 재확인, LSTM regularization 강화</a:t>
+            </a:r>
+          </a:p>
+          <a:p>
+            <a:pPr marL="274320" indent="-274320">
+              <a:lnSpc>
+                <a:spcPct val="125000"/>
+              </a:lnSpc>
+              <a:spcAft>
+                <a:spcPts val="500"/>
+              </a:spcAft>
+              <a:buFont typeface="Arial"/>
+              <a:buChar char="•"/>
+            </a:pPr>
+            <a:r>
+              <a:rPr sz="1400" b="0">
                 <a:solidFill>
                   <a:srgbClr val="374151"/>
                 </a:solidFill>
@@ -3965,14 +3981,14 @@
           <a:noFill/>
         </p:spPr>
         <p:txBody>
-          <a:bodyPr wrap="square" lIns="0" rIns="0" tIns="0" bIns="0" anchor="t">
+          <a:bodyPr wrap="square" lIns="0" tIns="0" rIns="0" bIns="0" anchor="t">
             <a:spAutoFit/>
           </a:bodyPr>
           <a:lstStyle/>
           <a:p>
             <a:pPr algn="r"/>
             <a:r>
-              <a:rPr b="0" sz="950">
+              <a:rPr sz="950" b="0">
                 <a:solidFill>
                   <a:srgbClr val="AAB2BD"/>
                 </a:solidFill>
@@ -3992,7 +4008,7 @@
 </file>
 
 <file path=ppt/slides/slide2.xml><?xml version="1.0" encoding="utf-8"?>
-<p:sld xmlns:a="http://schemas.openxmlformats.org/drawingml/2006/main" xmlns:p="http://schemas.openxmlformats.org/presentationml/2006/main" xmlns:r="http://schemas.openxmlformats.org/officeDocument/2006/relationships">
+<p:sld xmlns:a="http://schemas.openxmlformats.org/drawingml/2006/main" xmlns:r="http://schemas.openxmlformats.org/officeDocument/2006/relationships" xmlns:p="http://schemas.openxmlformats.org/presentationml/2006/main">
   <p:cSld>
     <p:spTree>
       <p:nvGrpSpPr>
@@ -4000,7 +4016,14 @@
         <p:cNvGrpSpPr/>
         <p:nvPr/>
       </p:nvGrpSpPr>
-      <p:grpSpPr/>
+      <p:grpSpPr>
+        <a:xfrm>
+          <a:off x="0" y="0"/>
+          <a:ext cx="0" cy="0"/>
+          <a:chOff x="0" y="0"/>
+          <a:chExt cx="0" cy="0"/>
+        </a:xfrm>
+      </p:grpSpPr>
       <p:sp>
         <p:nvSpPr>
           <p:cNvPr id="2" name="TextBox 1"/>
@@ -4018,13 +4041,13 @@
           <a:noFill/>
         </p:spPr>
         <p:txBody>
-          <a:bodyPr wrap="square" lIns="0" rIns="0" tIns="0" bIns="0" anchor="t">
+          <a:bodyPr wrap="square" lIns="0" tIns="0" rIns="0" bIns="0" anchor="t">
             <a:spAutoFit/>
           </a:bodyPr>
           <a:lstStyle/>
           <a:p>
             <a:r>
-              <a:rPr b="1" sz="1250">
+              <a:rPr sz="1250" b="1">
                 <a:solidFill>
                   <a:srgbClr val="1D4ED8"/>
                 </a:solidFill>
@@ -4033,58 +4056,13 @@
               <a:t>배경</a:t>
             </a:r>
             <a:r>
-              <a:rPr b="0" sz="1250">
+              <a:rPr sz="1250" b="0">
                 <a:solidFill>
                   <a:srgbClr val="BFC6D0"/>
                 </a:solidFill>
                 <a:latin typeface="Pretendard"/>
               </a:rPr>
-              <a:t>     </a:t>
-            </a:r>
-            <a:r>
-              <a:rPr b="0" sz="1250">
-                <a:solidFill>
-                  <a:srgbClr val="BFC6D0"/>
-                </a:solidFill>
-                <a:latin typeface="Pretendard"/>
-              </a:rPr>
-              <a:t>방법</a:t>
-            </a:r>
-            <a:r>
-              <a:rPr b="0" sz="1250">
-                <a:solidFill>
-                  <a:srgbClr val="BFC6D0"/>
-                </a:solidFill>
-                <a:latin typeface="Pretendard"/>
-              </a:rPr>
-              <a:t>     </a:t>
-            </a:r>
-            <a:r>
-              <a:rPr b="0" sz="1250">
-                <a:solidFill>
-                  <a:srgbClr val="BFC6D0"/>
-                </a:solidFill>
-                <a:latin typeface="Pretendard"/>
-              </a:rPr>
-              <a:t>결과</a:t>
-            </a:r>
-            <a:r>
-              <a:rPr b="0" sz="1250">
-                <a:solidFill>
-                  <a:srgbClr val="BFC6D0"/>
-                </a:solidFill>
-                <a:latin typeface="Pretendard"/>
-              </a:rPr>
-              <a:t>     </a:t>
-            </a:r>
-            <a:r>
-              <a:rPr b="0" sz="1250">
-                <a:solidFill>
-                  <a:srgbClr val="BFC6D0"/>
-                </a:solidFill>
-                <a:latin typeface="Pretendard"/>
-              </a:rPr>
-              <a:t>결론</a:t>
+              <a:t>     방법     결과     결론</a:t>
             </a:r>
           </a:p>
         </p:txBody>
@@ -4106,7 +4084,7 @@
           <a:noFill/>
         </p:spPr>
         <p:txBody>
-          <a:bodyPr wrap="square" lIns="0" rIns="0" tIns="0" bIns="0" anchor="t">
+          <a:bodyPr wrap="square" lIns="0" tIns="0" rIns="0" bIns="0" anchor="t">
             <a:spAutoFit/>
           </a:bodyPr>
           <a:lstStyle/>
@@ -4117,7 +4095,7 @@
               </a:lnSpc>
             </a:pPr>
             <a:r>
-              <a:rPr b="1" sz="2100">
+              <a:rPr sz="2100" b="1">
                 <a:solidFill>
                   <a:srgbClr val="111827"/>
                 </a:solidFill>
@@ -4126,7 +4104,7 @@
               <a:t>정확도 경쟁이 아니라, </a:t>
             </a:r>
             <a:r>
-              <a:rPr b="1" sz="2100">
+              <a:rPr sz="2100" b="1">
                 <a:solidFill>
                   <a:srgbClr val="1D4ED8"/>
                 </a:solidFill>
@@ -4135,13 +4113,841 @@
               <a:t>두 구조가 왜 다른지</a:t>
             </a:r>
             <a:r>
-              <a:rPr b="1" sz="2100">
+              <a:rPr sz="2100" b="1">
                 <a:solidFill>
                   <a:srgbClr val="111827"/>
                 </a:solidFill>
                 <a:latin typeface="Pretendard"/>
               </a:rPr>
               <a:t>를 규명</a:t>
+            </a:r>
+          </a:p>
+        </p:txBody>
+      </p:sp>
+      <p:sp>
+        <p:nvSpPr>
+          <p:cNvPr id="4" name="TextBox 3"/>
+          <p:cNvSpPr txBox="1"/>
+          <p:nvPr/>
+        </p:nvSpPr>
+        <p:spPr>
+          <a:xfrm>
+            <a:off x="457200" y="1417320"/>
+            <a:ext cx="11277295" cy="3442161"/>
+          </a:xfrm>
+          <a:prstGeom prst="rect">
+            <a:avLst/>
+          </a:prstGeom>
+          <a:noFill/>
+        </p:spPr>
+        <p:txBody>
+          <a:bodyPr wrap="square" lIns="0" tIns="0" rIns="0" bIns="0" anchor="t">
+            <a:spAutoFit/>
+          </a:bodyPr>
+          <a:lstStyle/>
+          <a:p>
+            <a:pPr>
+              <a:spcBef>
+                <a:spcPts val="0"/>
+              </a:spcBef>
+              <a:spcAft>
+                <a:spcPts val="700"/>
+              </a:spcAft>
+            </a:pPr>
+            <a:r>
+              <a:rPr sz="1650" b="1" dirty="0" err="1">
+                <a:solidFill>
+                  <a:srgbClr val="1D4ED8"/>
+                </a:solidFill>
+                <a:latin typeface="Pretendard"/>
+              </a:rPr>
+              <a:t>과제</a:t>
+            </a:r>
+            <a:endParaRPr sz="1650" b="1" dirty="0">
+              <a:solidFill>
+                <a:srgbClr val="1D4ED8"/>
+              </a:solidFill>
+              <a:latin typeface="Pretendard"/>
+            </a:endParaRPr>
+          </a:p>
+          <a:p>
+            <a:pPr marL="274320" indent="-274320">
+              <a:lnSpc>
+                <a:spcPct val="125000"/>
+              </a:lnSpc>
+              <a:spcAft>
+                <a:spcPts val="500"/>
+              </a:spcAft>
+              <a:buFont typeface="Arial"/>
+              <a:buChar char="•"/>
+            </a:pPr>
+            <a:r>
+              <a:rPr sz="1500" b="1" dirty="0">
+                <a:solidFill>
+                  <a:srgbClr val="111827"/>
+                </a:solidFill>
+                <a:latin typeface="Pretendard"/>
+              </a:rPr>
+              <a:t>AG News 4-class </a:t>
+            </a:r>
+            <a:r>
+              <a:rPr sz="1500" b="1" dirty="0" err="1">
+                <a:solidFill>
+                  <a:srgbClr val="111827"/>
+                </a:solidFill>
+                <a:latin typeface="Pretendard"/>
+              </a:rPr>
+              <a:t>뉴스</a:t>
+            </a:r>
+            <a:r>
+              <a:rPr sz="1500" b="1" dirty="0">
+                <a:solidFill>
+                  <a:srgbClr val="111827"/>
+                </a:solidFill>
+                <a:latin typeface="Pretendard"/>
+              </a:rPr>
+              <a:t> </a:t>
+            </a:r>
+            <a:r>
+              <a:rPr sz="1500" b="1" dirty="0" err="1">
+                <a:solidFill>
+                  <a:srgbClr val="111827"/>
+                </a:solidFill>
+                <a:latin typeface="Pretendard"/>
+              </a:rPr>
+              <a:t>주제</a:t>
+            </a:r>
+            <a:r>
+              <a:rPr sz="1500" b="1" dirty="0">
+                <a:solidFill>
+                  <a:srgbClr val="111827"/>
+                </a:solidFill>
+                <a:latin typeface="Pretendard"/>
+              </a:rPr>
+              <a:t> </a:t>
+            </a:r>
+            <a:r>
+              <a:rPr sz="1500" b="1" dirty="0" err="1">
+                <a:solidFill>
+                  <a:srgbClr val="111827"/>
+                </a:solidFill>
+                <a:latin typeface="Pretendard"/>
+              </a:rPr>
+              <a:t>분류</a:t>
+            </a:r>
+            <a:r>
+              <a:rPr sz="1500" b="0" dirty="0">
+                <a:solidFill>
+                  <a:srgbClr val="374151"/>
+                </a:solidFill>
+                <a:latin typeface="Pretendard"/>
+              </a:rPr>
+              <a:t> (</a:t>
+            </a:r>
+            <a:r>
+              <a:rPr sz="1500" b="0" dirty="0" err="1">
+                <a:solidFill>
+                  <a:srgbClr val="374151"/>
+                </a:solidFill>
+                <a:latin typeface="Pretendard"/>
+              </a:rPr>
+              <a:t>World·Sports·Business·Sci-Tech</a:t>
+            </a:r>
+            <a:r>
+              <a:rPr sz="1500" b="0" dirty="0">
+                <a:solidFill>
+                  <a:srgbClr val="374151"/>
+                </a:solidFill>
+                <a:latin typeface="Pretendard"/>
+              </a:rPr>
+              <a:t>)</a:t>
+            </a:r>
+          </a:p>
+          <a:p>
+            <a:pPr marL="274320" indent="-274320">
+              <a:lnSpc>
+                <a:spcPct val="125000"/>
+              </a:lnSpc>
+              <a:spcAft>
+                <a:spcPts val="500"/>
+              </a:spcAft>
+              <a:buFont typeface="Arial"/>
+              <a:buChar char="•"/>
+            </a:pPr>
+            <a:r>
+              <a:rPr sz="1500" b="0" dirty="0" err="1">
+                <a:solidFill>
+                  <a:srgbClr val="374151"/>
+                </a:solidFill>
+                <a:latin typeface="Pretendard"/>
+              </a:rPr>
+              <a:t>LSTM과</a:t>
+            </a:r>
+            <a:r>
+              <a:rPr sz="1500" b="0" dirty="0">
+                <a:solidFill>
+                  <a:srgbClr val="374151"/>
+                </a:solidFill>
+                <a:latin typeface="Pretendard"/>
+              </a:rPr>
+              <a:t> Transformer </a:t>
+            </a:r>
+            <a:r>
+              <a:rPr sz="1500" b="0" dirty="0" err="1">
+                <a:solidFill>
+                  <a:srgbClr val="374151"/>
+                </a:solidFill>
+                <a:latin typeface="Pretendard"/>
+              </a:rPr>
+              <a:t>Encoder를</a:t>
+            </a:r>
+            <a:r>
+              <a:rPr sz="1500" b="0" dirty="0">
+                <a:solidFill>
+                  <a:srgbClr val="374151"/>
+                </a:solidFill>
+                <a:latin typeface="Pretendard"/>
+              </a:rPr>
+              <a:t> </a:t>
+            </a:r>
+            <a:r>
+              <a:rPr sz="1500" b="0" dirty="0" err="1">
+                <a:solidFill>
+                  <a:srgbClr val="374151"/>
+                </a:solidFill>
+                <a:latin typeface="Pretendard"/>
+              </a:rPr>
+              <a:t>모두</a:t>
+            </a:r>
+            <a:r>
+              <a:rPr sz="1500" b="0" dirty="0">
+                <a:solidFill>
+                  <a:srgbClr val="374151"/>
+                </a:solidFill>
+                <a:latin typeface="Pretendard"/>
+              </a:rPr>
+              <a:t> from </a:t>
+            </a:r>
+            <a:r>
+              <a:rPr sz="1500" b="0" dirty="0" err="1">
+                <a:solidFill>
+                  <a:srgbClr val="374151"/>
+                </a:solidFill>
+                <a:latin typeface="Pretendard"/>
+              </a:rPr>
+              <a:t>scratch로</a:t>
+            </a:r>
+            <a:r>
+              <a:rPr sz="1500" b="0" dirty="0">
+                <a:solidFill>
+                  <a:srgbClr val="374151"/>
+                </a:solidFill>
+                <a:latin typeface="Pretendard"/>
+              </a:rPr>
+              <a:t> </a:t>
+            </a:r>
+            <a:r>
+              <a:rPr sz="1500" b="0" dirty="0" err="1">
+                <a:solidFill>
+                  <a:srgbClr val="374151"/>
+                </a:solidFill>
+                <a:latin typeface="Pretendard"/>
+              </a:rPr>
+              <a:t>학습</a:t>
+            </a:r>
+            <a:endParaRPr sz="1500" b="0" dirty="0">
+              <a:solidFill>
+                <a:srgbClr val="374151"/>
+              </a:solidFill>
+              <a:latin typeface="Pretendard"/>
+            </a:endParaRPr>
+          </a:p>
+          <a:p>
+            <a:pPr>
+              <a:spcBef>
+                <a:spcPts val="1500"/>
+              </a:spcBef>
+              <a:spcAft>
+                <a:spcPts val="700"/>
+              </a:spcAft>
+            </a:pPr>
+            <a:r>
+              <a:rPr sz="1650" b="1" dirty="0" err="1">
+                <a:solidFill>
+                  <a:srgbClr val="1D4ED8"/>
+                </a:solidFill>
+                <a:latin typeface="Pretendard"/>
+              </a:rPr>
+              <a:t>방법</a:t>
+            </a:r>
+            <a:endParaRPr sz="1650" b="1" dirty="0">
+              <a:solidFill>
+                <a:srgbClr val="1D4ED8"/>
+              </a:solidFill>
+              <a:latin typeface="Pretendard"/>
+            </a:endParaRPr>
+          </a:p>
+          <a:p>
+            <a:pPr marL="274320" indent="-274320">
+              <a:lnSpc>
+                <a:spcPct val="125000"/>
+              </a:lnSpc>
+              <a:spcAft>
+                <a:spcPts val="500"/>
+              </a:spcAft>
+              <a:buFont typeface="Arial"/>
+              <a:buChar char="•"/>
+            </a:pPr>
+            <a:r>
+              <a:rPr sz="1500" b="1" dirty="0" err="1">
+                <a:solidFill>
+                  <a:srgbClr val="111827"/>
+                </a:solidFill>
+                <a:latin typeface="Pretendard"/>
+              </a:rPr>
+              <a:t>데이터·전처리·어휘·시퀀스</a:t>
+            </a:r>
+            <a:r>
+              <a:rPr sz="1500" b="1" dirty="0">
+                <a:solidFill>
+                  <a:srgbClr val="111827"/>
+                </a:solidFill>
+                <a:latin typeface="Pretendard"/>
+              </a:rPr>
+              <a:t> </a:t>
+            </a:r>
+            <a:r>
+              <a:rPr sz="1500" b="1" dirty="0" err="1">
+                <a:solidFill>
+                  <a:srgbClr val="111827"/>
+                </a:solidFill>
+                <a:latin typeface="Pretendard"/>
+              </a:rPr>
+              <a:t>길이·학습</a:t>
+            </a:r>
+            <a:r>
+              <a:rPr sz="1500" b="1" dirty="0">
+                <a:solidFill>
+                  <a:srgbClr val="111827"/>
+                </a:solidFill>
+                <a:latin typeface="Pretendard"/>
+              </a:rPr>
+              <a:t> </a:t>
+            </a:r>
+            <a:r>
+              <a:rPr sz="1500" b="1" dirty="0" err="1">
+                <a:solidFill>
+                  <a:srgbClr val="111827"/>
+                </a:solidFill>
+                <a:latin typeface="Pretendard"/>
+              </a:rPr>
+              <a:t>예산</a:t>
+            </a:r>
+            <a:r>
+              <a:rPr sz="1500" b="0" dirty="0" err="1">
+                <a:solidFill>
+                  <a:srgbClr val="374151"/>
+                </a:solidFill>
+                <a:latin typeface="Pretendard"/>
+              </a:rPr>
+              <a:t>을</a:t>
+            </a:r>
+            <a:r>
+              <a:rPr sz="1500" b="0" dirty="0">
+                <a:solidFill>
+                  <a:srgbClr val="374151"/>
+                </a:solidFill>
+                <a:latin typeface="Pretendard"/>
+              </a:rPr>
+              <a:t> </a:t>
+            </a:r>
+            <a:r>
+              <a:rPr sz="1500" b="0" dirty="0" err="1">
+                <a:solidFill>
+                  <a:srgbClr val="374151"/>
+                </a:solidFill>
+                <a:latin typeface="Pretendard"/>
+              </a:rPr>
+              <a:t>동일하게</a:t>
+            </a:r>
+            <a:r>
+              <a:rPr sz="1500" b="0" dirty="0">
+                <a:solidFill>
+                  <a:srgbClr val="374151"/>
+                </a:solidFill>
+                <a:latin typeface="Pretendard"/>
+              </a:rPr>
+              <a:t> </a:t>
+            </a:r>
+            <a:r>
+              <a:rPr sz="1500" b="0" dirty="0" err="1">
+                <a:solidFill>
+                  <a:srgbClr val="374151"/>
+                </a:solidFill>
+                <a:latin typeface="Pretendard"/>
+              </a:rPr>
+              <a:t>고정</a:t>
+            </a:r>
+            <a:endParaRPr sz="1500" b="0" dirty="0">
+              <a:solidFill>
+                <a:srgbClr val="374151"/>
+              </a:solidFill>
+              <a:latin typeface="Pretendard"/>
+            </a:endParaRPr>
+          </a:p>
+          <a:p>
+            <a:pPr marL="274320" indent="-274320">
+              <a:lnSpc>
+                <a:spcPct val="125000"/>
+              </a:lnSpc>
+              <a:spcAft>
+                <a:spcPts val="500"/>
+              </a:spcAft>
+              <a:buFont typeface="Arial"/>
+              <a:buChar char="•"/>
+            </a:pPr>
+            <a:r>
+              <a:rPr sz="1500" b="0" dirty="0">
+                <a:solidFill>
+                  <a:srgbClr val="374151"/>
+                </a:solidFill>
+                <a:latin typeface="Pretendard"/>
+              </a:rPr>
+              <a:t>encoder</a:t>
+            </a:r>
+            <a:r>
+              <a:rPr lang="ko-KR" altLang="en-US" sz="1500" b="0" dirty="0">
+                <a:solidFill>
+                  <a:srgbClr val="374151"/>
+                </a:solidFill>
+                <a:latin typeface="Pretendard"/>
+              </a:rPr>
+              <a:t>는 </a:t>
+            </a:r>
+            <a:r>
+              <a:rPr lang="ko-KR" altLang="en-US" sz="1500" b="0" dirty="0" err="1">
+                <a:solidFill>
+                  <a:srgbClr val="374151"/>
+                </a:solidFill>
+                <a:latin typeface="Pretendard"/>
+              </a:rPr>
+              <a:t>아키텍쳐별</a:t>
+            </a:r>
+            <a:r>
+              <a:rPr lang="ko-KR" altLang="en-US" sz="1500" b="0" dirty="0">
+                <a:solidFill>
+                  <a:srgbClr val="374151"/>
+                </a:solidFill>
+                <a:latin typeface="Pretendard"/>
+              </a:rPr>
+              <a:t> 상이</a:t>
+            </a:r>
+            <a:endParaRPr sz="1500" b="0" dirty="0">
+              <a:solidFill>
+                <a:srgbClr val="374151"/>
+              </a:solidFill>
+              <a:latin typeface="Pretendard"/>
+            </a:endParaRPr>
+          </a:p>
+          <a:p>
+            <a:pPr>
+              <a:spcBef>
+                <a:spcPts val="1500"/>
+              </a:spcBef>
+              <a:spcAft>
+                <a:spcPts val="700"/>
+              </a:spcAft>
+            </a:pPr>
+            <a:r>
+              <a:rPr sz="1650" b="1" dirty="0" err="1">
+                <a:solidFill>
+                  <a:srgbClr val="1D4ED8"/>
+                </a:solidFill>
+                <a:latin typeface="Pretendard"/>
+              </a:rPr>
+              <a:t>질문</a:t>
+            </a:r>
+            <a:endParaRPr sz="1650" b="1" dirty="0">
+              <a:solidFill>
+                <a:srgbClr val="1D4ED8"/>
+              </a:solidFill>
+              <a:latin typeface="Pretendard"/>
+            </a:endParaRPr>
+          </a:p>
+          <a:p>
+            <a:pPr marL="274320" indent="-274320">
+              <a:lnSpc>
+                <a:spcPct val="125000"/>
+              </a:lnSpc>
+              <a:spcAft>
+                <a:spcPts val="500"/>
+              </a:spcAft>
+              <a:buFont typeface="Arial"/>
+              <a:buChar char="•"/>
+            </a:pPr>
+            <a:r>
+              <a:rPr sz="1500" b="1" dirty="0" err="1">
+                <a:solidFill>
+                  <a:srgbClr val="374151"/>
+                </a:solidFill>
+                <a:latin typeface="Pretendard"/>
+              </a:rPr>
+              <a:t>성능·수렴·data</a:t>
+            </a:r>
+            <a:r>
+              <a:rPr sz="1500" b="1" dirty="0">
+                <a:solidFill>
+                  <a:srgbClr val="374151"/>
+                </a:solidFill>
+                <a:latin typeface="Pretendard"/>
+              </a:rPr>
+              <a:t> </a:t>
+            </a:r>
+            <a:r>
+              <a:rPr sz="1500" b="1" dirty="0" err="1">
+                <a:solidFill>
+                  <a:srgbClr val="374151"/>
+                </a:solidFill>
+                <a:latin typeface="Pretendard"/>
+              </a:rPr>
+              <a:t>efficiency·오분류</a:t>
+            </a:r>
+            <a:r>
+              <a:rPr sz="1500" b="1" dirty="0">
+                <a:solidFill>
+                  <a:srgbClr val="374151"/>
+                </a:solidFill>
+                <a:latin typeface="Pretendard"/>
+              </a:rPr>
+              <a:t> </a:t>
+            </a:r>
+            <a:r>
+              <a:rPr sz="1500" b="1" dirty="0" err="1">
+                <a:solidFill>
+                  <a:srgbClr val="374151"/>
+                </a:solidFill>
+                <a:latin typeface="Pretendard"/>
+              </a:rPr>
+              <a:t>양상</a:t>
+            </a:r>
+            <a:r>
+              <a:rPr sz="1500" b="0" dirty="0" err="1">
+                <a:solidFill>
+                  <a:srgbClr val="374151"/>
+                </a:solidFill>
+                <a:latin typeface="Pretendard"/>
+              </a:rPr>
+              <a:t>이</a:t>
+            </a:r>
+            <a:r>
+              <a:rPr sz="1500" b="0" dirty="0">
+                <a:solidFill>
+                  <a:srgbClr val="374151"/>
+                </a:solidFill>
+                <a:latin typeface="Pretendard"/>
+              </a:rPr>
+              <a:t> </a:t>
+            </a:r>
+            <a:r>
+              <a:rPr sz="1500" b="0" dirty="0" err="1">
+                <a:solidFill>
+                  <a:srgbClr val="374151"/>
+                </a:solidFill>
+                <a:latin typeface="Pretendard"/>
+              </a:rPr>
+              <a:t>어떻게</a:t>
+            </a:r>
+            <a:r>
+              <a:rPr sz="1500" b="0" dirty="0">
+                <a:solidFill>
+                  <a:srgbClr val="374151"/>
+                </a:solidFill>
+                <a:latin typeface="Pretendard"/>
+              </a:rPr>
+              <a:t> </a:t>
+            </a:r>
+            <a:r>
+              <a:rPr sz="1500" b="0" dirty="0" err="1">
+                <a:solidFill>
+                  <a:srgbClr val="374151"/>
+                </a:solidFill>
+                <a:latin typeface="Pretendard"/>
+              </a:rPr>
+              <a:t>다른가</a:t>
+            </a:r>
+            <a:endParaRPr sz="1500" b="0" dirty="0">
+              <a:solidFill>
+                <a:srgbClr val="374151"/>
+              </a:solidFill>
+              <a:latin typeface="Pretendard"/>
+            </a:endParaRPr>
+          </a:p>
+          <a:p>
+            <a:pPr marL="274320" indent="-274320">
+              <a:lnSpc>
+                <a:spcPct val="125000"/>
+              </a:lnSpc>
+              <a:spcAft>
+                <a:spcPts val="500"/>
+              </a:spcAft>
+              <a:buFont typeface="Arial"/>
+              <a:buChar char="•"/>
+            </a:pPr>
+            <a:r>
+              <a:rPr sz="1500" b="0" dirty="0" err="1">
+                <a:solidFill>
+                  <a:srgbClr val="374151"/>
+                </a:solidFill>
+                <a:latin typeface="Pretendard"/>
+              </a:rPr>
+              <a:t>그리고</a:t>
+            </a:r>
+            <a:r>
+              <a:rPr sz="1500" b="0" dirty="0">
+                <a:solidFill>
+                  <a:srgbClr val="374151"/>
+                </a:solidFill>
+                <a:latin typeface="Pretendard"/>
+              </a:rPr>
+              <a:t> </a:t>
+            </a:r>
+            <a:r>
+              <a:rPr sz="1500" b="0" dirty="0" err="1">
+                <a:solidFill>
+                  <a:srgbClr val="374151"/>
+                </a:solidFill>
+                <a:latin typeface="Pretendard"/>
+              </a:rPr>
+              <a:t>그</a:t>
+            </a:r>
+            <a:r>
+              <a:rPr sz="1500" b="0" dirty="0">
+                <a:solidFill>
+                  <a:srgbClr val="374151"/>
+                </a:solidFill>
+                <a:latin typeface="Pretendard"/>
+              </a:rPr>
+              <a:t> </a:t>
+            </a:r>
+            <a:r>
+              <a:rPr sz="1500" b="1" dirty="0" err="1">
+                <a:solidFill>
+                  <a:srgbClr val="374151"/>
+                </a:solidFill>
+                <a:latin typeface="Pretendard"/>
+              </a:rPr>
+              <a:t>차이의</a:t>
+            </a:r>
+            <a:r>
+              <a:rPr sz="1500" b="1" dirty="0">
+                <a:solidFill>
+                  <a:srgbClr val="374151"/>
+                </a:solidFill>
+                <a:latin typeface="Pretendard"/>
+              </a:rPr>
+              <a:t> </a:t>
+            </a:r>
+            <a:r>
+              <a:rPr sz="1500" b="1" dirty="0" err="1">
+                <a:solidFill>
+                  <a:srgbClr val="374151"/>
+                </a:solidFill>
+                <a:latin typeface="Pretendard"/>
+              </a:rPr>
+              <a:t>원인</a:t>
+            </a:r>
+            <a:r>
+              <a:rPr sz="1500" b="0" dirty="0" err="1">
+                <a:solidFill>
+                  <a:srgbClr val="374151"/>
+                </a:solidFill>
+                <a:latin typeface="Pretendard"/>
+              </a:rPr>
+              <a:t>은</a:t>
+            </a:r>
+            <a:r>
+              <a:rPr sz="1500" b="0" dirty="0">
+                <a:solidFill>
+                  <a:srgbClr val="374151"/>
+                </a:solidFill>
+                <a:latin typeface="Pretendard"/>
+              </a:rPr>
+              <a:t> </a:t>
+            </a:r>
+            <a:r>
+              <a:rPr sz="1500" b="0" dirty="0" err="1">
+                <a:solidFill>
+                  <a:srgbClr val="374151"/>
+                </a:solidFill>
+                <a:latin typeface="Pretendard"/>
+              </a:rPr>
+              <a:t>무엇인가</a:t>
+            </a:r>
+            <a:endParaRPr sz="1500" b="0" dirty="0">
+              <a:solidFill>
+                <a:srgbClr val="374151"/>
+              </a:solidFill>
+              <a:latin typeface="Pretendard"/>
+            </a:endParaRPr>
+          </a:p>
+        </p:txBody>
+      </p:sp>
+      <p:sp>
+        <p:nvSpPr>
+          <p:cNvPr id="5" name="TextBox 4"/>
+          <p:cNvSpPr txBox="1"/>
+          <p:nvPr/>
+        </p:nvSpPr>
+        <p:spPr>
+          <a:xfrm>
+            <a:off x="10881360" y="6510528"/>
+            <a:ext cx="1005840" cy="237744"/>
+          </a:xfrm>
+          <a:prstGeom prst="rect">
+            <a:avLst/>
+          </a:prstGeom>
+          <a:noFill/>
+        </p:spPr>
+        <p:txBody>
+          <a:bodyPr wrap="square" lIns="0" tIns="0" rIns="0" bIns="0" anchor="t">
+            <a:spAutoFit/>
+          </a:bodyPr>
+          <a:lstStyle/>
+          <a:p>
+            <a:pPr algn="r"/>
+            <a:r>
+              <a:rPr sz="950" b="0">
+                <a:solidFill>
+                  <a:srgbClr val="AAB2BD"/>
+                </a:solidFill>
+                <a:latin typeface="Pretendard"/>
+              </a:rPr>
+              <a:t>2 / 10</a:t>
+            </a:r>
+          </a:p>
+        </p:txBody>
+      </p:sp>
+    </p:spTree>
+  </p:cSld>
+  <p:clrMapOvr>
+    <a:masterClrMapping/>
+  </p:clrMapOvr>
+</p:sld>
+</file>
+
+<file path=ppt/slides/slide3.xml><?xml version="1.0" encoding="utf-8"?>
+<p:sld xmlns:a="http://schemas.openxmlformats.org/drawingml/2006/main" xmlns:r="http://schemas.openxmlformats.org/officeDocument/2006/relationships" xmlns:p="http://schemas.openxmlformats.org/presentationml/2006/main">
+  <p:cSld>
+    <p:spTree>
+      <p:nvGrpSpPr>
+        <p:cNvPr id="1" name=""/>
+        <p:cNvGrpSpPr/>
+        <p:nvPr/>
+      </p:nvGrpSpPr>
+      <p:grpSpPr>
+        <a:xfrm>
+          <a:off x="0" y="0"/>
+          <a:ext cx="0" cy="0"/>
+          <a:chOff x="0" y="0"/>
+          <a:chExt cx="0" cy="0"/>
+        </a:xfrm>
+      </p:grpSpPr>
+      <p:sp>
+        <p:nvSpPr>
+          <p:cNvPr id="2" name="TextBox 1"/>
+          <p:cNvSpPr txBox="1"/>
+          <p:nvPr/>
+        </p:nvSpPr>
+        <p:spPr>
+          <a:xfrm>
+            <a:off x="457200" y="329184"/>
+            <a:ext cx="8229600" cy="274320"/>
+          </a:xfrm>
+          <a:prstGeom prst="rect">
+            <a:avLst/>
+          </a:prstGeom>
+          <a:noFill/>
+        </p:spPr>
+        <p:txBody>
+          <a:bodyPr wrap="square" lIns="0" tIns="0" rIns="0" bIns="0" anchor="t">
+            <a:spAutoFit/>
+          </a:bodyPr>
+          <a:lstStyle/>
+          <a:p>
+            <a:r>
+              <a:rPr sz="1250" b="1">
+                <a:solidFill>
+                  <a:srgbClr val="1D4ED8"/>
+                </a:solidFill>
+                <a:latin typeface="Pretendard"/>
+              </a:rPr>
+              <a:t>배경</a:t>
+            </a:r>
+            <a:r>
+              <a:rPr sz="1250" b="0">
+                <a:solidFill>
+                  <a:srgbClr val="BFC6D0"/>
+                </a:solidFill>
+                <a:latin typeface="Pretendard"/>
+              </a:rPr>
+              <a:t>     방법     결과     결론</a:t>
+            </a:r>
+          </a:p>
+        </p:txBody>
+      </p:sp>
+      <p:sp>
+        <p:nvSpPr>
+          <p:cNvPr id="3" name="TextBox 2"/>
+          <p:cNvSpPr txBox="1"/>
+          <p:nvPr/>
+        </p:nvSpPr>
+        <p:spPr>
+          <a:xfrm>
+            <a:off x="457200" y="676656"/>
+            <a:ext cx="11277295" cy="502920"/>
+          </a:xfrm>
+          <a:prstGeom prst="rect">
+            <a:avLst/>
+          </a:prstGeom>
+          <a:noFill/>
+        </p:spPr>
+        <p:txBody>
+          <a:bodyPr wrap="square" lIns="0" tIns="0" rIns="0" bIns="0" anchor="t">
+            <a:spAutoFit/>
+          </a:bodyPr>
+          <a:lstStyle/>
+          <a:p>
+            <a:pPr>
+              <a:lnSpc>
+                <a:spcPct val="100000"/>
+              </a:lnSpc>
+            </a:pPr>
+            <a:r>
+              <a:rPr sz="2100" b="1">
+                <a:solidFill>
+                  <a:srgbClr val="111827"/>
+                </a:solidFill>
+                <a:latin typeface="Pretendard"/>
+              </a:rPr>
+              <a:t>balanced 4-class, 어휘는 </a:t>
+            </a:r>
+            <a:r>
+              <a:rPr sz="2100" b="1">
+                <a:solidFill>
+                  <a:srgbClr val="1D4ED8"/>
+                </a:solidFill>
+                <a:latin typeface="Pretendard"/>
+              </a:rPr>
+              <a:t>train에서만 구축</a:t>
+            </a:r>
+            <a:r>
+              <a:rPr sz="2100" b="1">
+                <a:solidFill>
+                  <a:srgbClr val="111827"/>
+                </a:solidFill>
+                <a:latin typeface="Pretendard"/>
+              </a:rPr>
+              <a:t> (leakage 방지)</a:t>
             </a:r>
           </a:p>
         </p:txBody>
@@ -4163,7 +4969,7 @@
           <a:noFill/>
         </p:spPr>
         <p:txBody>
-          <a:bodyPr wrap="square" lIns="0" rIns="0" tIns="0" bIns="0" anchor="t">
+          <a:bodyPr wrap="square" lIns="0" tIns="0" rIns="0" bIns="0" anchor="t">
             <a:spAutoFit/>
           </a:bodyPr>
           <a:lstStyle/>
@@ -4177,13 +4983,13 @@
               </a:spcAft>
             </a:pPr>
             <a:r>
-              <a:rPr b="1" sz="1650">
+              <a:rPr sz="1650" b="1">
                 <a:solidFill>
                   <a:srgbClr val="1D4ED8"/>
                 </a:solidFill>
                 <a:latin typeface="Pretendard"/>
               </a:rPr>
-              <a:t>과제</a:t>
+              <a:t>분할 (seed 42)</a:t>
             </a:r>
           </a:p>
           <a:p>
@@ -4198,22 +5004,32 @@
               <a:buChar char="•"/>
             </a:pPr>
             <a:r>
-              <a:rPr b="1" sz="1500">
+              <a:rPr sz="1500" b="1">
                 <a:solidFill>
                   <a:srgbClr val="111827"/>
                 </a:solidFill>
                 <a:latin typeface="Pretendard"/>
               </a:rPr>
-              <a:t>AG News 4-class 뉴스 주제 분류</a:t>
-            </a:r>
-            <a:r>
-              <a:rPr b="0" sz="1500">
-                <a:solidFill>
-                  <a:srgbClr val="374151"/>
-                </a:solidFill>
-                <a:latin typeface="Pretendard"/>
-              </a:rPr>
-              <a:t> (World·Sports·Business·Sci-Tech)</a:t>
+              <a:t>Train 108,000 / Validation 12,000 / Test 7,600</a:t>
+            </a:r>
+          </a:p>
+          <a:p>
+            <a:pPr>
+              <a:spcBef>
+                <a:spcPts val="1400"/>
+              </a:spcBef>
+              <a:spcAft>
+                <a:spcPts val="700"/>
+              </a:spcAft>
+            </a:pPr>
+            <a:r>
+              <a:rPr sz="1650" b="1">
+                <a:solidFill>
+                  <a:srgbClr val="1D4ED8"/>
+                </a:solidFill>
+                <a:latin typeface="Pretendard"/>
+              </a:rPr>
+              <a:t>클래스</a:t>
             </a:r>
           </a:p>
           <a:p>
@@ -4228,32 +5044,22 @@
               <a:buChar char="•"/>
             </a:pPr>
             <a:r>
-              <a:rPr b="0" sz="1500">
-                <a:solidFill>
-                  <a:srgbClr val="374151"/>
-                </a:solidFill>
-                <a:latin typeface="Pretendard"/>
-              </a:rPr>
-              <a:t>LSTM과 Transformer Encoder를 모두 from scratch로 학습</a:t>
-            </a:r>
-          </a:p>
-          <a:p>
-            <a:pPr>
-              <a:spcBef>
-                <a:spcPts val="1500"/>
-              </a:spcBef>
-              <a:spcAft>
-                <a:spcPts val="700"/>
-              </a:spcAft>
-            </a:pPr>
-            <a:r>
-              <a:rPr b="1" sz="1650">
-                <a:solidFill>
-                  <a:srgbClr val="1D4ED8"/>
-                </a:solidFill>
-                <a:latin typeface="Pretendard"/>
-              </a:rPr>
-              <a:t>방법</a:t>
+              <a:rPr sz="1500" b="1">
+                <a:solidFill>
+                  <a:srgbClr val="111827"/>
+                </a:solidFill>
+                <a:latin typeface="Pretendard"/>
+              </a:rPr>
+              <a:t>World · Sports · Business · Sci-Tech</a:t>
+            </a:r>
+            <a:r>
+              <a:rPr sz="1500" b="0">
+                <a:solidFill>
+                  <a:srgbClr val="374151"/>
+                </a:solidFill>
+                <a:latin typeface="Pretendard"/>
+              </a:rPr>
+              <a:t> 4개, balanced</a:t>
             </a:r>
           </a:p>
           <a:p>
@@ -4268,22 +5074,32 @@
               <a:buChar char="•"/>
             </a:pPr>
             <a:r>
-              <a:rPr b="1" sz="1500">
-                <a:solidFill>
-                  <a:srgbClr val="111827"/>
-                </a:solidFill>
-                <a:latin typeface="Pretendard"/>
-              </a:rPr>
-              <a:t>데이터·전처리·어휘·시퀀스 길이·학습 예산</a:t>
-            </a:r>
-            <a:r>
-              <a:rPr b="0" sz="1500">
-                <a:solidFill>
-                  <a:srgbClr val="374151"/>
-                </a:solidFill>
-                <a:latin typeface="Pretendard"/>
-              </a:rPr>
-              <a:t>을 동일하게 고정</a:t>
+              <a:rPr sz="1500" b="0">
+                <a:solidFill>
+                  <a:srgbClr val="374151"/>
+                </a:solidFill>
+                <a:latin typeface="Pretendard"/>
+              </a:rPr>
+              <a:t>train 약 27,000 / test 1,900 each</a:t>
+            </a:r>
+          </a:p>
+          <a:p>
+            <a:pPr>
+              <a:spcBef>
+                <a:spcPts val="1400"/>
+              </a:spcBef>
+              <a:spcAft>
+                <a:spcPts val="700"/>
+              </a:spcAft>
+            </a:pPr>
+            <a:r>
+              <a:rPr sz="1650" b="1">
+                <a:solidFill>
+                  <a:srgbClr val="1D4ED8"/>
+                </a:solidFill>
+                <a:latin typeface="Pretendard"/>
+              </a:rPr>
+              <a:t>전처리 (두 모델 공통)</a:t>
             </a:r>
           </a:p>
           <a:p>
@@ -4298,32 +5114,13 @@
               <a:buChar char="•"/>
             </a:pPr>
             <a:r>
-              <a:rPr b="0" sz="1500">
-                <a:solidFill>
-                  <a:srgbClr val="374151"/>
-                </a:solidFill>
-                <a:latin typeface="Pretendard"/>
-              </a:rPr>
-              <a:t>encoder 구조만 유일한 변수로 둔다</a:t>
-            </a:r>
-          </a:p>
-          <a:p>
-            <a:pPr>
-              <a:spcBef>
-                <a:spcPts val="1500"/>
-              </a:spcBef>
-              <a:spcAft>
-                <a:spcPts val="700"/>
-              </a:spcAft>
-            </a:pPr>
-            <a:r>
-              <a:rPr b="1" sz="1650">
-                <a:solidFill>
-                  <a:srgbClr val="1D4ED8"/>
-                </a:solidFill>
-                <a:latin typeface="Pretendard"/>
-              </a:rPr>
-              <a:t>질문</a:t>
+              <a:rPr sz="1500" b="0">
+                <a:solidFill>
+                  <a:srgbClr val="374151"/>
+                </a:solidFill>
+                <a:latin typeface="Pretendard"/>
+              </a:rPr>
+              <a:t>단어 단위 tokenization (소문자화)</a:t>
             </a:r>
           </a:p>
           <a:p>
@@ -4338,13 +5135,31 @@
               <a:buChar char="•"/>
             </a:pPr>
             <a:r>
-              <a:rPr b="0" sz="1500">
-                <a:solidFill>
-                  <a:srgbClr val="374151"/>
-                </a:solidFill>
-                <a:latin typeface="Pretendard"/>
-              </a:rPr>
-              <a:t>성능·수렴·data efficiency·오분류 양상이 어떻게 다른가</a:t>
+              <a:rPr sz="1500" b="0">
+                <a:solidFill>
+                  <a:srgbClr val="374151"/>
+                </a:solidFill>
+                <a:latin typeface="Pretendard"/>
+              </a:rPr>
+              <a:t>vocabulary: </a:t>
+            </a:r>
+            <a:r>
+              <a:rPr sz="1500" b="1">
+                <a:solidFill>
+                  <a:srgbClr val="111827"/>
+                </a:solidFill>
+                <a:latin typeface="Pretendard"/>
+              </a:rPr>
+              <a:t>train-only</a:t>
+            </a:r>
+            <a:r>
+              <a:rPr sz="1500" b="0">
+                <a:solidFill>
+                  <a:srgbClr val="374151"/>
+                </a:solidFill>
+                <a:latin typeface="Pretendard"/>
+              </a:rPr>
+              <a:t>, 상한 20,000, min frequency 2</a:t>
             </a:r>
           </a:p>
           <a:p>
@@ -4359,13 +5174,13 @@
               <a:buChar char="•"/>
             </a:pPr>
             <a:r>
-              <a:rPr b="0" sz="1500">
-                <a:solidFill>
-                  <a:srgbClr val="374151"/>
-                </a:solidFill>
-                <a:latin typeface="Pretendard"/>
-              </a:rPr>
-              <a:t>그리고 그 차이의 원인은 무엇인가</a:t>
+              <a:rPr sz="1500" b="0">
+                <a:solidFill>
+                  <a:srgbClr val="374151"/>
+                </a:solidFill>
+                <a:latin typeface="Pretendard"/>
+              </a:rPr>
+              <a:t>max length 128, padding 위치는 masking으로 무시</a:t>
             </a:r>
           </a:p>
         </p:txBody>
@@ -4387,20 +5202,20 @@
           <a:noFill/>
         </p:spPr>
         <p:txBody>
-          <a:bodyPr wrap="square" lIns="0" rIns="0" tIns="0" bIns="0" anchor="t">
+          <a:bodyPr wrap="square" lIns="0" tIns="0" rIns="0" bIns="0" anchor="t">
             <a:spAutoFit/>
           </a:bodyPr>
           <a:lstStyle/>
           <a:p>
             <a:pPr algn="r"/>
             <a:r>
-              <a:rPr b="0" sz="950">
+              <a:rPr sz="950" b="0">
                 <a:solidFill>
                   <a:srgbClr val="AAB2BD"/>
                 </a:solidFill>
                 <a:latin typeface="Pretendard"/>
               </a:rPr>
-              <a:t>2 / 10</a:t>
+              <a:t>3 / 10</a:t>
             </a:r>
           </a:p>
         </p:txBody>
@@ -4413,8 +5228,8 @@
 </p:sld>
 </file>
 
-<file path=ppt/slides/slide3.xml><?xml version="1.0" encoding="utf-8"?>
-<p:sld xmlns:a="http://schemas.openxmlformats.org/drawingml/2006/main" xmlns:p="http://schemas.openxmlformats.org/presentationml/2006/main" xmlns:r="http://schemas.openxmlformats.org/officeDocument/2006/relationships">
+<file path=ppt/slides/slide4.xml><?xml version="1.0" encoding="utf-8"?>
+<p:sld xmlns:a="http://schemas.openxmlformats.org/drawingml/2006/main" xmlns:r="http://schemas.openxmlformats.org/officeDocument/2006/relationships" xmlns:p="http://schemas.openxmlformats.org/presentationml/2006/main">
   <p:cSld>
     <p:spTree>
       <p:nvGrpSpPr>
@@ -4422,7 +5237,14 @@
         <p:cNvGrpSpPr/>
         <p:nvPr/>
       </p:nvGrpSpPr>
-      <p:grpSpPr/>
+      <p:grpSpPr>
+        <a:xfrm>
+          <a:off x="0" y="0"/>
+          <a:ext cx="0" cy="0"/>
+          <a:chOff x="0" y="0"/>
+          <a:chExt cx="0" cy="0"/>
+        </a:xfrm>
+      </p:grpSpPr>
       <p:sp>
         <p:nvSpPr>
           <p:cNvPr id="2" name="TextBox 1"/>
@@ -4440,73 +5262,37 @@
           <a:noFill/>
         </p:spPr>
         <p:txBody>
-          <a:bodyPr wrap="square" lIns="0" rIns="0" tIns="0" bIns="0" anchor="t">
+          <a:bodyPr wrap="square" lIns="0" tIns="0" rIns="0" bIns="0" anchor="t">
             <a:spAutoFit/>
           </a:bodyPr>
           <a:lstStyle/>
           <a:p>
             <a:r>
-              <a:rPr b="1" sz="1250">
+              <a:rPr sz="1250" b="0">
+                <a:solidFill>
+                  <a:srgbClr val="BFC6D0"/>
+                </a:solidFill>
+                <a:latin typeface="Pretendard"/>
+              </a:rPr>
+              <a:t>배경     </a:t>
+            </a:r>
+            <a:r>
+              <a:rPr sz="1250" b="1">
                 <a:solidFill>
                   <a:srgbClr val="1D4ED8"/>
                 </a:solidFill>
                 <a:latin typeface="Pretendard"/>
               </a:rPr>
-              <a:t>배경</a:t>
-            </a:r>
-            <a:r>
-              <a:rPr b="0" sz="1250">
+              <a:t>방법</a:t>
+            </a:r>
+            <a:r>
+              <a:rPr sz="1250" b="0">
                 <a:solidFill>
                   <a:srgbClr val="BFC6D0"/>
                 </a:solidFill>
                 <a:latin typeface="Pretendard"/>
               </a:rPr>
-              <a:t>     </a:t>
-            </a:r>
-            <a:r>
-              <a:rPr b="0" sz="1250">
-                <a:solidFill>
-                  <a:srgbClr val="BFC6D0"/>
-                </a:solidFill>
-                <a:latin typeface="Pretendard"/>
-              </a:rPr>
-              <a:t>방법</a:t>
-            </a:r>
-            <a:r>
-              <a:rPr b="0" sz="1250">
-                <a:solidFill>
-                  <a:srgbClr val="BFC6D0"/>
-                </a:solidFill>
-                <a:latin typeface="Pretendard"/>
-              </a:rPr>
-              <a:t>     </a:t>
-            </a:r>
-            <a:r>
-              <a:rPr b="0" sz="1250">
-                <a:solidFill>
-                  <a:srgbClr val="BFC6D0"/>
-                </a:solidFill>
-                <a:latin typeface="Pretendard"/>
-              </a:rPr>
-              <a:t>결과</a:t>
-            </a:r>
-            <a:r>
-              <a:rPr b="0" sz="1250">
-                <a:solidFill>
-                  <a:srgbClr val="BFC6D0"/>
-                </a:solidFill>
-                <a:latin typeface="Pretendard"/>
-              </a:rPr>
-              <a:t>     </a:t>
-            </a:r>
-            <a:r>
-              <a:rPr b="0" sz="1250">
-                <a:solidFill>
-                  <a:srgbClr val="BFC6D0"/>
-                </a:solidFill>
-                <a:latin typeface="Pretendard"/>
-              </a:rPr>
-              <a:t>결론</a:t>
+              <a:t>     결과     결론</a:t>
             </a:r>
           </a:p>
         </p:txBody>
@@ -4528,7 +5314,7 @@
           <a:noFill/>
         </p:spPr>
         <p:txBody>
-          <a:bodyPr wrap="square" lIns="0" rIns="0" tIns="0" bIns="0" anchor="t">
+          <a:bodyPr wrap="square" lIns="0" tIns="0" rIns="0" bIns="0" anchor="t">
             <a:spAutoFit/>
           </a:bodyPr>
           <a:lstStyle/>
@@ -4539,31 +5325,22 @@
               </a:lnSpc>
             </a:pPr>
             <a:r>
-              <a:rPr b="1" sz="2100">
+              <a:rPr sz="2100" b="1">
                 <a:solidFill>
                   <a:srgbClr val="111827"/>
                 </a:solidFill>
                 <a:latin typeface="Pretendard"/>
               </a:rPr>
-              <a:t>balanced 4-class, 어휘는 </a:t>
-            </a:r>
-            <a:r>
-              <a:rPr b="1" sz="2100">
+              <a:t>공유 골격, </a:t>
+            </a:r>
+            <a:r>
+              <a:rPr sz="2100" b="1">
                 <a:solidFill>
                   <a:srgbClr val="1D4ED8"/>
                 </a:solidFill>
                 <a:latin typeface="Pretendard"/>
               </a:rPr>
-              <a:t>train에서만 구축</a:t>
-            </a:r>
-            <a:r>
-              <a:rPr b="1" sz="2100">
-                <a:solidFill>
-                  <a:srgbClr val="111827"/>
-                </a:solidFill>
-                <a:latin typeface="Pretendard"/>
-              </a:rPr>
-              <a:t> (leakage 방지)</a:t>
+              <a:t>encoder의 메커니즘만 다르다</a:t>
             </a:r>
           </a:p>
         </p:txBody>
@@ -4585,7 +5362,7 @@
           <a:noFill/>
         </p:spPr>
         <p:txBody>
-          <a:bodyPr wrap="square" lIns="0" rIns="0" tIns="0" bIns="0" anchor="t">
+          <a:bodyPr wrap="square" lIns="0" tIns="0" rIns="0" bIns="0" anchor="t">
             <a:spAutoFit/>
           </a:bodyPr>
           <a:lstStyle/>
@@ -4599,13 +5376,13 @@
               </a:spcAft>
             </a:pPr>
             <a:r>
-              <a:rPr b="1" sz="1650">
+              <a:rPr sz="1550" b="1">
                 <a:solidFill>
                   <a:srgbClr val="1D4ED8"/>
                 </a:solidFill>
                 <a:latin typeface="Pretendard"/>
               </a:rPr>
-              <a:t>분할 (seed 42)</a:t>
+              <a:t>공유 골격</a:t>
             </a:r>
           </a:p>
           <a:p>
@@ -4620,32 +5397,13 @@
               <a:buChar char="•"/>
             </a:pPr>
             <a:r>
-              <a:rPr b="1" sz="1500">
+              <a:rPr sz="1400" b="1">
                 <a:solidFill>
                   <a:srgbClr val="111827"/>
                 </a:solidFill>
                 <a:latin typeface="Pretendard"/>
               </a:rPr>
-              <a:t>Train 108,000 / Validation 12,000 / Test 7,600</a:t>
-            </a:r>
-          </a:p>
-          <a:p>
-            <a:pPr>
-              <a:spcBef>
-                <a:spcPts val="1400"/>
-              </a:spcBef>
-              <a:spcAft>
-                <a:spcPts val="700"/>
-              </a:spcAft>
-            </a:pPr>
-            <a:r>
-              <a:rPr b="1" sz="1650">
-                <a:solidFill>
-                  <a:srgbClr val="1D4ED8"/>
-                </a:solidFill>
-                <a:latin typeface="Pretendard"/>
-              </a:rPr>
-              <a:t>클래스</a:t>
+              <a:t>Embedding(128) → Encoder → masked mean pooling → Linear(4)</a:t>
             </a:r>
           </a:p>
           <a:p>
@@ -4660,22 +5418,32 @@
               <a:buChar char="•"/>
             </a:pPr>
             <a:r>
-              <a:rPr b="1" sz="1500">
-                <a:solidFill>
-                  <a:srgbClr val="111827"/>
-                </a:solidFill>
-                <a:latin typeface="Pretendard"/>
-              </a:rPr>
-              <a:t>World · Sports · Business · Sci-Tech</a:t>
-            </a:r>
-            <a:r>
-              <a:rPr b="0" sz="1500">
-                <a:solidFill>
-                  <a:srgbClr val="374151"/>
-                </a:solidFill>
-                <a:latin typeface="Pretendard"/>
-              </a:rPr>
-              <a:t> 4개, balanced</a:t>
+              <a:rPr sz="1400" b="0">
+                <a:solidFill>
+                  <a:srgbClr val="374151"/>
+                </a:solidFill>
+                <a:latin typeface="Pretendard"/>
+              </a:rPr>
+              <a:t>encoder 한 조각만 교체, 나머지는 모두 동일</a:t>
+            </a:r>
+          </a:p>
+          <a:p>
+            <a:pPr>
+              <a:spcBef>
+                <a:spcPts val="1300"/>
+              </a:spcBef>
+              <a:spcAft>
+                <a:spcPts val="700"/>
+              </a:spcAft>
+            </a:pPr>
+            <a:r>
+              <a:rPr sz="1550" b="1">
+                <a:solidFill>
+                  <a:srgbClr val="1D4ED8"/>
+                </a:solidFill>
+                <a:latin typeface="Pretendard"/>
+              </a:rPr>
+              <a:t>핵심 메커니즘 (결과 해석의 근거)</a:t>
             </a:r>
           </a:p>
           <a:p>
@@ -4690,32 +5458,22 @@
               <a:buChar char="•"/>
             </a:pPr>
             <a:r>
-              <a:rPr b="0" sz="1500">
-                <a:solidFill>
-                  <a:srgbClr val="374151"/>
-                </a:solidFill>
-                <a:latin typeface="Pretendard"/>
-              </a:rPr>
-              <a:t>train 약 27,000 / test 1,900 each</a:t>
-            </a:r>
-          </a:p>
-          <a:p>
-            <a:pPr>
-              <a:spcBef>
-                <a:spcPts val="1400"/>
-              </a:spcBef>
-              <a:spcAft>
-                <a:spcPts val="700"/>
-              </a:spcAft>
-            </a:pPr>
-            <a:r>
-              <a:rPr b="1" sz="1650">
-                <a:solidFill>
-                  <a:srgbClr val="1D4ED8"/>
-                </a:solidFill>
-                <a:latin typeface="Pretendard"/>
-              </a:rPr>
-              <a:t>전처리 (두 모델 공통)</a:t>
+              <a:rPr sz="1400" b="1">
+                <a:solidFill>
+                  <a:srgbClr val="6B7280"/>
+                </a:solidFill>
+                <a:latin typeface="Pretendard"/>
+              </a:rPr>
+              <a:t>LSTM</a:t>
+            </a:r>
+            <a:r>
+              <a:rPr sz="1400" b="0">
+                <a:solidFill>
+                  <a:srgbClr val="374151"/>
+                </a:solidFill>
+                <a:latin typeface="Pretendard"/>
+              </a:rPr>
+              <a:t>  토큰을 순차 처리하며 hidden state에 문맥을 누적 (recurrence)</a:t>
             </a:r>
           </a:p>
           <a:p>
@@ -4730,13 +5488,41 @@
               <a:buChar char="•"/>
             </a:pPr>
             <a:r>
-              <a:rPr b="0" sz="1500">
-                <a:solidFill>
-                  <a:srgbClr val="374151"/>
-                </a:solidFill>
-                <a:latin typeface="Pretendard"/>
-              </a:rPr>
-              <a:t>단어 단위 tokenization (소문자화)</a:t>
+              <a:rPr sz="1400" b="1">
+                <a:solidFill>
+                  <a:srgbClr val="1D4ED8"/>
+                </a:solidFill>
+                <a:latin typeface="Pretendard"/>
+              </a:rPr>
+              <a:t>Transformer</a:t>
+            </a:r>
+            <a:r>
+              <a:rPr sz="1400" b="0">
+                <a:solidFill>
+                  <a:srgbClr val="374151"/>
+                </a:solidFill>
+                <a:latin typeface="Pretendard"/>
+              </a:rPr>
+              <a:t>  모든 토큰을 self-attention으로 직접 연결, 근거를 여러 토큰에 분산</a:t>
+            </a:r>
+          </a:p>
+          <a:p>
+            <a:pPr>
+              <a:spcBef>
+                <a:spcPts val="1300"/>
+              </a:spcBef>
+              <a:spcAft>
+                <a:spcPts val="700"/>
+              </a:spcAft>
+            </a:pPr>
+            <a:r>
+              <a:rPr sz="1550" b="1">
+                <a:solidFill>
+                  <a:srgbClr val="1D4ED8"/>
+                </a:solidFill>
+                <a:latin typeface="Pretendard"/>
+              </a:rPr>
+              <a:t>설정 · 규모</a:t>
             </a:r>
           </a:p>
           <a:p>
@@ -4751,31 +5537,22 @@
               <a:buChar char="•"/>
             </a:pPr>
             <a:r>
-              <a:rPr b="0" sz="1500">
-                <a:solidFill>
-                  <a:srgbClr val="374151"/>
-                </a:solidFill>
-                <a:latin typeface="Pretendard"/>
-              </a:rPr>
-              <a:t>vocabulary: </a:t>
-            </a:r>
-            <a:r>
-              <a:rPr b="1" sz="1500">
-                <a:solidFill>
-                  <a:srgbClr val="111827"/>
-                </a:solidFill>
-                <a:latin typeface="Pretendard"/>
-              </a:rPr>
-              <a:t>train-only</a:t>
-            </a:r>
-            <a:r>
-              <a:rPr b="0" sz="1500">
-                <a:solidFill>
-                  <a:srgbClr val="374151"/>
-                </a:solidFill>
-                <a:latin typeface="Pretendard"/>
-              </a:rPr>
-              <a:t>, 상한 20,000, min frequency 2</a:t>
+              <a:rPr sz="1400" b="1">
+                <a:solidFill>
+                  <a:srgbClr val="6B7280"/>
+                </a:solidFill>
+                <a:latin typeface="Pretendard"/>
+              </a:rPr>
+              <a:t>LSTM</a:t>
+            </a:r>
+            <a:r>
+              <a:rPr sz="1400" b="0">
+                <a:solidFill>
+                  <a:srgbClr val="374151"/>
+                </a:solidFill>
+                <a:latin typeface="Pretendard"/>
+              </a:rPr>
+              <a:t>  bidirectional 2 layers · hidden 128 · params 3,220,484</a:t>
             </a:r>
           </a:p>
           <a:p>
@@ -4790,13 +5567,61 @@
               <a:buChar char="•"/>
             </a:pPr>
             <a:r>
-              <a:rPr b="0" sz="1500">
-                <a:solidFill>
-                  <a:srgbClr val="374151"/>
-                </a:solidFill>
-                <a:latin typeface="Pretendard"/>
-              </a:rPr>
-              <a:t>max length 128, padding 위치는 masking으로 무시</a:t>
+              <a:rPr sz="1400" b="1">
+                <a:solidFill>
+                  <a:srgbClr val="1D4ED8"/>
+                </a:solidFill>
+                <a:latin typeface="Pretendard"/>
+              </a:rPr>
+              <a:t>Transformer</a:t>
+            </a:r>
+            <a:r>
+              <a:rPr sz="1400" b="0">
+                <a:solidFill>
+                  <a:srgbClr val="374151"/>
+                </a:solidFill>
+                <a:latin typeface="Pretendard"/>
+              </a:rPr>
+              <a:t>  2 layers · 4 heads · FFN 256 · sinusoidal PE · params 2,825,476</a:t>
+            </a:r>
+          </a:p>
+          <a:p>
+            <a:pPr marL="274320" indent="-274320">
+              <a:lnSpc>
+                <a:spcPct val="125000"/>
+              </a:lnSpc>
+              <a:spcAft>
+                <a:spcPts val="500"/>
+              </a:spcAft>
+              <a:buFont typeface="Arial"/>
+              <a:buChar char="•"/>
+            </a:pPr>
+            <a:r>
+              <a:rPr sz="1400" b="0">
+                <a:solidFill>
+                  <a:srgbClr val="374151"/>
+                </a:solidFill>
+                <a:latin typeface="Pretendard"/>
+              </a:rPr>
+              <a:t>임베딩이 지배적이라 두 모델 파라미터는 </a:t>
+            </a:r>
+            <a:r>
+              <a:rPr sz="1400" b="1">
+                <a:solidFill>
+                  <a:srgbClr val="111827"/>
+                </a:solidFill>
+                <a:latin typeface="Pretendard"/>
+              </a:rPr>
+              <a:t>약 14% 차</a:t>
+            </a:r>
+            <a:r>
+              <a:rPr sz="1400" b="0">
+                <a:solidFill>
+                  <a:srgbClr val="374151"/>
+                </a:solidFill>
+                <a:latin typeface="Pretendard"/>
+              </a:rPr>
+              <a:t>로 유사</a:t>
             </a:r>
           </a:p>
         </p:txBody>
@@ -4818,20 +5643,20 @@
           <a:noFill/>
         </p:spPr>
         <p:txBody>
-          <a:bodyPr wrap="square" lIns="0" rIns="0" tIns="0" bIns="0" anchor="t">
+          <a:bodyPr wrap="square" lIns="0" tIns="0" rIns="0" bIns="0" anchor="t">
             <a:spAutoFit/>
           </a:bodyPr>
           <a:lstStyle/>
           <a:p>
             <a:pPr algn="r"/>
             <a:r>
-              <a:rPr b="0" sz="950">
+              <a:rPr sz="950" b="0">
                 <a:solidFill>
                   <a:srgbClr val="AAB2BD"/>
                 </a:solidFill>
                 <a:latin typeface="Pretendard"/>
               </a:rPr>
-              <a:t>3 / 10</a:t>
+              <a:t>4 / 10</a:t>
             </a:r>
           </a:p>
         </p:txBody>
@@ -4844,8 +5669,8 @@
 </p:sld>
 </file>
 
-<file path=ppt/slides/slide4.xml><?xml version="1.0" encoding="utf-8"?>
-<p:sld xmlns:a="http://schemas.openxmlformats.org/drawingml/2006/main" xmlns:p="http://schemas.openxmlformats.org/presentationml/2006/main" xmlns:r="http://schemas.openxmlformats.org/officeDocument/2006/relationships">
+<file path=ppt/slides/slide5.xml><?xml version="1.0" encoding="utf-8"?>
+<p:sld xmlns:a="http://schemas.openxmlformats.org/drawingml/2006/main" xmlns:r="http://schemas.openxmlformats.org/officeDocument/2006/relationships" xmlns:p="http://schemas.openxmlformats.org/presentationml/2006/main">
   <p:cSld>
     <p:spTree>
       <p:nvGrpSpPr>
@@ -4853,7 +5678,14 @@
         <p:cNvGrpSpPr/>
         <p:nvPr/>
       </p:nvGrpSpPr>
-      <p:grpSpPr/>
+      <p:grpSpPr>
+        <a:xfrm>
+          <a:off x="0" y="0"/>
+          <a:ext cx="0" cy="0"/>
+          <a:chOff x="0" y="0"/>
+          <a:chExt cx="0" cy="0"/>
+        </a:xfrm>
+      </p:grpSpPr>
       <p:sp>
         <p:nvSpPr>
           <p:cNvPr id="2" name="TextBox 1"/>
@@ -4871,73 +5703,37 @@
           <a:noFill/>
         </p:spPr>
         <p:txBody>
-          <a:bodyPr wrap="square" lIns="0" rIns="0" tIns="0" bIns="0" anchor="t">
+          <a:bodyPr wrap="square" lIns="0" tIns="0" rIns="0" bIns="0" anchor="t">
             <a:spAutoFit/>
           </a:bodyPr>
           <a:lstStyle/>
           <a:p>
             <a:r>
-              <a:rPr b="0" sz="1250">
+              <a:rPr sz="1250" b="0">
                 <a:solidFill>
                   <a:srgbClr val="BFC6D0"/>
                 </a:solidFill>
                 <a:latin typeface="Pretendard"/>
               </a:rPr>
-              <a:t>배경</a:t>
-            </a:r>
-            <a:r>
-              <a:rPr b="0" sz="1250">
+              <a:t>배경     </a:t>
+            </a:r>
+            <a:r>
+              <a:rPr sz="1250" b="1">
+                <a:solidFill>
+                  <a:srgbClr val="1D4ED8"/>
+                </a:solidFill>
+                <a:latin typeface="Pretendard"/>
+              </a:rPr>
+              <a:t>방법</a:t>
+            </a:r>
+            <a:r>
+              <a:rPr sz="1250" b="0">
                 <a:solidFill>
                   <a:srgbClr val="BFC6D0"/>
                 </a:solidFill>
                 <a:latin typeface="Pretendard"/>
               </a:rPr>
-              <a:t>     </a:t>
-            </a:r>
-            <a:r>
-              <a:rPr b="1" sz="1250">
-                <a:solidFill>
-                  <a:srgbClr val="1D4ED8"/>
-                </a:solidFill>
-                <a:latin typeface="Pretendard"/>
-              </a:rPr>
-              <a:t>방법</a:t>
-            </a:r>
-            <a:r>
-              <a:rPr b="0" sz="1250">
-                <a:solidFill>
-                  <a:srgbClr val="BFC6D0"/>
-                </a:solidFill>
-                <a:latin typeface="Pretendard"/>
-              </a:rPr>
-              <a:t>     </a:t>
-            </a:r>
-            <a:r>
-              <a:rPr b="0" sz="1250">
-                <a:solidFill>
-                  <a:srgbClr val="BFC6D0"/>
-                </a:solidFill>
-                <a:latin typeface="Pretendard"/>
-              </a:rPr>
-              <a:t>결과</a:t>
-            </a:r>
-            <a:r>
-              <a:rPr b="0" sz="1250">
-                <a:solidFill>
-                  <a:srgbClr val="BFC6D0"/>
-                </a:solidFill>
-                <a:latin typeface="Pretendard"/>
-              </a:rPr>
-              <a:t>     </a:t>
-            </a:r>
-            <a:r>
-              <a:rPr b="0" sz="1250">
-                <a:solidFill>
-                  <a:srgbClr val="BFC6D0"/>
-                </a:solidFill>
-                <a:latin typeface="Pretendard"/>
-              </a:rPr>
-              <a:t>결론</a:t>
+              <a:t>     결과     결론</a:t>
             </a:r>
           </a:p>
         </p:txBody>
@@ -4959,7 +5755,7 @@
           <a:noFill/>
         </p:spPr>
         <p:txBody>
-          <a:bodyPr wrap="square" lIns="0" rIns="0" tIns="0" bIns="0" anchor="t">
+          <a:bodyPr wrap="square" lIns="0" tIns="0" rIns="0" bIns="0" anchor="t">
             <a:spAutoFit/>
           </a:bodyPr>
           <a:lstStyle/>
@@ -4970,22 +5766,31 @@
               </a:lnSpc>
             </a:pPr>
             <a:r>
-              <a:rPr b="1" sz="2100">
+              <a:rPr sz="2100" b="1">
                 <a:solidFill>
                   <a:srgbClr val="111827"/>
                 </a:solidFill>
                 <a:latin typeface="Pretendard"/>
               </a:rPr>
-              <a:t>공유 골격, </a:t>
-            </a:r>
-            <a:r>
-              <a:rPr b="1" sz="2100">
+              <a:t>유일한 변수 = </a:t>
+            </a:r>
+            <a:r>
+              <a:rPr sz="2100" b="1">
                 <a:solidFill>
                   <a:srgbClr val="1D4ED8"/>
                 </a:solidFill>
                 <a:latin typeface="Pretendard"/>
               </a:rPr>
-              <a:t>encoder만 교체</a:t>
+              <a:t>encoder 구조</a:t>
+            </a:r>
+            <a:r>
+              <a:rPr sz="2100" b="1">
+                <a:solidFill>
+                  <a:srgbClr val="111827"/>
+                </a:solidFill>
+                <a:latin typeface="Pretendard"/>
+              </a:rPr>
+              <a:t> (나머지 전부 고정)</a:t>
             </a:r>
           </a:p>
         </p:txBody>
@@ -5007,7 +5812,7 @@
           <a:noFill/>
         </p:spPr>
         <p:txBody>
-          <a:bodyPr wrap="square" lIns="0" rIns="0" tIns="0" bIns="0" anchor="t">
+          <a:bodyPr wrap="square" lIns="0" tIns="0" rIns="0" bIns="0" anchor="t">
             <a:spAutoFit/>
           </a:bodyPr>
           <a:lstStyle/>
@@ -5021,13 +5826,13 @@
               </a:spcAft>
             </a:pPr>
             <a:r>
-              <a:rPr b="1" sz="1650">
+              <a:rPr sz="1650" b="1">
                 <a:solidFill>
                   <a:srgbClr val="1D4ED8"/>
                 </a:solidFill>
                 <a:latin typeface="Pretendard"/>
               </a:rPr>
-              <a:t>공유 골격</a:t>
+              <a:t>고정 (fair comparison)</a:t>
             </a:r>
           </a:p>
           <a:p>
@@ -5042,13 +5847,13 @@
               <a:buChar char="•"/>
             </a:pPr>
             <a:r>
-              <a:rPr b="1" sz="1500">
-                <a:solidFill>
-                  <a:srgbClr val="111827"/>
-                </a:solidFill>
-                <a:latin typeface="Pretendard"/>
-              </a:rPr>
-              <a:t>Embedding(128) → Encoder → masked mean pooling → Linear(4)</a:t>
+              <a:rPr sz="1500" b="0">
+                <a:solidFill>
+                  <a:srgbClr val="374151"/>
+                </a:solidFill>
+                <a:latin typeface="Pretendard"/>
+              </a:rPr>
+              <a:t>split · tokenizer · vocabulary · max length · pooling</a:t>
             </a:r>
           </a:p>
           <a:p>
@@ -5063,32 +5868,32 @@
               <a:buChar char="•"/>
             </a:pPr>
             <a:r>
-              <a:rPr b="0" sz="1500">
-                <a:solidFill>
-                  <a:srgbClr val="374151"/>
-                </a:solidFill>
-                <a:latin typeface="Pretendard"/>
-              </a:rPr>
-              <a:t>encoder 한 조각만 교체, 나머지는 모두 동일</a:t>
+              <a:rPr sz="1500" b="0">
+                <a:solidFill>
+                  <a:srgbClr val="374151"/>
+                </a:solidFill>
+                <a:latin typeface="Pretendard"/>
+              </a:rPr>
+              <a:t>optimizer · learning rate · batch size · epoch · seed</a:t>
             </a:r>
           </a:p>
           <a:p>
             <a:pPr>
               <a:spcBef>
-                <a:spcPts val="1500"/>
+                <a:spcPts val="1400"/>
               </a:spcBef>
               <a:spcAft>
                 <a:spcPts val="700"/>
               </a:spcAft>
             </a:pPr>
             <a:r>
-              <a:rPr b="1" sz="1650">
+              <a:rPr sz="1650" b="1">
                 <a:solidFill>
                   <a:srgbClr val="1D4ED8"/>
                 </a:solidFill>
                 <a:latin typeface="Pretendard"/>
               </a:rPr>
-              <a:t>encoder 비교</a:t>
+              <a:t>학습</a:t>
             </a:r>
           </a:p>
           <a:p>
@@ -5103,22 +5908,13 @@
               <a:buChar char="•"/>
             </a:pPr>
             <a:r>
-              <a:rPr b="1" sz="1500">
-                <a:solidFill>
-                  <a:srgbClr val="111827"/>
-                </a:solidFill>
-                <a:latin typeface="Pretendard"/>
-              </a:rPr>
-              <a:t>LSTM</a:t>
-            </a:r>
-            <a:r>
-              <a:rPr b="0" sz="1500">
-                <a:solidFill>
-                  <a:srgbClr val="374151"/>
-                </a:solidFill>
-                <a:latin typeface="Pretendard"/>
-              </a:rPr>
-              <a:t>  bidirectional · 2 layers · hidden 128 / output 256 / params 3,220,484</a:t>
+              <a:rPr sz="1500" b="0">
+                <a:solidFill>
+                  <a:srgbClr val="374151"/>
+                </a:solidFill>
+                <a:latin typeface="Pretendard"/>
+              </a:rPr>
+              <a:t>Adam, learning rate 0.001, batch 64, 최대 8 epochs, dropout 0.1, seed 42</a:t>
             </a:r>
           </a:p>
           <a:p>
@@ -5133,41 +5929,50 @@
               <a:buChar char="•"/>
             </a:pPr>
             <a:r>
-              <a:rPr b="1" sz="1500">
+              <a:rPr sz="1500" b="0">
+                <a:solidFill>
+                  <a:srgbClr val="374151"/>
+                </a:solidFill>
+                <a:latin typeface="Pretendard"/>
+              </a:rPr>
+              <a:t>model selection은 </a:t>
+            </a:r>
+            <a:r>
+              <a:rPr sz="1500" b="1">
                 <a:solidFill>
                   <a:srgbClr val="111827"/>
                 </a:solidFill>
                 <a:latin typeface="Pretendard"/>
               </a:rPr>
-              <a:t>Transformer</a:t>
-            </a:r>
-            <a:r>
-              <a:rPr b="0" sz="1500">
-                <a:solidFill>
-                  <a:srgbClr val="374151"/>
-                </a:solidFill>
-                <a:latin typeface="Pretendard"/>
-              </a:rPr>
-              <a:t>  2 layers · 4 heads · FFN 256 · sinusoidal PE / dim 128 / params 2,825,476</a:t>
+              <a:t>validation</a:t>
+            </a:r>
+            <a:r>
+              <a:rPr sz="1500" b="0">
+                <a:solidFill>
+                  <a:srgbClr val="374151"/>
+                </a:solidFill>
+                <a:latin typeface="Pretendard"/>
+              </a:rPr>
+              <a:t>, test는 1회</a:t>
             </a:r>
           </a:p>
           <a:p>
             <a:pPr>
               <a:spcBef>
-                <a:spcPts val="1500"/>
+                <a:spcPts val="1400"/>
               </a:spcBef>
               <a:spcAft>
                 <a:spcPts val="700"/>
               </a:spcAft>
             </a:pPr>
             <a:r>
-              <a:rPr b="1" sz="1650">
+              <a:rPr sz="1650" b="1">
                 <a:solidFill>
                   <a:srgbClr val="1D4ED8"/>
                 </a:solidFill>
                 <a:latin typeface="Pretendard"/>
               </a:rPr>
-              <a:t>파라미터 규모</a:t>
+              <a:t>Ablation · 지표</a:t>
             </a:r>
           </a:p>
           <a:p>
@@ -5182,31 +5987,43 @@
               <a:buChar char="•"/>
             </a:pPr>
             <a:r>
-              <a:rPr b="0" sz="1500">
-                <a:solidFill>
-                  <a:srgbClr val="374151"/>
-                </a:solidFill>
-                <a:latin typeface="Pretendard"/>
-              </a:rPr>
-              <a:t>임베딩이 지배적이라 두 모델 파라미터는 </a:t>
-            </a:r>
-            <a:r>
-              <a:rPr b="1" sz="1500">
+              <a:rPr sz="1500" b="1">
                 <a:solidFill>
                   <a:srgbClr val="111827"/>
                 </a:solidFill>
                 <a:latin typeface="Pretendard"/>
               </a:rPr>
-              <a:t>약 14% 차</a:t>
-            </a:r>
-            <a:r>
-              <a:rPr b="0" sz="1500">
-                <a:solidFill>
-                  <a:srgbClr val="374151"/>
-                </a:solidFill>
-                <a:latin typeface="Pretendard"/>
-              </a:rPr>
-              <a:t>로 비슷</a:t>
+              <a:t>training set 5 / 25 / 50 / 100%</a:t>
+            </a:r>
+            <a:r>
+              <a:rPr sz="1500" b="0">
+                <a:solidFill>
+                  <a:srgbClr val="374151"/>
+                </a:solidFill>
+                <a:latin typeface="Pretendard"/>
+              </a:rPr>
+              <a:t> (vocabulary 고정, stratified, val·test 전체)</a:t>
+            </a:r>
+          </a:p>
+          <a:p>
+            <a:pPr marL="274320" indent="-274320">
+              <a:lnSpc>
+                <a:spcPct val="125000"/>
+              </a:lnSpc>
+              <a:spcAft>
+                <a:spcPts val="500"/>
+              </a:spcAft>
+              <a:buFont typeface="Arial"/>
+              <a:buChar char="•"/>
+            </a:pPr>
+            <a:r>
+              <a:rPr sz="1500" b="0">
+                <a:solidFill>
+                  <a:srgbClr val="374151"/>
+                </a:solidFill>
+                <a:latin typeface="Pretendard"/>
+              </a:rPr>
+              <a:t>accuracy · macro F1-score · loss curve · confusion matrix</a:t>
             </a:r>
           </a:p>
         </p:txBody>
@@ -5228,20 +6045,20 @@
           <a:noFill/>
         </p:spPr>
         <p:txBody>
-          <a:bodyPr wrap="square" lIns="0" rIns="0" tIns="0" bIns="0" anchor="t">
+          <a:bodyPr wrap="square" lIns="0" tIns="0" rIns="0" bIns="0" anchor="t">
             <a:spAutoFit/>
           </a:bodyPr>
           <a:lstStyle/>
           <a:p>
             <a:pPr algn="r"/>
             <a:r>
-              <a:rPr b="0" sz="950">
+              <a:rPr sz="950" b="0">
                 <a:solidFill>
                   <a:srgbClr val="AAB2BD"/>
                 </a:solidFill>
                 <a:latin typeface="Pretendard"/>
               </a:rPr>
-              <a:t>4 / 10</a:t>
+              <a:t>5 / 10</a:t>
             </a:r>
           </a:p>
         </p:txBody>
@@ -5254,8 +6071,8 @@
 </p:sld>
 </file>
 
-<file path=ppt/slides/slide5.xml><?xml version="1.0" encoding="utf-8"?>
-<p:sld xmlns:a="http://schemas.openxmlformats.org/drawingml/2006/main" xmlns:p="http://schemas.openxmlformats.org/presentationml/2006/main" xmlns:r="http://schemas.openxmlformats.org/officeDocument/2006/relationships">
+<file path=ppt/slides/slide6.xml><?xml version="1.0" encoding="utf-8"?>
+<p:sld xmlns:a="http://schemas.openxmlformats.org/drawingml/2006/main" xmlns:r="http://schemas.openxmlformats.org/officeDocument/2006/relationships" xmlns:p="http://schemas.openxmlformats.org/presentationml/2006/main">
   <p:cSld>
     <p:spTree>
       <p:nvGrpSpPr>
@@ -5263,7 +6080,14 @@
         <p:cNvGrpSpPr/>
         <p:nvPr/>
       </p:nvGrpSpPr>
-      <p:grpSpPr/>
+      <p:grpSpPr>
+        <a:xfrm>
+          <a:off x="0" y="0"/>
+          <a:ext cx="0" cy="0"/>
+          <a:chOff x="0" y="0"/>
+          <a:chExt cx="0" cy="0"/>
+        </a:xfrm>
+      </p:grpSpPr>
       <p:sp>
         <p:nvSpPr>
           <p:cNvPr id="2" name="TextBox 1"/>
@@ -5281,73 +6105,37 @@
           <a:noFill/>
         </p:spPr>
         <p:txBody>
-          <a:bodyPr wrap="square" lIns="0" rIns="0" tIns="0" bIns="0" anchor="t">
+          <a:bodyPr wrap="square" lIns="0" tIns="0" rIns="0" bIns="0" anchor="t">
             <a:spAutoFit/>
           </a:bodyPr>
           <a:lstStyle/>
           <a:p>
             <a:r>
-              <a:rPr b="0" sz="1250">
+              <a:rPr sz="1250" b="0">
                 <a:solidFill>
                   <a:srgbClr val="BFC6D0"/>
                 </a:solidFill>
                 <a:latin typeface="Pretendard"/>
               </a:rPr>
-              <a:t>배경</a:t>
-            </a:r>
-            <a:r>
-              <a:rPr b="0" sz="1250">
+              <a:t>배경     방법     </a:t>
+            </a:r>
+            <a:r>
+              <a:rPr sz="1250" b="1">
+                <a:solidFill>
+                  <a:srgbClr val="1D4ED8"/>
+                </a:solidFill>
+                <a:latin typeface="Pretendard"/>
+              </a:rPr>
+              <a:t>결과</a:t>
+            </a:r>
+            <a:r>
+              <a:rPr sz="1250" b="0">
                 <a:solidFill>
                   <a:srgbClr val="BFC6D0"/>
                 </a:solidFill>
                 <a:latin typeface="Pretendard"/>
               </a:rPr>
-              <a:t>     </a:t>
-            </a:r>
-            <a:r>
-              <a:rPr b="1" sz="1250">
-                <a:solidFill>
-                  <a:srgbClr val="1D4ED8"/>
-                </a:solidFill>
-                <a:latin typeface="Pretendard"/>
-              </a:rPr>
-              <a:t>방법</a:t>
-            </a:r>
-            <a:r>
-              <a:rPr b="0" sz="1250">
-                <a:solidFill>
-                  <a:srgbClr val="BFC6D0"/>
-                </a:solidFill>
-                <a:latin typeface="Pretendard"/>
-              </a:rPr>
-              <a:t>     </a:t>
-            </a:r>
-            <a:r>
-              <a:rPr b="0" sz="1250">
-                <a:solidFill>
-                  <a:srgbClr val="BFC6D0"/>
-                </a:solidFill>
-                <a:latin typeface="Pretendard"/>
-              </a:rPr>
-              <a:t>결과</a:t>
-            </a:r>
-            <a:r>
-              <a:rPr b="0" sz="1250">
-                <a:solidFill>
-                  <a:srgbClr val="BFC6D0"/>
-                </a:solidFill>
-                <a:latin typeface="Pretendard"/>
-              </a:rPr>
-              <a:t>     </a:t>
-            </a:r>
-            <a:r>
-              <a:rPr b="0" sz="1250">
-                <a:solidFill>
-                  <a:srgbClr val="BFC6D0"/>
-                </a:solidFill>
-                <a:latin typeface="Pretendard"/>
-              </a:rPr>
-              <a:t>결론</a:t>
+              <a:t>     결론</a:t>
             </a:r>
           </a:p>
         </p:txBody>
@@ -5369,7 +6157,7 @@
           <a:noFill/>
         </p:spPr>
         <p:txBody>
-          <a:bodyPr wrap="square" lIns="0" rIns="0" tIns="0" bIns="0" anchor="t">
+          <a:bodyPr wrap="square" lIns="0" tIns="0" rIns="0" bIns="0" anchor="t">
             <a:spAutoFit/>
           </a:bodyPr>
           <a:lstStyle/>
@@ -5380,465 +6168,34 @@
               </a:lnSpc>
             </a:pPr>
             <a:r>
-              <a:rPr b="1" sz="2100">
+              <a:rPr sz="2100" b="1">
                 <a:solidFill>
                   <a:srgbClr val="111827"/>
                 </a:solidFill>
                 <a:latin typeface="Pretendard"/>
               </a:rPr>
-              <a:t>유일한 변수 = </a:t>
-            </a:r>
-            <a:r>
-              <a:rPr b="1" sz="2100">
+              <a:t>Transformer </a:t>
+            </a:r>
+            <a:r>
+              <a:rPr sz="2100" b="1">
                 <a:solidFill>
                   <a:srgbClr val="1D4ED8"/>
                 </a:solidFill>
                 <a:latin typeface="Pretendard"/>
               </a:rPr>
-              <a:t>encoder 구조</a:t>
-            </a:r>
-            <a:r>
-              <a:rPr b="1" sz="2100">
+              <a:t>0.910</a:t>
+            </a:r>
+            <a:r>
+              <a:rPr sz="2100" b="1">
                 <a:solidFill>
                   <a:srgbClr val="111827"/>
                 </a:solidFill>
                 <a:latin typeface="Pretendard"/>
               </a:rPr>
-              <a:t> (나머지 전부 고정)</a:t>
-            </a:r>
-          </a:p>
-        </p:txBody>
-      </p:sp>
-      <p:sp>
-        <p:nvSpPr>
-          <p:cNvPr id="4" name="TextBox 3"/>
-          <p:cNvSpPr txBox="1"/>
-          <p:nvPr/>
-        </p:nvSpPr>
-        <p:spPr>
-          <a:xfrm>
-            <a:off x="457200" y="1417320"/>
-            <a:ext cx="11277295" cy="4754880"/>
-          </a:xfrm>
-          <a:prstGeom prst="rect">
-            <a:avLst/>
-          </a:prstGeom>
-          <a:noFill/>
-        </p:spPr>
-        <p:txBody>
-          <a:bodyPr wrap="square" lIns="0" rIns="0" tIns="0" bIns="0" anchor="t">
-            <a:spAutoFit/>
-          </a:bodyPr>
-          <a:lstStyle/>
-          <a:p>
-            <a:pPr>
-              <a:spcBef>
-                <a:spcPts val="0"/>
-              </a:spcBef>
-              <a:spcAft>
-                <a:spcPts val="700"/>
-              </a:spcAft>
-            </a:pPr>
-            <a:r>
-              <a:rPr b="1" sz="1650">
-                <a:solidFill>
-                  <a:srgbClr val="1D4ED8"/>
-                </a:solidFill>
-                <a:latin typeface="Pretendard"/>
-              </a:rPr>
-              <a:t>고정 (fair comparison)</a:t>
-            </a:r>
-          </a:p>
-          <a:p>
-            <a:pPr marL="274320" indent="-274320">
-              <a:lnSpc>
-                <a:spcPct val="125000"/>
-              </a:lnSpc>
-              <a:spcAft>
-                <a:spcPts val="500"/>
-              </a:spcAft>
-              <a:buFont typeface="Arial"/>
-              <a:buChar char="•"/>
-            </a:pPr>
-            <a:r>
-              <a:rPr b="0" sz="1500">
-                <a:solidFill>
-                  <a:srgbClr val="374151"/>
-                </a:solidFill>
-                <a:latin typeface="Pretendard"/>
-              </a:rPr>
-              <a:t>split · tokenizer · vocabulary · max length · pooling</a:t>
-            </a:r>
-          </a:p>
-          <a:p>
-            <a:pPr marL="274320" indent="-274320">
-              <a:lnSpc>
-                <a:spcPct val="125000"/>
-              </a:lnSpc>
-              <a:spcAft>
-                <a:spcPts val="500"/>
-              </a:spcAft>
-              <a:buFont typeface="Arial"/>
-              <a:buChar char="•"/>
-            </a:pPr>
-            <a:r>
-              <a:rPr b="0" sz="1500">
-                <a:solidFill>
-                  <a:srgbClr val="374151"/>
-                </a:solidFill>
-                <a:latin typeface="Pretendard"/>
-              </a:rPr>
-              <a:t>optimizer · learning rate · batch size · epoch · seed</a:t>
-            </a:r>
-          </a:p>
-          <a:p>
-            <a:pPr>
-              <a:spcBef>
-                <a:spcPts val="1400"/>
-              </a:spcBef>
-              <a:spcAft>
-                <a:spcPts val="700"/>
-              </a:spcAft>
-            </a:pPr>
-            <a:r>
-              <a:rPr b="1" sz="1650">
-                <a:solidFill>
-                  <a:srgbClr val="1D4ED8"/>
-                </a:solidFill>
-                <a:latin typeface="Pretendard"/>
-              </a:rPr>
-              <a:t>학습</a:t>
-            </a:r>
-          </a:p>
-          <a:p>
-            <a:pPr marL="274320" indent="-274320">
-              <a:lnSpc>
-                <a:spcPct val="125000"/>
-              </a:lnSpc>
-              <a:spcAft>
-                <a:spcPts val="500"/>
-              </a:spcAft>
-              <a:buFont typeface="Arial"/>
-              <a:buChar char="•"/>
-            </a:pPr>
-            <a:r>
-              <a:rPr b="0" sz="1500">
-                <a:solidFill>
-                  <a:srgbClr val="374151"/>
-                </a:solidFill>
-                <a:latin typeface="Pretendard"/>
-              </a:rPr>
-              <a:t>Adam, learning rate 0.001, batch 64, 최대 8 epochs, dropout 0.1, seed 42</a:t>
-            </a:r>
-          </a:p>
-          <a:p>
-            <a:pPr marL="274320" indent="-274320">
-              <a:lnSpc>
-                <a:spcPct val="125000"/>
-              </a:lnSpc>
-              <a:spcAft>
-                <a:spcPts val="500"/>
-              </a:spcAft>
-              <a:buFont typeface="Arial"/>
-              <a:buChar char="•"/>
-            </a:pPr>
-            <a:r>
-              <a:rPr b="0" sz="1500">
-                <a:solidFill>
-                  <a:srgbClr val="374151"/>
-                </a:solidFill>
-                <a:latin typeface="Pretendard"/>
-              </a:rPr>
-              <a:t>model selection은 </a:t>
-            </a:r>
-            <a:r>
-              <a:rPr b="1" sz="1500">
-                <a:solidFill>
-                  <a:srgbClr val="111827"/>
-                </a:solidFill>
-                <a:latin typeface="Pretendard"/>
-              </a:rPr>
-              <a:t>validation</a:t>
-            </a:r>
-            <a:r>
-              <a:rPr b="0" sz="1500">
-                <a:solidFill>
-                  <a:srgbClr val="374151"/>
-                </a:solidFill>
-                <a:latin typeface="Pretendard"/>
-              </a:rPr>
-              <a:t>, test는 1회</a:t>
-            </a:r>
-          </a:p>
-          <a:p>
-            <a:pPr>
-              <a:spcBef>
-                <a:spcPts val="1400"/>
-              </a:spcBef>
-              <a:spcAft>
-                <a:spcPts val="700"/>
-              </a:spcAft>
-            </a:pPr>
-            <a:r>
-              <a:rPr b="1" sz="1650">
-                <a:solidFill>
-                  <a:srgbClr val="1D4ED8"/>
-                </a:solidFill>
-                <a:latin typeface="Pretendard"/>
-              </a:rPr>
-              <a:t>Ablation · 지표</a:t>
-            </a:r>
-          </a:p>
-          <a:p>
-            <a:pPr marL="274320" indent="-274320">
-              <a:lnSpc>
-                <a:spcPct val="125000"/>
-              </a:lnSpc>
-              <a:spcAft>
-                <a:spcPts val="500"/>
-              </a:spcAft>
-              <a:buFont typeface="Arial"/>
-              <a:buChar char="•"/>
-            </a:pPr>
-            <a:r>
-              <a:rPr b="1" sz="1500">
-                <a:solidFill>
-                  <a:srgbClr val="111827"/>
-                </a:solidFill>
-                <a:latin typeface="Pretendard"/>
-              </a:rPr>
-              <a:t>training set 5 / 25 / 50 / 100%</a:t>
-            </a:r>
-            <a:r>
-              <a:rPr b="0" sz="1500">
-                <a:solidFill>
-                  <a:srgbClr val="374151"/>
-                </a:solidFill>
-                <a:latin typeface="Pretendard"/>
-              </a:rPr>
-              <a:t> (vocabulary 고정, stratified, val·test 전체)</a:t>
-            </a:r>
-          </a:p>
-          <a:p>
-            <a:pPr marL="274320" indent="-274320">
-              <a:lnSpc>
-                <a:spcPct val="125000"/>
-              </a:lnSpc>
-              <a:spcAft>
-                <a:spcPts val="500"/>
-              </a:spcAft>
-              <a:buFont typeface="Arial"/>
-              <a:buChar char="•"/>
-            </a:pPr>
-            <a:r>
-              <a:rPr b="0" sz="1500">
-                <a:solidFill>
-                  <a:srgbClr val="374151"/>
-                </a:solidFill>
-                <a:latin typeface="Pretendard"/>
-              </a:rPr>
-              <a:t>accuracy · macro F1-score · loss curve · confusion matrix</a:t>
-            </a:r>
-          </a:p>
-        </p:txBody>
-      </p:sp>
-      <p:sp>
-        <p:nvSpPr>
-          <p:cNvPr id="5" name="TextBox 4"/>
-          <p:cNvSpPr txBox="1"/>
-          <p:nvPr/>
-        </p:nvSpPr>
-        <p:spPr>
-          <a:xfrm>
-            <a:off x="10881360" y="6510528"/>
-            <a:ext cx="1005840" cy="237744"/>
-          </a:xfrm>
-          <a:prstGeom prst="rect">
-            <a:avLst/>
-          </a:prstGeom>
-          <a:noFill/>
-        </p:spPr>
-        <p:txBody>
-          <a:bodyPr wrap="square" lIns="0" rIns="0" tIns="0" bIns="0" anchor="t">
-            <a:spAutoFit/>
-          </a:bodyPr>
-          <a:lstStyle/>
-          <a:p>
-            <a:pPr algn="r"/>
-            <a:r>
-              <a:rPr b="0" sz="950">
-                <a:solidFill>
-                  <a:srgbClr val="AAB2BD"/>
-                </a:solidFill>
-                <a:latin typeface="Pretendard"/>
-              </a:rPr>
-              <a:t>5 / 10</a:t>
-            </a:r>
-          </a:p>
-        </p:txBody>
-      </p:sp>
-    </p:spTree>
-  </p:cSld>
-  <p:clrMapOvr>
-    <a:masterClrMapping/>
-  </p:clrMapOvr>
-</p:sld>
-</file>
-
-<file path=ppt/slides/slide6.xml><?xml version="1.0" encoding="utf-8"?>
-<p:sld xmlns:a="http://schemas.openxmlformats.org/drawingml/2006/main" xmlns:p="http://schemas.openxmlformats.org/presentationml/2006/main" xmlns:r="http://schemas.openxmlformats.org/officeDocument/2006/relationships">
-  <p:cSld>
-    <p:spTree>
-      <p:nvGrpSpPr>
-        <p:cNvPr id="1" name=""/>
-        <p:cNvGrpSpPr/>
-        <p:nvPr/>
-      </p:nvGrpSpPr>
-      <p:grpSpPr/>
-      <p:sp>
-        <p:nvSpPr>
-          <p:cNvPr id="2" name="TextBox 1"/>
-          <p:cNvSpPr txBox="1"/>
-          <p:nvPr/>
-        </p:nvSpPr>
-        <p:spPr>
-          <a:xfrm>
-            <a:off x="457200" y="329184"/>
-            <a:ext cx="8229600" cy="274320"/>
-          </a:xfrm>
-          <a:prstGeom prst="rect">
-            <a:avLst/>
-          </a:prstGeom>
-          <a:noFill/>
-        </p:spPr>
-        <p:txBody>
-          <a:bodyPr wrap="square" lIns="0" rIns="0" tIns="0" bIns="0" anchor="t">
-            <a:spAutoFit/>
-          </a:bodyPr>
-          <a:lstStyle/>
-          <a:p>
-            <a:r>
-              <a:rPr b="0" sz="1250">
-                <a:solidFill>
-                  <a:srgbClr val="BFC6D0"/>
-                </a:solidFill>
-                <a:latin typeface="Pretendard"/>
-              </a:rPr>
-              <a:t>배경</a:t>
-            </a:r>
-            <a:r>
-              <a:rPr b="0" sz="1250">
-                <a:solidFill>
-                  <a:srgbClr val="BFC6D0"/>
-                </a:solidFill>
-                <a:latin typeface="Pretendard"/>
-              </a:rPr>
-              <a:t>     </a:t>
-            </a:r>
-            <a:r>
-              <a:rPr b="0" sz="1250">
-                <a:solidFill>
-                  <a:srgbClr val="BFC6D0"/>
-                </a:solidFill>
-                <a:latin typeface="Pretendard"/>
-              </a:rPr>
-              <a:t>방법</a:t>
-            </a:r>
-            <a:r>
-              <a:rPr b="0" sz="1250">
-                <a:solidFill>
-                  <a:srgbClr val="BFC6D0"/>
-                </a:solidFill>
-                <a:latin typeface="Pretendard"/>
-              </a:rPr>
-              <a:t>     </a:t>
-            </a:r>
-            <a:r>
-              <a:rPr b="1" sz="1250">
-                <a:solidFill>
-                  <a:srgbClr val="1D4ED8"/>
-                </a:solidFill>
-                <a:latin typeface="Pretendard"/>
-              </a:rPr>
-              <a:t>결과</a:t>
-            </a:r>
-            <a:r>
-              <a:rPr b="0" sz="1250">
-                <a:solidFill>
-                  <a:srgbClr val="BFC6D0"/>
-                </a:solidFill>
-                <a:latin typeface="Pretendard"/>
-              </a:rPr>
-              <a:t>     </a:t>
-            </a:r>
-            <a:r>
-              <a:rPr b="0" sz="1250">
-                <a:solidFill>
-                  <a:srgbClr val="BFC6D0"/>
-                </a:solidFill>
-                <a:latin typeface="Pretendard"/>
-              </a:rPr>
-              <a:t>결론</a:t>
-            </a:r>
-          </a:p>
-        </p:txBody>
-      </p:sp>
-      <p:sp>
-        <p:nvSpPr>
-          <p:cNvPr id="3" name="TextBox 2"/>
-          <p:cNvSpPr txBox="1"/>
-          <p:nvPr/>
-        </p:nvSpPr>
-        <p:spPr>
-          <a:xfrm>
-            <a:off x="457200" y="676656"/>
-            <a:ext cx="11277295" cy="502920"/>
-          </a:xfrm>
-          <a:prstGeom prst="rect">
-            <a:avLst/>
-          </a:prstGeom>
-          <a:noFill/>
-        </p:spPr>
-        <p:txBody>
-          <a:bodyPr wrap="square" lIns="0" rIns="0" tIns="0" bIns="0" anchor="t">
-            <a:spAutoFit/>
-          </a:bodyPr>
-          <a:lstStyle/>
-          <a:p>
-            <a:pPr>
-              <a:lnSpc>
-                <a:spcPct val="100000"/>
-              </a:lnSpc>
-            </a:pPr>
-            <a:r>
-              <a:rPr b="1" sz="2100">
-                <a:solidFill>
-                  <a:srgbClr val="111827"/>
-                </a:solidFill>
-                <a:latin typeface="Pretendard"/>
-              </a:rPr>
-              <a:t>Transformer </a:t>
-            </a:r>
-            <a:r>
-              <a:rPr b="1" sz="2100">
-                <a:solidFill>
-                  <a:srgbClr val="1D4ED8"/>
-                </a:solidFill>
-                <a:latin typeface="Pretendard"/>
-              </a:rPr>
-              <a:t>0.910</a:t>
-            </a:r>
-            <a:r>
-              <a:rPr b="1" sz="2100">
-                <a:solidFill>
-                  <a:srgbClr val="111827"/>
-                </a:solidFill>
-                <a:latin typeface="Pretendard"/>
-              </a:rPr>
               <a:t> vs LSTM </a:t>
             </a:r>
             <a:r>
-              <a:rPr b="1" sz="2100">
+              <a:rPr sz="2100" b="1">
                 <a:solidFill>
                   <a:srgbClr val="6B7280"/>
                 </a:solidFill>
@@ -5847,7 +6204,7 @@
               <a:t>0.833</a:t>
             </a:r>
             <a:r>
-              <a:rPr b="1" sz="2100">
+              <a:rPr sz="2100" b="1">
                 <a:solidFill>
                   <a:srgbClr val="111827"/>
                 </a:solidFill>
@@ -5899,7 +6256,7 @@
           <a:noFill/>
         </p:spPr>
         <p:txBody>
-          <a:bodyPr wrap="square" lIns="0" rIns="0" tIns="0" bIns="0" anchor="t">
+          <a:bodyPr wrap="square" lIns="0" tIns="0" rIns="0" bIns="0" anchor="t">
             <a:spAutoFit/>
           </a:bodyPr>
           <a:lstStyle/>
@@ -5915,7 +6272,7 @@
               <a:buChar char="•"/>
             </a:pPr>
             <a:r>
-              <a:rPr b="1" sz="1400">
+              <a:rPr sz="1400" b="1">
                 <a:solidFill>
                   <a:srgbClr val="1D4ED8"/>
                 </a:solidFill>
@@ -5924,7 +6281,7 @@
               <a:t>Transformer</a:t>
             </a:r>
             <a:r>
-              <a:rPr b="0" sz="1400">
+              <a:rPr sz="1400" b="0">
                 <a:solidFill>
                   <a:srgbClr val="374151"/>
                 </a:solidFill>
@@ -5933,7 +6290,7 @@
               <a:t>  test accuracy </a:t>
             </a:r>
             <a:r>
-              <a:rPr b="1" sz="1400">
+              <a:rPr sz="1400" b="1">
                 <a:solidFill>
                   <a:srgbClr val="1D4ED8"/>
                 </a:solidFill>
@@ -5942,7 +6299,7 @@
               <a:t>0.910</a:t>
             </a:r>
             <a:r>
-              <a:rPr b="0" sz="1400">
+              <a:rPr sz="1400" b="0">
                 <a:solidFill>
                   <a:srgbClr val="374151"/>
                 </a:solidFill>
@@ -5963,7 +6320,7 @@
               <a:buChar char="•"/>
             </a:pPr>
             <a:r>
-              <a:rPr b="1" sz="1400">
+              <a:rPr sz="1400" b="1">
                 <a:solidFill>
                   <a:srgbClr val="6B7280"/>
                 </a:solidFill>
@@ -5972,7 +6329,7 @@
               <a:t>LSTM</a:t>
             </a:r>
             <a:r>
-              <a:rPr b="0" sz="1400">
+              <a:rPr sz="1400" b="0">
                 <a:solidFill>
                   <a:srgbClr val="374151"/>
                 </a:solidFill>
@@ -5981,7 +6338,7 @@
               <a:t>  0.833 · macro F1 0.835, </a:t>
             </a:r>
             <a:r>
-              <a:rPr b="1" sz="1400">
+              <a:rPr sz="1400" b="1">
                 <a:solidFill>
                   <a:srgbClr val="C0392B"/>
                 </a:solidFill>
@@ -5990,7 +6347,7 @@
               <a:t>val loss 폭증</a:t>
             </a:r>
             <a:r>
-              <a:rPr b="0" sz="1400">
+              <a:rPr sz="1400" b="0">
                 <a:solidFill>
                   <a:srgbClr val="374151"/>
                 </a:solidFill>
@@ -6018,14 +6375,14 @@
           <a:noFill/>
         </p:spPr>
         <p:txBody>
-          <a:bodyPr wrap="square" lIns="0" rIns="0" tIns="0" bIns="0" anchor="t">
+          <a:bodyPr wrap="square" lIns="0" tIns="0" rIns="0" bIns="0" anchor="t">
             <a:spAutoFit/>
           </a:bodyPr>
           <a:lstStyle/>
           <a:p>
             <a:pPr algn="r"/>
             <a:r>
-              <a:rPr b="0" sz="950">
+              <a:rPr sz="950" b="0">
                 <a:solidFill>
                   <a:srgbClr val="AAB2BD"/>
                 </a:solidFill>
@@ -6045,7 +6402,7 @@
 </file>
 
 <file path=ppt/slides/slide7.xml><?xml version="1.0" encoding="utf-8"?>
-<p:sld xmlns:a="http://schemas.openxmlformats.org/drawingml/2006/main" xmlns:p="http://schemas.openxmlformats.org/presentationml/2006/main" xmlns:r="http://schemas.openxmlformats.org/officeDocument/2006/relationships">
+<p:sld xmlns:a="http://schemas.openxmlformats.org/drawingml/2006/main" xmlns:r="http://schemas.openxmlformats.org/officeDocument/2006/relationships" xmlns:p="http://schemas.openxmlformats.org/presentationml/2006/main">
   <p:cSld>
     <p:spTree>
       <p:nvGrpSpPr>
@@ -6053,7 +6410,14 @@
         <p:cNvGrpSpPr/>
         <p:nvPr/>
       </p:nvGrpSpPr>
-      <p:grpSpPr/>
+      <p:grpSpPr>
+        <a:xfrm>
+          <a:off x="0" y="0"/>
+          <a:ext cx="0" cy="0"/>
+          <a:chOff x="0" y="0"/>
+          <a:chExt cx="0" cy="0"/>
+        </a:xfrm>
+      </p:grpSpPr>
       <p:sp>
         <p:nvSpPr>
           <p:cNvPr id="2" name="TextBox 1"/>
@@ -6071,73 +6435,37 @@
           <a:noFill/>
         </p:spPr>
         <p:txBody>
-          <a:bodyPr wrap="square" lIns="0" rIns="0" tIns="0" bIns="0" anchor="t">
+          <a:bodyPr wrap="square" lIns="0" tIns="0" rIns="0" bIns="0" anchor="t">
             <a:spAutoFit/>
           </a:bodyPr>
           <a:lstStyle/>
           <a:p>
             <a:r>
-              <a:rPr b="0" sz="1250">
+              <a:rPr sz="1250" b="0">
                 <a:solidFill>
                   <a:srgbClr val="BFC6D0"/>
                 </a:solidFill>
                 <a:latin typeface="Pretendard"/>
               </a:rPr>
-              <a:t>배경</a:t>
-            </a:r>
-            <a:r>
-              <a:rPr b="0" sz="1250">
+              <a:t>배경     방법     </a:t>
+            </a:r>
+            <a:r>
+              <a:rPr sz="1250" b="1">
+                <a:solidFill>
+                  <a:srgbClr val="1D4ED8"/>
+                </a:solidFill>
+                <a:latin typeface="Pretendard"/>
+              </a:rPr>
+              <a:t>결과</a:t>
+            </a:r>
+            <a:r>
+              <a:rPr sz="1250" b="0">
                 <a:solidFill>
                   <a:srgbClr val="BFC6D0"/>
                 </a:solidFill>
                 <a:latin typeface="Pretendard"/>
               </a:rPr>
-              <a:t>     </a:t>
-            </a:r>
-            <a:r>
-              <a:rPr b="0" sz="1250">
-                <a:solidFill>
-                  <a:srgbClr val="BFC6D0"/>
-                </a:solidFill>
-                <a:latin typeface="Pretendard"/>
-              </a:rPr>
-              <a:t>방법</a:t>
-            </a:r>
-            <a:r>
-              <a:rPr b="0" sz="1250">
-                <a:solidFill>
-                  <a:srgbClr val="BFC6D0"/>
-                </a:solidFill>
-                <a:latin typeface="Pretendard"/>
-              </a:rPr>
-              <a:t>     </a:t>
-            </a:r>
-            <a:r>
-              <a:rPr b="1" sz="1250">
-                <a:solidFill>
-                  <a:srgbClr val="1D4ED8"/>
-                </a:solidFill>
-                <a:latin typeface="Pretendard"/>
-              </a:rPr>
-              <a:t>결과</a:t>
-            </a:r>
-            <a:r>
-              <a:rPr b="0" sz="1250">
-                <a:solidFill>
-                  <a:srgbClr val="BFC6D0"/>
-                </a:solidFill>
-                <a:latin typeface="Pretendard"/>
-              </a:rPr>
-              <a:t>     </a:t>
-            </a:r>
-            <a:r>
-              <a:rPr b="0" sz="1250">
-                <a:solidFill>
-                  <a:srgbClr val="BFC6D0"/>
-                </a:solidFill>
-                <a:latin typeface="Pretendard"/>
-              </a:rPr>
-              <a:t>결론</a:t>
+              <a:t>     결론</a:t>
             </a:r>
           </a:p>
         </p:txBody>
@@ -6159,7 +6487,7 @@
           <a:noFill/>
         </p:spPr>
         <p:txBody>
-          <a:bodyPr wrap="square" lIns="0" rIns="0" tIns="0" bIns="0" anchor="t">
+          <a:bodyPr wrap="square" lIns="0" tIns="0" rIns="0" bIns="0" anchor="t">
             <a:spAutoFit/>
           </a:bodyPr>
           <a:lstStyle/>
@@ -6170,7 +6498,7 @@
               </a:lnSpc>
             </a:pPr>
             <a:r>
-              <a:rPr b="1" sz="2100">
+              <a:rPr sz="2100" b="1">
                 <a:solidFill>
                   <a:srgbClr val="111827"/>
                 </a:solidFill>
@@ -6179,7 +6507,7 @@
               <a:t>두 모델 공통 </a:t>
             </a:r>
             <a:r>
-              <a:rPr b="1" sz="2100">
+              <a:rPr sz="2100" b="1">
                 <a:solidFill>
                   <a:srgbClr val="1D4ED8"/>
                 </a:solidFill>
@@ -6231,7 +6559,7 @@
           <a:noFill/>
         </p:spPr>
         <p:txBody>
-          <a:bodyPr wrap="square" lIns="0" rIns="0" tIns="0" bIns="0" anchor="t">
+          <a:bodyPr wrap="square" lIns="0" tIns="0" rIns="0" bIns="0" anchor="t">
             <a:spAutoFit/>
           </a:bodyPr>
           <a:lstStyle/>
@@ -6247,7 +6575,7 @@
               <a:buChar char="•"/>
             </a:pPr>
             <a:r>
-              <a:rPr b="1" sz="1400">
+              <a:rPr sz="1400" b="1">
                 <a:solidFill>
                   <a:srgbClr val="111827"/>
                 </a:solidFill>
@@ -6256,7 +6584,7 @@
               <a:t>공통 오답 428건</a:t>
             </a:r>
             <a:r>
-              <a:rPr b="0" sz="1400">
+              <a:rPr sz="1400" b="0">
                 <a:solidFill>
                   <a:srgbClr val="374151"/>
                 </a:solidFill>
@@ -6277,7 +6605,7 @@
               <a:buChar char="•"/>
             </a:pPr>
             <a:r>
-              <a:rPr b="1" sz="1400">
+              <a:rPr sz="1400" b="1">
                 <a:solidFill>
                   <a:srgbClr val="111827"/>
                 </a:solidFill>
@@ -6286,7 +6614,7 @@
               <a:t>LSTM 단독 841건</a:t>
             </a:r>
             <a:r>
-              <a:rPr b="0" sz="1400">
+              <a:rPr sz="1400" b="0">
                 <a:solidFill>
                   <a:srgbClr val="374151"/>
                 </a:solidFill>
@@ -6295,7 +6623,7 @@
               <a:t>  전 class에 분산, Transformer 단독(259건)의 </a:t>
             </a:r>
             <a:r>
-              <a:rPr b="1" sz="1400">
+              <a:rPr sz="1400" b="1">
                 <a:solidFill>
                   <a:srgbClr val="111827"/>
                 </a:solidFill>
@@ -6323,14 +6651,14 @@
           <a:noFill/>
         </p:spPr>
         <p:txBody>
-          <a:bodyPr wrap="square" lIns="0" rIns="0" tIns="0" bIns="0" anchor="t">
+          <a:bodyPr wrap="square" lIns="0" tIns="0" rIns="0" bIns="0" anchor="t">
             <a:spAutoFit/>
           </a:bodyPr>
           <a:lstStyle/>
           <a:p>
             <a:pPr algn="r"/>
             <a:r>
-              <a:rPr b="0" sz="950">
+              <a:rPr sz="950" b="0">
                 <a:solidFill>
                   <a:srgbClr val="AAB2BD"/>
                 </a:solidFill>
@@ -6350,7 +6678,7 @@
 </file>
 
 <file path=ppt/slides/slide8.xml><?xml version="1.0" encoding="utf-8"?>
-<p:sld xmlns:a="http://schemas.openxmlformats.org/drawingml/2006/main" xmlns:p="http://schemas.openxmlformats.org/presentationml/2006/main" xmlns:r="http://schemas.openxmlformats.org/officeDocument/2006/relationships">
+<p:sld xmlns:a="http://schemas.openxmlformats.org/drawingml/2006/main" xmlns:r="http://schemas.openxmlformats.org/officeDocument/2006/relationships" xmlns:p="http://schemas.openxmlformats.org/presentationml/2006/main">
   <p:cSld>
     <p:spTree>
       <p:nvGrpSpPr>
@@ -6358,7 +6686,14 @@
         <p:cNvGrpSpPr/>
         <p:nvPr/>
       </p:nvGrpSpPr>
-      <p:grpSpPr/>
+      <p:grpSpPr>
+        <a:xfrm>
+          <a:off x="0" y="0"/>
+          <a:ext cx="0" cy="0"/>
+          <a:chOff x="0" y="0"/>
+          <a:chExt cx="0" cy="0"/>
+        </a:xfrm>
+      </p:grpSpPr>
       <p:sp>
         <p:nvSpPr>
           <p:cNvPr id="2" name="TextBox 1"/>
@@ -6376,73 +6711,37 @@
           <a:noFill/>
         </p:spPr>
         <p:txBody>
-          <a:bodyPr wrap="square" lIns="0" rIns="0" tIns="0" bIns="0" anchor="t">
+          <a:bodyPr wrap="square" lIns="0" tIns="0" rIns="0" bIns="0" anchor="t">
             <a:spAutoFit/>
           </a:bodyPr>
           <a:lstStyle/>
           <a:p>
             <a:r>
-              <a:rPr b="0" sz="1250">
+              <a:rPr sz="1250" b="0">
                 <a:solidFill>
                   <a:srgbClr val="BFC6D0"/>
                 </a:solidFill>
                 <a:latin typeface="Pretendard"/>
               </a:rPr>
-              <a:t>배경</a:t>
-            </a:r>
-            <a:r>
-              <a:rPr b="0" sz="1250">
+              <a:t>배경     방법     </a:t>
+            </a:r>
+            <a:r>
+              <a:rPr sz="1250" b="1">
+                <a:solidFill>
+                  <a:srgbClr val="1D4ED8"/>
+                </a:solidFill>
+                <a:latin typeface="Pretendard"/>
+              </a:rPr>
+              <a:t>결과</a:t>
+            </a:r>
+            <a:r>
+              <a:rPr sz="1250" b="0">
                 <a:solidFill>
                   <a:srgbClr val="BFC6D0"/>
                 </a:solidFill>
                 <a:latin typeface="Pretendard"/>
               </a:rPr>
-              <a:t>     </a:t>
-            </a:r>
-            <a:r>
-              <a:rPr b="0" sz="1250">
-                <a:solidFill>
-                  <a:srgbClr val="BFC6D0"/>
-                </a:solidFill>
-                <a:latin typeface="Pretendard"/>
-              </a:rPr>
-              <a:t>방법</a:t>
-            </a:r>
-            <a:r>
-              <a:rPr b="0" sz="1250">
-                <a:solidFill>
-                  <a:srgbClr val="BFC6D0"/>
-                </a:solidFill>
-                <a:latin typeface="Pretendard"/>
-              </a:rPr>
-              <a:t>     </a:t>
-            </a:r>
-            <a:r>
-              <a:rPr b="1" sz="1250">
-                <a:solidFill>
-                  <a:srgbClr val="1D4ED8"/>
-                </a:solidFill>
-                <a:latin typeface="Pretendard"/>
-              </a:rPr>
-              <a:t>결과</a:t>
-            </a:r>
-            <a:r>
-              <a:rPr b="0" sz="1250">
-                <a:solidFill>
-                  <a:srgbClr val="BFC6D0"/>
-                </a:solidFill>
-                <a:latin typeface="Pretendard"/>
-              </a:rPr>
-              <a:t>     </a:t>
-            </a:r>
-            <a:r>
-              <a:rPr b="0" sz="1250">
-                <a:solidFill>
-                  <a:srgbClr val="BFC6D0"/>
-                </a:solidFill>
-                <a:latin typeface="Pretendard"/>
-              </a:rPr>
-              <a:t>결론</a:t>
+              <a:t>     결론</a:t>
             </a:r>
           </a:p>
         </p:txBody>
@@ -6464,7 +6763,7 @@
           <a:noFill/>
         </p:spPr>
         <p:txBody>
-          <a:bodyPr wrap="square" lIns="0" rIns="0" tIns="0" bIns="0" anchor="t">
+          <a:bodyPr wrap="square" lIns="0" tIns="0" rIns="0" bIns="0" anchor="t">
             <a:spAutoFit/>
           </a:bodyPr>
           <a:lstStyle/>
@@ -6475,7 +6774,7 @@
               </a:lnSpc>
             </a:pPr>
             <a:r>
-              <a:rPr b="1" sz="2100">
+              <a:rPr sz="2100" b="1">
                 <a:solidFill>
                   <a:srgbClr val="111827"/>
                 </a:solidFill>
@@ -6484,16 +6783,16 @@
               <a:t>LSTM은 </a:t>
             </a:r>
             <a:r>
-              <a:rPr b="1" sz="2100">
+              <a:rPr sz="2100" b="1">
                 <a:solidFill>
                   <a:srgbClr val="6B7280"/>
                 </a:solidFill>
                 <a:latin typeface="Pretendard"/>
               </a:rPr>
-              <a:t>25%에서 포화</a:t>
-            </a:r>
-            <a:r>
-              <a:rPr b="1" sz="2100">
+              <a:t>25%에서 saturation</a:t>
+            </a:r>
+            <a:r>
+              <a:rPr sz="2100" b="1">
                 <a:solidFill>
                   <a:srgbClr val="111827"/>
                 </a:solidFill>
@@ -6502,7 +6801,7 @@
               <a:t>, Transformer는 </a:t>
             </a:r>
             <a:r>
-              <a:rPr b="1" sz="2100">
+              <a:rPr sz="2100" b="1">
                 <a:solidFill>
                   <a:srgbClr val="1D4ED8"/>
                 </a:solidFill>
@@ -6546,7 +6845,7 @@
         <p:spPr>
           <a:xfrm>
             <a:off x="7223760" y="1600200"/>
-            <a:ext cx="4510735" cy="4389120"/>
+            <a:ext cx="4510735" cy="3307893"/>
           </a:xfrm>
           <a:prstGeom prst="rect">
             <a:avLst/>
@@ -6554,7 +6853,7 @@
           <a:noFill/>
         </p:spPr>
         <p:txBody>
-          <a:bodyPr wrap="square" lIns="0" rIns="0" tIns="0" bIns="0" anchor="t">
+          <a:bodyPr wrap="square" lIns="0" tIns="0" rIns="0" bIns="0" anchor="t">
             <a:spAutoFit/>
           </a:bodyPr>
           <a:lstStyle/>
@@ -6568,7 +6867,7 @@
               </a:spcAft>
             </a:pPr>
             <a:r>
-              <a:rPr b="1" sz="1550">
+              <a:rPr sz="1550" b="1" dirty="0">
                 <a:solidFill>
                   <a:srgbClr val="1D4ED8"/>
                 </a:solidFill>
@@ -6589,13 +6888,76 @@
               <a:buChar char="•"/>
             </a:pPr>
             <a:r>
-              <a:rPr b="1" sz="1400">
+              <a:rPr sz="1400" b="1" dirty="0" err="1">
                 <a:solidFill>
                   <a:srgbClr val="1D4ED8"/>
                 </a:solidFill>
                 <a:latin typeface="Pretendard"/>
               </a:rPr>
-              <a:t>데이터에 따라 단조 향상</a:t>
+              <a:t>데이터에</a:t>
+            </a:r>
+            <a:r>
+              <a:rPr sz="1400" b="1" dirty="0">
+                <a:solidFill>
+                  <a:srgbClr val="1D4ED8"/>
+                </a:solidFill>
+                <a:latin typeface="Pretendard"/>
+              </a:rPr>
+              <a:t> </a:t>
+            </a:r>
+            <a:r>
+              <a:rPr sz="1400" b="1" dirty="0" err="1">
+                <a:solidFill>
+                  <a:srgbClr val="1D4ED8"/>
+                </a:solidFill>
+                <a:latin typeface="Pretendard"/>
+              </a:rPr>
+              <a:t>따라</a:t>
+            </a:r>
+            <a:r>
+              <a:rPr sz="1400" b="1" dirty="0">
+                <a:solidFill>
+                  <a:srgbClr val="1D4ED8"/>
+                </a:solidFill>
+                <a:latin typeface="Pretendard"/>
+              </a:rPr>
+              <a:t> </a:t>
+            </a:r>
+            <a:r>
+              <a:rPr sz="1400" b="1" dirty="0" err="1">
+                <a:solidFill>
+                  <a:srgbClr val="1D4ED8"/>
+                </a:solidFill>
+                <a:latin typeface="Pretendard"/>
+              </a:rPr>
+              <a:t>단조</a:t>
+            </a:r>
+            <a:r>
+              <a:rPr sz="1400" b="1" dirty="0">
+                <a:solidFill>
+                  <a:srgbClr val="1D4ED8"/>
+                </a:solidFill>
+                <a:latin typeface="Pretendard"/>
+              </a:rPr>
+              <a:t> </a:t>
+            </a:r>
+            <a:r>
+              <a:rPr sz="1400" b="1" dirty="0" err="1">
+                <a:solidFill>
+                  <a:srgbClr val="1D4ED8"/>
+                </a:solidFill>
+                <a:latin typeface="Pretendard"/>
+              </a:rPr>
+              <a:t>증가</a:t>
+            </a:r>
+            <a:r>
+              <a:rPr sz="1400" b="1" dirty="0">
+                <a:solidFill>
+                  <a:srgbClr val="1D4ED8"/>
+                </a:solidFill>
+                <a:latin typeface="Pretendard"/>
+              </a:rPr>
+              <a:t> (scaling)</a:t>
             </a:r>
           </a:p>
           <a:p>
@@ -6610,14 +6972,74 @@
               <a:buChar char="•"/>
             </a:pPr>
             <a:r>
-              <a:rPr b="0" sz="1400">
-                <a:solidFill>
-                  <a:srgbClr val="374151"/>
-                </a:solidFill>
-                <a:latin typeface="Pretendard"/>
-              </a:rPr>
-              <a:t>scaling: 더 줄수록 더 좋아짐</a:t>
-            </a:r>
+              <a:rPr sz="1400" b="0" dirty="0" err="1">
+                <a:solidFill>
+                  <a:srgbClr val="374151"/>
+                </a:solidFill>
+                <a:latin typeface="Pretendard"/>
+              </a:rPr>
+              <a:t>더</a:t>
+            </a:r>
+            <a:r>
+              <a:rPr sz="1400" b="0" dirty="0">
+                <a:solidFill>
+                  <a:srgbClr val="374151"/>
+                </a:solidFill>
+                <a:latin typeface="Pretendard"/>
+              </a:rPr>
+              <a:t> </a:t>
+            </a:r>
+            <a:r>
+              <a:rPr sz="1400" b="0" dirty="0" err="1">
+                <a:solidFill>
+                  <a:srgbClr val="374151"/>
+                </a:solidFill>
+                <a:latin typeface="Pretendard"/>
+              </a:rPr>
+              <a:t>줄수록</a:t>
+            </a:r>
+            <a:r>
+              <a:rPr sz="1400" b="0" dirty="0">
+                <a:solidFill>
+                  <a:srgbClr val="374151"/>
+                </a:solidFill>
+                <a:latin typeface="Pretendard"/>
+              </a:rPr>
+              <a:t> </a:t>
+            </a:r>
+            <a:r>
+              <a:rPr sz="1400" b="0" dirty="0" err="1">
+                <a:solidFill>
+                  <a:srgbClr val="374151"/>
+                </a:solidFill>
+                <a:latin typeface="Pretendard"/>
+              </a:rPr>
+              <a:t>더</a:t>
+            </a:r>
+            <a:r>
+              <a:rPr sz="1400" b="0" dirty="0">
+                <a:solidFill>
+                  <a:srgbClr val="374151"/>
+                </a:solidFill>
+                <a:latin typeface="Pretendard"/>
+              </a:rPr>
+              <a:t> </a:t>
+            </a:r>
+            <a:r>
+              <a:rPr sz="1400" b="0" dirty="0" err="1">
+                <a:solidFill>
+                  <a:srgbClr val="374151"/>
+                </a:solidFill>
+                <a:latin typeface="Pretendard"/>
+              </a:rPr>
+              <a:t>좋아짐</a:t>
+            </a:r>
+            <a:endParaRPr sz="1400" b="0" dirty="0">
+              <a:solidFill>
+                <a:srgbClr val="374151"/>
+              </a:solidFill>
+              <a:latin typeface="Pretendard"/>
+            </a:endParaRPr>
           </a:p>
           <a:p>
             <a:pPr>
@@ -6629,7 +7051,7 @@
               </a:spcAft>
             </a:pPr>
             <a:r>
-              <a:rPr b="1" sz="1550">
+              <a:rPr sz="1550" b="1" dirty="0">
                 <a:solidFill>
                   <a:srgbClr val="1D4ED8"/>
                 </a:solidFill>
@@ -6650,13 +7072,49 @@
               <a:buChar char="•"/>
             </a:pPr>
             <a:r>
-              <a:rPr b="1" sz="1400">
-                <a:solidFill>
-                  <a:srgbClr val="111827"/>
-                </a:solidFill>
-                <a:latin typeface="Pretendard"/>
-              </a:rPr>
-              <a:t>25%에서 정점 후 정체</a:t>
+              <a:rPr sz="1400" b="1" dirty="0">
+                <a:solidFill>
+                  <a:srgbClr val="6B7280"/>
+                </a:solidFill>
+                <a:latin typeface="Pretendard"/>
+              </a:rPr>
+              <a:t>25%에서 </a:t>
+            </a:r>
+            <a:r>
+              <a:rPr sz="1400" b="1" dirty="0" err="1">
+                <a:solidFill>
+                  <a:srgbClr val="6B7280"/>
+                </a:solidFill>
+                <a:latin typeface="Pretendard"/>
+              </a:rPr>
+              <a:t>최고치</a:t>
+            </a:r>
+            <a:r>
+              <a:rPr sz="1400" b="1" dirty="0">
+                <a:solidFill>
+                  <a:srgbClr val="6B7280"/>
+                </a:solidFill>
+                <a:latin typeface="Pretendard"/>
+              </a:rPr>
+              <a:t> </a:t>
+            </a:r>
+            <a:r>
+              <a:rPr sz="1400" b="1" dirty="0" err="1">
+                <a:solidFill>
+                  <a:srgbClr val="6B7280"/>
+                </a:solidFill>
+                <a:latin typeface="Pretendard"/>
+              </a:rPr>
+              <a:t>후</a:t>
+            </a:r>
+            <a:r>
+              <a:rPr sz="1400" b="1" dirty="0">
+                <a:solidFill>
+                  <a:srgbClr val="6B7280"/>
+                </a:solidFill>
+                <a:latin typeface="Pretendard"/>
+              </a:rPr>
+              <a:t> saturation</a:t>
             </a:r>
           </a:p>
           <a:p>
@@ -6671,14 +7129,110 @@
               <a:buChar char="•"/>
             </a:pPr>
             <a:r>
-              <a:rPr b="0" sz="1400">
-                <a:solidFill>
-                  <a:srgbClr val="374151"/>
-                </a:solidFill>
-                <a:latin typeface="Pretendard"/>
-              </a:rPr>
-              <a:t>overfitting으로 추가 데이터를 못 씀</a:t>
-            </a:r>
+              <a:rPr sz="1400" b="0" dirty="0" err="1">
+                <a:solidFill>
+                  <a:srgbClr val="374151"/>
+                </a:solidFill>
+                <a:latin typeface="Pretendard"/>
+              </a:rPr>
+              <a:t>overfitting으로</a:t>
+            </a:r>
+            <a:r>
+              <a:rPr sz="1400" b="0" dirty="0">
+                <a:solidFill>
+                  <a:srgbClr val="374151"/>
+                </a:solidFill>
+                <a:latin typeface="Pretendard"/>
+              </a:rPr>
+              <a:t> </a:t>
+            </a:r>
+            <a:r>
+              <a:rPr sz="1400" b="0" dirty="0" err="1">
+                <a:solidFill>
+                  <a:srgbClr val="374151"/>
+                </a:solidFill>
+                <a:latin typeface="Pretendard"/>
+              </a:rPr>
+              <a:t>추가</a:t>
+            </a:r>
+            <a:r>
+              <a:rPr sz="1400" b="0" dirty="0">
+                <a:solidFill>
+                  <a:srgbClr val="374151"/>
+                </a:solidFill>
+                <a:latin typeface="Pretendard"/>
+              </a:rPr>
+              <a:t> </a:t>
+            </a:r>
+            <a:r>
+              <a:rPr sz="1400" b="0" dirty="0" err="1">
+                <a:solidFill>
+                  <a:srgbClr val="374151"/>
+                </a:solidFill>
+                <a:latin typeface="Pretendard"/>
+              </a:rPr>
+              <a:t>데이터를</a:t>
+            </a:r>
+            <a:r>
+              <a:rPr sz="1400" b="0" dirty="0">
+                <a:solidFill>
+                  <a:srgbClr val="374151"/>
+                </a:solidFill>
+                <a:latin typeface="Pretendard"/>
+              </a:rPr>
+              <a:t> </a:t>
+            </a:r>
+            <a:r>
+              <a:rPr sz="1400" b="0" dirty="0" err="1">
+                <a:solidFill>
+                  <a:srgbClr val="374151"/>
+                </a:solidFill>
+                <a:latin typeface="Pretendard"/>
+              </a:rPr>
+              <a:t>활용</a:t>
+            </a:r>
+            <a:r>
+              <a:rPr sz="1400" b="0" dirty="0">
+                <a:solidFill>
+                  <a:srgbClr val="374151"/>
+                </a:solidFill>
+                <a:latin typeface="Pretendard"/>
+              </a:rPr>
+              <a:t> </a:t>
+            </a:r>
+            <a:r>
+              <a:rPr sz="1400" b="0" dirty="0" err="1">
+                <a:solidFill>
+                  <a:srgbClr val="374151"/>
+                </a:solidFill>
+                <a:latin typeface="Pretendard"/>
+              </a:rPr>
+              <a:t>못</a:t>
+            </a:r>
+            <a:r>
+              <a:rPr sz="1400" b="0" dirty="0">
+                <a:solidFill>
+                  <a:srgbClr val="374151"/>
+                </a:solidFill>
+                <a:latin typeface="Pretendard"/>
+              </a:rPr>
+              <a:t> </a:t>
+            </a:r>
+            <a:r>
+              <a:rPr sz="1400" b="0" dirty="0" err="1">
+                <a:solidFill>
+                  <a:srgbClr val="374151"/>
+                </a:solidFill>
+                <a:latin typeface="Pretendard"/>
+              </a:rPr>
+              <a:t>함</a:t>
+            </a:r>
+            <a:endParaRPr sz="1400" b="0" dirty="0">
+              <a:solidFill>
+                <a:srgbClr val="374151"/>
+              </a:solidFill>
+              <a:latin typeface="Pretendard"/>
+            </a:endParaRPr>
           </a:p>
           <a:p>
             <a:pPr>
@@ -6690,14 +7244,38 @@
               </a:spcAft>
             </a:pPr>
             <a:r>
-              <a:rPr b="1" sz="1550">
+              <a:rPr sz="1550" b="1" dirty="0" err="1">
                 <a:solidFill>
                   <a:srgbClr val="1D4ED8"/>
                 </a:solidFill>
                 <a:latin typeface="Pretendard"/>
               </a:rPr>
-              <a:t>가설 기각</a:t>
-            </a:r>
+              <a:t>가설</a:t>
+            </a:r>
+            <a:r>
+              <a:rPr sz="1550" b="1" dirty="0">
+                <a:solidFill>
+                  <a:srgbClr val="1D4ED8"/>
+                </a:solidFill>
+                <a:latin typeface="Pretendard"/>
+              </a:rPr>
+              <a:t> </a:t>
+            </a:r>
+            <a:r>
+              <a:rPr sz="1550" b="1" dirty="0" err="1">
+                <a:solidFill>
+                  <a:srgbClr val="1D4ED8"/>
+                </a:solidFill>
+                <a:latin typeface="Pretendard"/>
+              </a:rPr>
+              <a:t>기각</a:t>
+            </a:r>
+            <a:endParaRPr sz="1550" b="1" dirty="0">
+              <a:solidFill>
+                <a:srgbClr val="1D4ED8"/>
+              </a:solidFill>
+              <a:latin typeface="Pretendard"/>
+            </a:endParaRPr>
           </a:p>
           <a:p>
             <a:pPr marL="274320" indent="-274320">
@@ -6711,14 +7289,47 @@
               <a:buChar char="•"/>
             </a:pPr>
             <a:r>
-              <a:rPr b="0" sz="1400">
-                <a:solidFill>
-                  <a:srgbClr val="374151"/>
-                </a:solidFill>
-                <a:latin typeface="Pretendard"/>
-              </a:rPr>
-              <a:t>'data-hungry' 가설 기각</a:t>
-            </a:r>
+              <a:rPr sz="1400" b="0" dirty="0">
+                <a:solidFill>
+                  <a:srgbClr val="374151"/>
+                </a:solidFill>
+                <a:latin typeface="Pretendard"/>
+              </a:rPr>
+              <a:t>data-hungry </a:t>
+            </a:r>
+            <a:r>
+              <a:rPr sz="1400" b="0" dirty="0" err="1">
+                <a:solidFill>
+                  <a:srgbClr val="374151"/>
+                </a:solidFill>
+                <a:latin typeface="Pretendard"/>
+              </a:rPr>
+              <a:t>가설</a:t>
+            </a:r>
+            <a:r>
+              <a:rPr sz="1400" b="0" dirty="0">
+                <a:solidFill>
+                  <a:srgbClr val="374151"/>
+                </a:solidFill>
+                <a:latin typeface="Pretendard"/>
+              </a:rPr>
+              <a:t> </a:t>
+            </a:r>
+            <a:r>
+              <a:rPr sz="1400" b="0" dirty="0" err="1">
+                <a:solidFill>
+                  <a:srgbClr val="374151"/>
+                </a:solidFill>
+                <a:latin typeface="Pretendard"/>
+              </a:rPr>
+              <a:t>기각</a:t>
+            </a:r>
+            <a:endParaRPr sz="1400" b="0" dirty="0">
+              <a:solidFill>
+                <a:srgbClr val="374151"/>
+              </a:solidFill>
+              <a:latin typeface="Pretendard"/>
+            </a:endParaRPr>
           </a:p>
           <a:p>
             <a:pPr marL="274320" indent="-274320">
@@ -6732,14 +7343,56 @@
               <a:buChar char="•"/>
             </a:pPr>
             <a:r>
-              <a:rPr b="0" sz="1400">
-                <a:solidFill>
-                  <a:srgbClr val="374151"/>
-                </a:solidFill>
-                <a:latin typeface="Pretendard"/>
-              </a:rPr>
-              <a:t>전 구간에서 Transformer 우위</a:t>
-            </a:r>
+              <a:rPr sz="1400" b="1" dirty="0" err="1">
+                <a:solidFill>
+                  <a:srgbClr val="374151"/>
+                </a:solidFill>
+                <a:latin typeface="Pretendard"/>
+              </a:rPr>
+              <a:t>전</a:t>
+            </a:r>
+            <a:r>
+              <a:rPr sz="1400" b="1" dirty="0">
+                <a:solidFill>
+                  <a:srgbClr val="374151"/>
+                </a:solidFill>
+                <a:latin typeface="Pretendard"/>
+              </a:rPr>
+              <a:t> </a:t>
+            </a:r>
+            <a:r>
+              <a:rPr sz="1400" b="1" dirty="0" err="1">
+                <a:solidFill>
+                  <a:srgbClr val="374151"/>
+                </a:solidFill>
+                <a:latin typeface="Pretendard"/>
+              </a:rPr>
+              <a:t>구간에서</a:t>
+            </a:r>
+            <a:r>
+              <a:rPr sz="1400" b="1" dirty="0">
+                <a:solidFill>
+                  <a:srgbClr val="374151"/>
+                </a:solidFill>
+                <a:latin typeface="Pretendard"/>
+              </a:rPr>
+              <a:t> Transformer </a:t>
+            </a:r>
+            <a:r>
+              <a:rPr sz="1400" b="1" dirty="0" err="1">
+                <a:solidFill>
+                  <a:srgbClr val="374151"/>
+                </a:solidFill>
+                <a:latin typeface="Pretendard"/>
+              </a:rPr>
+              <a:t>우위</a:t>
+            </a:r>
+            <a:endParaRPr sz="1400" b="1" dirty="0">
+              <a:solidFill>
+                <a:srgbClr val="374151"/>
+              </a:solidFill>
+              <a:latin typeface="Pretendard"/>
+            </a:endParaRPr>
           </a:p>
         </p:txBody>
       </p:sp>
@@ -6760,14 +7413,14 @@
           <a:noFill/>
         </p:spPr>
         <p:txBody>
-          <a:bodyPr wrap="square" lIns="0" rIns="0" tIns="0" bIns="0" anchor="t">
+          <a:bodyPr wrap="square" lIns="0" tIns="0" rIns="0" bIns="0" anchor="t">
             <a:spAutoFit/>
           </a:bodyPr>
           <a:lstStyle/>
           <a:p>
             <a:pPr algn="r"/>
             <a:r>
-              <a:rPr b="0" sz="950">
+              <a:rPr sz="950" b="0">
                 <a:solidFill>
                   <a:srgbClr val="AAB2BD"/>
                 </a:solidFill>
@@ -6787,7 +7440,7 @@
 </file>
 
 <file path=ppt/slides/slide9.xml><?xml version="1.0" encoding="utf-8"?>
-<p:sld xmlns:a="http://schemas.openxmlformats.org/drawingml/2006/main" xmlns:p="http://schemas.openxmlformats.org/presentationml/2006/main" xmlns:r="http://schemas.openxmlformats.org/officeDocument/2006/relationships">
+<p:sld xmlns:a="http://schemas.openxmlformats.org/drawingml/2006/main" xmlns:r="http://schemas.openxmlformats.org/officeDocument/2006/relationships" xmlns:p="http://schemas.openxmlformats.org/presentationml/2006/main">
   <p:cSld>
     <p:spTree>
       <p:nvGrpSpPr>
@@ -6795,7 +7448,14 @@
         <p:cNvGrpSpPr/>
         <p:nvPr/>
       </p:nvGrpSpPr>
-      <p:grpSpPr/>
+      <p:grpSpPr>
+        <a:xfrm>
+          <a:off x="0" y="0"/>
+          <a:ext cx="0" cy="0"/>
+          <a:chOff x="0" y="0"/>
+          <a:chExt cx="0" cy="0"/>
+        </a:xfrm>
+      </p:grpSpPr>
       <p:sp>
         <p:nvSpPr>
           <p:cNvPr id="2" name="TextBox 1"/>
@@ -6813,73 +7473,37 @@
           <a:noFill/>
         </p:spPr>
         <p:txBody>
-          <a:bodyPr wrap="square" lIns="0" rIns="0" tIns="0" bIns="0" anchor="t">
+          <a:bodyPr wrap="square" lIns="0" tIns="0" rIns="0" bIns="0" anchor="t">
             <a:spAutoFit/>
           </a:bodyPr>
           <a:lstStyle/>
           <a:p>
             <a:r>
-              <a:rPr b="0" sz="1250">
+              <a:rPr sz="1250" b="0">
                 <a:solidFill>
                   <a:srgbClr val="BFC6D0"/>
                 </a:solidFill>
                 <a:latin typeface="Pretendard"/>
               </a:rPr>
-              <a:t>배경</a:t>
-            </a:r>
-            <a:r>
-              <a:rPr b="0" sz="1250">
+              <a:t>배경     방법     </a:t>
+            </a:r>
+            <a:r>
+              <a:rPr sz="1250" b="1">
+                <a:solidFill>
+                  <a:srgbClr val="1D4ED8"/>
+                </a:solidFill>
+                <a:latin typeface="Pretendard"/>
+              </a:rPr>
+              <a:t>결과</a:t>
+            </a:r>
+            <a:r>
+              <a:rPr sz="1250" b="0">
                 <a:solidFill>
                   <a:srgbClr val="BFC6D0"/>
                 </a:solidFill>
                 <a:latin typeface="Pretendard"/>
               </a:rPr>
-              <a:t>     </a:t>
-            </a:r>
-            <a:r>
-              <a:rPr b="0" sz="1250">
-                <a:solidFill>
-                  <a:srgbClr val="BFC6D0"/>
-                </a:solidFill>
-                <a:latin typeface="Pretendard"/>
-              </a:rPr>
-              <a:t>방법</a:t>
-            </a:r>
-            <a:r>
-              <a:rPr b="0" sz="1250">
-                <a:solidFill>
-                  <a:srgbClr val="BFC6D0"/>
-                </a:solidFill>
-                <a:latin typeface="Pretendard"/>
-              </a:rPr>
-              <a:t>     </a:t>
-            </a:r>
-            <a:r>
-              <a:rPr b="1" sz="1250">
-                <a:solidFill>
-                  <a:srgbClr val="1D4ED8"/>
-                </a:solidFill>
-                <a:latin typeface="Pretendard"/>
-              </a:rPr>
-              <a:t>결과</a:t>
-            </a:r>
-            <a:r>
-              <a:rPr b="0" sz="1250">
-                <a:solidFill>
-                  <a:srgbClr val="BFC6D0"/>
-                </a:solidFill>
-                <a:latin typeface="Pretendard"/>
-              </a:rPr>
-              <a:t>     </a:t>
-            </a:r>
-            <a:r>
-              <a:rPr b="0" sz="1250">
-                <a:solidFill>
-                  <a:srgbClr val="BFC6D0"/>
-                </a:solidFill>
-                <a:latin typeface="Pretendard"/>
-              </a:rPr>
-              <a:t>결론</a:t>
+              <a:t>     결론</a:t>
             </a:r>
           </a:p>
         </p:txBody>
@@ -6901,7 +7525,7 @@
           <a:noFill/>
         </p:spPr>
         <p:txBody>
-          <a:bodyPr wrap="square" lIns="0" rIns="0" tIns="0" bIns="0" anchor="t">
+          <a:bodyPr wrap="square" lIns="0" tIns="0" rIns="0" bIns="0" anchor="t">
             <a:spAutoFit/>
           </a:bodyPr>
           <a:lstStyle/>
@@ -6912,7 +7536,7 @@
               </a:lnSpc>
             </a:pPr>
             <a:r>
-              <a:rPr b="1" sz="2100">
+              <a:rPr sz="2100" b="1">
                 <a:solidFill>
                   <a:srgbClr val="111827"/>
                 </a:solidFill>
@@ -6921,20 +7545,138 @@
               <a:t>bag-of-words 과제, 격차는 </a:t>
             </a:r>
             <a:r>
-              <a:rPr b="1" sz="2100">
+              <a:rPr sz="2100" b="1">
                 <a:solidFill>
                   <a:srgbClr val="1D4ED8"/>
                 </a:solidFill>
                 <a:latin typeface="Pretendard"/>
               </a:rPr>
               <a:t>순서가 아닌 robustness</a:t>
+            </a:r>
+          </a:p>
+        </p:txBody>
+      </p:sp>
+      <p:sp>
+        <p:nvSpPr>
+          <p:cNvPr id="4" name="TextBox 3"/>
+          <p:cNvSpPr txBox="1"/>
+          <p:nvPr/>
+        </p:nvSpPr>
+        <p:spPr>
+          <a:xfrm>
+            <a:off x="457200" y="1280160"/>
+            <a:ext cx="11277295" cy="663130"/>
+          </a:xfrm>
+          <a:prstGeom prst="rect">
+            <a:avLst/>
+          </a:prstGeom>
+          <a:noFill/>
+        </p:spPr>
+        <p:txBody>
+          <a:bodyPr wrap="square" lIns="0" tIns="0" rIns="0" bIns="0" anchor="t">
+            <a:spAutoFit/>
+          </a:bodyPr>
+          <a:lstStyle/>
+          <a:p>
+            <a:pPr algn="ctr">
+              <a:lnSpc>
+                <a:spcPct val="118000"/>
+              </a:lnSpc>
+            </a:pPr>
+            <a:r>
+              <a:rPr lang="en-US" sz="1250" dirty="0">
+                <a:solidFill>
+                  <a:srgbClr val="6B7280"/>
+                </a:solidFill>
+                <a:latin typeface="Pretendard"/>
+              </a:rPr>
+              <a:t>I</a:t>
+            </a:r>
+            <a:r>
+              <a:rPr lang="en-US" sz="1250" b="0" dirty="0">
+                <a:solidFill>
+                  <a:srgbClr val="6B7280"/>
+                </a:solidFill>
+                <a:latin typeface="Pretendard"/>
+              </a:rPr>
+              <a:t>nput:</a:t>
+            </a:r>
+            <a:r>
+              <a:rPr sz="1250" b="0" dirty="0">
+                <a:solidFill>
+                  <a:srgbClr val="6B7280"/>
+                </a:solidFill>
+                <a:latin typeface="Pretendard"/>
+              </a:rPr>
+              <a:t> (label: </a:t>
+            </a:r>
+            <a:r>
+              <a:rPr sz="1250" b="1" dirty="0">
+                <a:solidFill>
+                  <a:srgbClr val="1D4ED8"/>
+                </a:solidFill>
+                <a:latin typeface="Pretendard"/>
+              </a:rPr>
+              <a:t>Sports</a:t>
+            </a:r>
+            <a:r>
+              <a:rPr sz="1250" b="0" dirty="0">
+                <a:solidFill>
+                  <a:srgbClr val="6B7280"/>
+                </a:solidFill>
+                <a:latin typeface="Pretendard"/>
+              </a:rPr>
+              <a:t>)  </a:t>
+            </a:r>
+            <a:br>
+              <a:rPr lang="en-US" sz="1250" b="0" dirty="0">
+                <a:solidFill>
+                  <a:srgbClr val="6B7280"/>
+                </a:solidFill>
+                <a:latin typeface="Pretendard"/>
+              </a:rPr>
+            </a:br>
+            <a:r>
+              <a:rPr sz="1250" b="0" dirty="0">
+                <a:solidFill>
+                  <a:srgbClr val="6B7280"/>
+                </a:solidFill>
+                <a:latin typeface="Pretendard"/>
+              </a:rPr>
+              <a:t> </a:t>
+            </a:r>
+            <a:r>
+              <a:rPr sz="1250" b="0" dirty="0">
+                <a:solidFill>
+                  <a:srgbClr val="374151"/>
+                </a:solidFill>
+                <a:latin typeface="Pretendard"/>
+              </a:rPr>
+              <a:t>"Giddy Phelps Touches Gold for First Time</a:t>
+            </a:r>
+            <a:br>
+              <a:rPr lang="en-US" sz="1250" b="0" dirty="0">
+                <a:solidFill>
+                  <a:srgbClr val="374151"/>
+                </a:solidFill>
+                <a:latin typeface="Pretendard"/>
+              </a:rPr>
+            </a:br>
+            <a:r>
+              <a:rPr sz="1250" b="0" dirty="0">
+                <a:solidFill>
+                  <a:srgbClr val="374151"/>
+                </a:solidFill>
+                <a:latin typeface="Pretendard"/>
+              </a:rPr>
+              <a:t>Michael Phelps won the gold medal in the 400 individual medley and set a world record in a time of 4 minutes 8.26 seconds."</a:t>
             </a:r>
           </a:p>
         </p:txBody>
       </p:sp>
       <p:pic>
         <p:nvPicPr>
-          <p:cNvPr id="4" name="Picture 3" descr="fig_mechanism.png"/>
+          <p:cNvPr id="5" name="Picture 4" descr="fig_mechanism.png"/>
           <p:cNvPicPr>
             <a:picLocks noChangeAspect="1"/>
           </p:cNvPicPr>
@@ -6948,8 +7690,8 @@
         </p:blipFill>
         <p:spPr>
           <a:xfrm>
-            <a:off x="1487984" y="1325880"/>
-            <a:ext cx="9215725" cy="3291840"/>
+            <a:off x="1481959" y="2043874"/>
+            <a:ext cx="9227776" cy="3296144"/>
           </a:xfrm>
           <a:prstGeom prst="rect">
             <a:avLst/>
@@ -6958,14 +7700,14 @@
       </p:pic>
       <p:sp>
         <p:nvSpPr>
-          <p:cNvPr id="5" name="TextBox 4"/>
+          <p:cNvPr id="6" name="TextBox 5"/>
           <p:cNvSpPr txBox="1"/>
           <p:nvPr/>
         </p:nvSpPr>
         <p:spPr>
           <a:xfrm>
-            <a:off x="457200" y="4800600"/>
-            <a:ext cx="11277295" cy="1463040"/>
+            <a:off x="457200" y="5622393"/>
+            <a:ext cx="11277295" cy="1417320"/>
           </a:xfrm>
           <a:prstGeom prst="rect">
             <a:avLst/>
@@ -6973,7 +7715,7 @@
           <a:noFill/>
         </p:spPr>
         <p:txBody>
-          <a:bodyPr wrap="square" lIns="0" rIns="0" tIns="0" bIns="0" anchor="t">
+          <a:bodyPr wrap="square" lIns="0" tIns="0" rIns="0" bIns="0" anchor="t">
             <a:spAutoFit/>
           </a:bodyPr>
           <a:lstStyle/>
@@ -6989,7 +7731,7 @@
               <a:buChar char="•"/>
             </a:pPr>
             <a:r>
-              <a:rPr b="1" sz="1400">
+              <a:rPr sz="1400" b="1" dirty="0">
                 <a:solidFill>
                   <a:srgbClr val="111827"/>
                 </a:solidFill>
@@ -6998,14 +7740,101 @@
               <a:t>PE on/off</a:t>
             </a:r>
             <a:r>
-              <a:rPr b="0" sz="1400">
-                <a:solidFill>
-                  <a:srgbClr val="374151"/>
-                </a:solidFill>
-                <a:latin typeface="Pretendard"/>
-              </a:rPr>
-              <a:t>  with-PE 0.910 vs no-PE 0.911 (차이 -0.001) → 순서 정보가 거의 불필요</a:t>
-            </a:r>
+              <a:rPr sz="1400" b="0" dirty="0">
+                <a:solidFill>
+                  <a:srgbClr val="374151"/>
+                </a:solidFill>
+                <a:latin typeface="Pretendard"/>
+              </a:rPr>
+              <a:t>  with-PE 0.910 vs no-PE 0.911 (</a:t>
+            </a:r>
+            <a:r>
+              <a:rPr sz="1400" b="0" dirty="0" err="1">
+                <a:solidFill>
+                  <a:srgbClr val="374151"/>
+                </a:solidFill>
+                <a:latin typeface="Pretendard"/>
+              </a:rPr>
+              <a:t>차이</a:t>
+            </a:r>
+            <a:r>
+              <a:rPr sz="1400" b="0" dirty="0">
+                <a:solidFill>
+                  <a:srgbClr val="374151"/>
+                </a:solidFill>
+                <a:latin typeface="Pretendard"/>
+              </a:rPr>
+              <a:t> -0.001), </a:t>
+            </a:r>
+            <a:r>
+              <a:rPr sz="1400" b="0" dirty="0" err="1">
+                <a:solidFill>
+                  <a:srgbClr val="374151"/>
+                </a:solidFill>
+                <a:latin typeface="Pretendard"/>
+              </a:rPr>
+              <a:t>순서</a:t>
+            </a:r>
+            <a:r>
+              <a:rPr sz="1400" b="0" dirty="0">
+                <a:solidFill>
+                  <a:srgbClr val="374151"/>
+                </a:solidFill>
+                <a:latin typeface="Pretendard"/>
+              </a:rPr>
+              <a:t> </a:t>
+            </a:r>
+            <a:r>
+              <a:rPr sz="1400" b="0" dirty="0" err="1">
+                <a:solidFill>
+                  <a:srgbClr val="374151"/>
+                </a:solidFill>
+                <a:latin typeface="Pretendard"/>
+              </a:rPr>
+              <a:t>정보가</a:t>
+            </a:r>
+            <a:r>
+              <a:rPr sz="1400" b="0" dirty="0">
+                <a:solidFill>
+                  <a:srgbClr val="374151"/>
+                </a:solidFill>
+                <a:latin typeface="Pretendard"/>
+              </a:rPr>
+              <a:t> </a:t>
+            </a:r>
+            <a:r>
+              <a:rPr sz="1400" b="0" dirty="0" err="1">
+                <a:solidFill>
+                  <a:srgbClr val="374151"/>
+                </a:solidFill>
+                <a:latin typeface="Pretendard"/>
+              </a:rPr>
+              <a:t>거의</a:t>
+            </a:r>
+            <a:r>
+              <a:rPr sz="1400" b="0" dirty="0">
+                <a:solidFill>
+                  <a:srgbClr val="374151"/>
+                </a:solidFill>
+                <a:latin typeface="Pretendard"/>
+              </a:rPr>
+              <a:t> </a:t>
+            </a:r>
+            <a:r>
+              <a:rPr sz="1400" b="0" dirty="0" err="1">
+                <a:solidFill>
+                  <a:srgbClr val="374151"/>
+                </a:solidFill>
+                <a:latin typeface="Pretendard"/>
+              </a:rPr>
+              <a:t>불필요</a:t>
+            </a:r>
+            <a:endParaRPr sz="1400" b="0" dirty="0">
+              <a:solidFill>
+                <a:srgbClr val="374151"/>
+              </a:solidFill>
+              <a:latin typeface="Pretendard"/>
+            </a:endParaRPr>
           </a:p>
           <a:p>
             <a:pPr marL="274320" indent="-274320">
@@ -7019,7 +7848,7 @@
               <a:buChar char="•"/>
             </a:pPr>
             <a:r>
-              <a:rPr b="1" sz="1400">
+              <a:rPr sz="1400" b="1" dirty="0">
                 <a:solidFill>
                   <a:srgbClr val="111827"/>
                 </a:solidFill>
@@ -7028,20 +7857,233 @@
               <a:t>robustness</a:t>
             </a:r>
             <a:r>
-              <a:rPr b="0" sz="1400">
-                <a:solidFill>
-                  <a:srgbClr val="374151"/>
-                </a:solidFill>
-                <a:latin typeface="Pretendard"/>
-              </a:rPr>
-              <a:t>  LSTM은 비주제어 'giddy'에 쏠려 오답, Transformer는 주제 토큰에 분산해 정답</a:t>
-            </a:r>
-          </a:p>
-        </p:txBody>
-      </p:sp>
-      <p:sp>
-        <p:nvSpPr>
-          <p:cNvPr id="6" name="TextBox 5"/>
+              <a:rPr sz="1400" b="0" dirty="0">
+                <a:solidFill>
+                  <a:srgbClr val="374151"/>
+                </a:solidFill>
+                <a:latin typeface="Pretendard"/>
+              </a:rPr>
+              <a:t>  </a:t>
+            </a:r>
+            <a:r>
+              <a:rPr sz="1400" b="0" dirty="0" err="1">
+                <a:solidFill>
+                  <a:srgbClr val="374151"/>
+                </a:solidFill>
+                <a:latin typeface="Pretendard"/>
+              </a:rPr>
+              <a:t>LSTM은</a:t>
+            </a:r>
+            <a:r>
+              <a:rPr sz="1400" b="0" dirty="0">
+                <a:solidFill>
+                  <a:srgbClr val="374151"/>
+                </a:solidFill>
+                <a:latin typeface="Pretendard"/>
+              </a:rPr>
+              <a:t> </a:t>
+            </a:r>
+            <a:r>
+              <a:rPr sz="1400" b="0" dirty="0" err="1">
+                <a:solidFill>
+                  <a:srgbClr val="374151"/>
+                </a:solidFill>
+                <a:latin typeface="Pretendard"/>
+              </a:rPr>
+              <a:t>비주제어</a:t>
+            </a:r>
+            <a:r>
+              <a:rPr sz="1400" b="0" dirty="0">
+                <a:solidFill>
+                  <a:srgbClr val="374151"/>
+                </a:solidFill>
+                <a:latin typeface="Pretendard"/>
+              </a:rPr>
+              <a:t> '</a:t>
+            </a:r>
+            <a:r>
+              <a:rPr sz="1400" b="0" dirty="0" err="1">
+                <a:solidFill>
+                  <a:srgbClr val="374151"/>
+                </a:solidFill>
+                <a:latin typeface="Pretendard"/>
+              </a:rPr>
+              <a:t>giddy'에</a:t>
+            </a:r>
+            <a:r>
+              <a:rPr sz="1400" b="0" dirty="0">
+                <a:solidFill>
+                  <a:srgbClr val="374151"/>
+                </a:solidFill>
+                <a:latin typeface="Pretendard"/>
+              </a:rPr>
+              <a:t> </a:t>
+            </a:r>
+            <a:r>
+              <a:rPr sz="1400" b="0" dirty="0" err="1">
+                <a:solidFill>
+                  <a:srgbClr val="374151"/>
+                </a:solidFill>
+                <a:latin typeface="Pretendard"/>
+              </a:rPr>
+              <a:t>의존해</a:t>
+            </a:r>
+            <a:r>
+              <a:rPr sz="1400" b="0" dirty="0">
+                <a:solidFill>
+                  <a:srgbClr val="374151"/>
+                </a:solidFill>
+                <a:latin typeface="Pretendard"/>
+              </a:rPr>
+              <a:t> </a:t>
+            </a:r>
+            <a:r>
+              <a:rPr sz="1400" b="0" dirty="0" err="1">
+                <a:solidFill>
+                  <a:srgbClr val="374151"/>
+                </a:solidFill>
+                <a:latin typeface="Pretendard"/>
+              </a:rPr>
+              <a:t>오분류</a:t>
+            </a:r>
+            <a:r>
+              <a:rPr sz="1400" b="0" dirty="0">
+                <a:solidFill>
+                  <a:srgbClr val="374151"/>
+                </a:solidFill>
+                <a:latin typeface="Pretendard"/>
+              </a:rPr>
+              <a:t>, </a:t>
+            </a:r>
+            <a:r>
+              <a:rPr sz="1400" b="0" dirty="0" err="1">
+                <a:solidFill>
+                  <a:srgbClr val="374151"/>
+                </a:solidFill>
+                <a:latin typeface="Pretendard"/>
+              </a:rPr>
+              <a:t>Transformer는</a:t>
+            </a:r>
+            <a:r>
+              <a:rPr sz="1400" b="0" dirty="0">
+                <a:solidFill>
+                  <a:srgbClr val="374151"/>
+                </a:solidFill>
+                <a:latin typeface="Pretendard"/>
+              </a:rPr>
+              <a:t> </a:t>
+            </a:r>
+            <a:r>
+              <a:rPr sz="1400" b="0" dirty="0" err="1">
+                <a:solidFill>
+                  <a:srgbClr val="374151"/>
+                </a:solidFill>
+                <a:latin typeface="Pretendard"/>
+              </a:rPr>
+              <a:t>주제</a:t>
+            </a:r>
+            <a:r>
+              <a:rPr sz="1400" b="0" dirty="0">
+                <a:solidFill>
+                  <a:srgbClr val="374151"/>
+                </a:solidFill>
+                <a:latin typeface="Pretendard"/>
+              </a:rPr>
+              <a:t> </a:t>
+            </a:r>
+            <a:r>
+              <a:rPr sz="1400" b="0" dirty="0" err="1">
+                <a:solidFill>
+                  <a:srgbClr val="374151"/>
+                </a:solidFill>
+                <a:latin typeface="Pretendard"/>
+              </a:rPr>
+              <a:t>토큰에</a:t>
+            </a:r>
+            <a:r>
+              <a:rPr sz="1400" b="0" dirty="0">
+                <a:solidFill>
+                  <a:srgbClr val="374151"/>
+                </a:solidFill>
+                <a:latin typeface="Pretendard"/>
+              </a:rPr>
+              <a:t> </a:t>
+            </a:r>
+            <a:r>
+              <a:rPr sz="1400" b="0" dirty="0" err="1">
+                <a:solidFill>
+                  <a:srgbClr val="374151"/>
+                </a:solidFill>
+                <a:latin typeface="Pretendard"/>
+              </a:rPr>
+              <a:t>근거를</a:t>
+            </a:r>
+            <a:r>
+              <a:rPr sz="1400" b="0" dirty="0">
+                <a:solidFill>
+                  <a:srgbClr val="374151"/>
+                </a:solidFill>
+                <a:latin typeface="Pretendard"/>
+              </a:rPr>
+              <a:t> </a:t>
+            </a:r>
+            <a:r>
+              <a:rPr sz="1400" b="0" dirty="0" err="1">
+                <a:solidFill>
+                  <a:srgbClr val="374151"/>
+                </a:solidFill>
+                <a:latin typeface="Pretendard"/>
+              </a:rPr>
+              <a:t>분산해</a:t>
+            </a:r>
+            <a:r>
+              <a:rPr sz="1400" b="0" dirty="0">
+                <a:solidFill>
+                  <a:srgbClr val="374151"/>
+                </a:solidFill>
+                <a:latin typeface="Pretendard"/>
+              </a:rPr>
+              <a:t> </a:t>
+            </a:r>
+            <a:r>
+              <a:rPr sz="1400" b="0" dirty="0" err="1">
+                <a:solidFill>
+                  <a:srgbClr val="374151"/>
+                </a:solidFill>
+                <a:latin typeface="Pretendard"/>
+              </a:rPr>
+              <a:t>정확히</a:t>
+            </a:r>
+            <a:r>
+              <a:rPr sz="1400" b="0" dirty="0">
+                <a:solidFill>
+                  <a:srgbClr val="374151"/>
+                </a:solidFill>
+                <a:latin typeface="Pretendard"/>
+              </a:rPr>
+              <a:t> </a:t>
+            </a:r>
+            <a:r>
+              <a:rPr sz="1400" b="0" dirty="0" err="1">
+                <a:solidFill>
+                  <a:srgbClr val="374151"/>
+                </a:solidFill>
+                <a:latin typeface="Pretendard"/>
+              </a:rPr>
+              <a:t>분류</a:t>
+            </a:r>
+            <a:endParaRPr sz="1400" b="0" dirty="0">
+              <a:solidFill>
+                <a:srgbClr val="374151"/>
+              </a:solidFill>
+              <a:latin typeface="Pretendard"/>
+            </a:endParaRPr>
+          </a:p>
+        </p:txBody>
+      </p:sp>
+      <p:sp>
+        <p:nvSpPr>
+          <p:cNvPr id="7" name="TextBox 6"/>
           <p:cNvSpPr txBox="1"/>
           <p:nvPr/>
         </p:nvSpPr>
@@ -7056,14 +8098,14 @@
           <a:noFill/>
         </p:spPr>
         <p:txBody>
-          <a:bodyPr wrap="square" lIns="0" rIns="0" tIns="0" bIns="0" anchor="t">
+          <a:bodyPr wrap="square" lIns="0" tIns="0" rIns="0" bIns="0" anchor="t">
             <a:spAutoFit/>
           </a:bodyPr>
           <a:lstStyle/>
           <a:p>
             <a:pPr algn="r"/>
             <a:r>
-              <a:rPr b="0" sz="950">
+              <a:rPr sz="950" b="0">
                 <a:solidFill>
                   <a:srgbClr val="AAB2BD"/>
                 </a:solidFill>
